--- a/LabBook_020.pptx
+++ b/LabBook_020.pptx
@@ -5,17 +5,19 @@
     <p:sldMasterId id="2147483648" r:id="rId1"/>
   </p:sldMasterIdLst>
   <p:notesMasterIdLst>
-    <p:notesMasterId r:id="rId7"/>
+    <p:notesMasterId r:id="rId9"/>
   </p:notesMasterIdLst>
   <p:handoutMasterIdLst>
-    <p:handoutMasterId r:id="rId8"/>
+    <p:handoutMasterId r:id="rId10"/>
   </p:handoutMasterIdLst>
   <p:sldIdLst>
     <p:sldId id="256" r:id="rId2"/>
     <p:sldId id="289" r:id="rId3"/>
     <p:sldId id="290" r:id="rId4"/>
-    <p:sldId id="293" r:id="rId5"/>
-    <p:sldId id="288" r:id="rId6"/>
+    <p:sldId id="296" r:id="rId5"/>
+    <p:sldId id="293" r:id="rId6"/>
+    <p:sldId id="297" r:id="rId7"/>
+    <p:sldId id="288" r:id="rId8"/>
   </p:sldIdLst>
   <p:sldSz cx="12192000" cy="6858000"/>
   <p:notesSz cx="12192000" cy="6858000"/>
@@ -297,7 +299,7 @@
           <a:p>
             <a:fld id="{8438F8DC-35B0-48E6-A86E-42F1F08DD00F}" type="datetimeFigureOut">
               <a:rPr lang="es-ES" smtClean="0"/>
-              <a:t>03/02/2026</a:t>
+              <a:t>16/02/2026</a:t>
             </a:fld>
             <a:endParaRPr lang="es-ES"/>
           </a:p>
@@ -375,7 +377,7 @@
           <a:p>
             <a:fld id="{4116A549-763A-4A89-A454-A94BAF51395E}" type="slidenum">
               <a:rPr lang="es-ES" smtClean="0"/>
-              <a:t>‹Nº›</a:t>
+              <a:t>‹#›</a:t>
             </a:fld>
             <a:endParaRPr lang="es-ES"/>
           </a:p>
@@ -474,7 +476,7 @@
           <a:p>
             <a:fld id="{FACBDC12-F39B-4B97-8F4D-6734F9D366FF}" type="datetimeFigureOut">
               <a:rPr lang="es-ES" smtClean="0"/>
-              <a:t>03/02/2026</a:t>
+              <a:t>16/02/2026</a:t>
             </a:fld>
             <a:endParaRPr lang="es-ES"/>
           </a:p>
@@ -632,7 +634,7 @@
           <a:p>
             <a:fld id="{676223B9-C868-4436-87D9-1A3152E1157A}" type="slidenum">
               <a:rPr lang="es-ES" smtClean="0"/>
-              <a:t>‹Nº›</a:t>
+              <a:t>‹#›</a:t>
             </a:fld>
             <a:endParaRPr lang="es-ES"/>
           </a:p>
@@ -833,6 +835,114 @@
         <p:cNvPr id="1" name="">
           <a:extLst>
             <a:ext uri="{FF2B5EF4-FFF2-40B4-BE49-F238E27FC236}">
+              <a16:creationId xmlns:a16="http://schemas.microsoft.com/office/drawing/2014/main" id="{2D21D658-1FE6-DCEF-58BF-A021BE2ABA0E}"/>
+            </a:ext>
+          </a:extLst>
+        </p:cNvPr>
+        <p:cNvGrpSpPr/>
+        <p:nvPr/>
+      </p:nvGrpSpPr>
+      <p:grpSpPr>
+        <a:xfrm>
+          <a:off x="0" y="0"/>
+          <a:ext cx="0" cy="0"/>
+          <a:chOff x="0" y="0"/>
+          <a:chExt cx="0" cy="0"/>
+        </a:xfrm>
+      </p:grpSpPr>
+      <p:sp>
+        <p:nvSpPr>
+          <p:cNvPr id="2" name="Marcador de imagen de diapositiva 1">
+            <a:extLst>
+              <a:ext uri="{FF2B5EF4-FFF2-40B4-BE49-F238E27FC236}">
+                <a16:creationId xmlns:a16="http://schemas.microsoft.com/office/drawing/2014/main" id="{2523012C-9C0B-76FB-DF54-C863CE3B7F22}"/>
+              </a:ext>
+            </a:extLst>
+          </p:cNvPr>
+          <p:cNvSpPr>
+            <a:spLocks noGrp="1" noRot="1" noChangeAspect="1"/>
+          </p:cNvSpPr>
+          <p:nvPr>
+            <p:ph type="sldImg"/>
+          </p:nvPr>
+        </p:nvSpPr>
+        <p:spPr/>
+      </p:sp>
+      <p:sp>
+        <p:nvSpPr>
+          <p:cNvPr id="3" name="Marcador de notas 2">
+            <a:extLst>
+              <a:ext uri="{FF2B5EF4-FFF2-40B4-BE49-F238E27FC236}">
+                <a16:creationId xmlns:a16="http://schemas.microsoft.com/office/drawing/2014/main" id="{BAB4991A-515A-E548-6334-7136C627323D}"/>
+              </a:ext>
+            </a:extLst>
+          </p:cNvPr>
+          <p:cNvSpPr>
+            <a:spLocks noGrp="1"/>
+          </p:cNvSpPr>
+          <p:nvPr>
+            <p:ph type="body" idx="1"/>
+          </p:nvPr>
+        </p:nvSpPr>
+        <p:spPr/>
+        <p:txBody>
+          <a:bodyPr/>
+          <a:lstStyle/>
+          <a:p>
+            <a:endParaRPr lang="es-ES" dirty="0"/>
+          </a:p>
+        </p:txBody>
+      </p:sp>
+      <p:sp>
+        <p:nvSpPr>
+          <p:cNvPr id="4" name="Marcador de número de diapositiva 3">
+            <a:extLst>
+              <a:ext uri="{FF2B5EF4-FFF2-40B4-BE49-F238E27FC236}">
+                <a16:creationId xmlns:a16="http://schemas.microsoft.com/office/drawing/2014/main" id="{B10E62ED-AAE9-DA2E-75EA-F3CF5E20E888}"/>
+              </a:ext>
+            </a:extLst>
+          </p:cNvPr>
+          <p:cNvSpPr>
+            <a:spLocks noGrp="1"/>
+          </p:cNvSpPr>
+          <p:nvPr>
+            <p:ph type="sldNum" sz="quarter" idx="5"/>
+          </p:nvPr>
+        </p:nvSpPr>
+        <p:spPr/>
+        <p:txBody>
+          <a:bodyPr/>
+          <a:lstStyle/>
+          <a:p>
+            <a:fld id="{676223B9-C868-4436-87D9-1A3152E1157A}" type="slidenum">
+              <a:rPr lang="es-ES" smtClean="0"/>
+              <a:t>4</a:t>
+            </a:fld>
+            <a:endParaRPr lang="es-ES"/>
+          </a:p>
+        </p:txBody>
+      </p:sp>
+    </p:spTree>
+    <p:extLst>
+      <p:ext uri="{BB962C8B-B14F-4D97-AF65-F5344CB8AC3E}">
+        <p14:creationId xmlns:p14="http://schemas.microsoft.com/office/powerpoint/2010/main" val="3631978370"/>
+      </p:ext>
+    </p:extLst>
+  </p:cSld>
+  <p:clrMapOvr>
+    <a:masterClrMapping/>
+  </p:clrMapOvr>
+</p:notes>
+</file>
+
+<file path=ppt/notesSlides/notesSlide3.xml><?xml version="1.0" encoding="utf-8"?>
+<p:notes xmlns:a="http://schemas.openxmlformats.org/drawingml/2006/main" xmlns:r="http://schemas.openxmlformats.org/officeDocument/2006/relationships" xmlns:p="http://schemas.openxmlformats.org/presentationml/2006/main">
+  <p:cSld>
+    <p:spTree>
+      <p:nvGrpSpPr>
+        <p:cNvPr id="1" name="">
+          <a:extLst>
+            <a:ext uri="{FF2B5EF4-FFF2-40B4-BE49-F238E27FC236}">
               <a16:creationId xmlns:a16="http://schemas.microsoft.com/office/drawing/2014/main" id="{7B023B86-D15F-9CD8-C5EA-3EAAD8BACCF7}"/>
             </a:ext>
           </a:extLst>
@@ -914,7 +1024,7 @@
           <a:p>
             <a:fld id="{676223B9-C868-4436-87D9-1A3152E1157A}" type="slidenum">
               <a:rPr lang="es-ES" smtClean="0"/>
-              <a:t>4</a:t>
+              <a:t>5</a:t>
             </a:fld>
             <a:endParaRPr lang="es-ES"/>
           </a:p>
@@ -924,6 +1034,114 @@
     <p:extLst>
       <p:ext uri="{BB962C8B-B14F-4D97-AF65-F5344CB8AC3E}">
         <p14:creationId xmlns:p14="http://schemas.microsoft.com/office/powerpoint/2010/main" val="2917382716"/>
+      </p:ext>
+    </p:extLst>
+  </p:cSld>
+  <p:clrMapOvr>
+    <a:masterClrMapping/>
+  </p:clrMapOvr>
+</p:notes>
+</file>
+
+<file path=ppt/notesSlides/notesSlide4.xml><?xml version="1.0" encoding="utf-8"?>
+<p:notes xmlns:a="http://schemas.openxmlformats.org/drawingml/2006/main" xmlns:r="http://schemas.openxmlformats.org/officeDocument/2006/relationships" xmlns:p="http://schemas.openxmlformats.org/presentationml/2006/main">
+  <p:cSld>
+    <p:spTree>
+      <p:nvGrpSpPr>
+        <p:cNvPr id="1" name="">
+          <a:extLst>
+            <a:ext uri="{FF2B5EF4-FFF2-40B4-BE49-F238E27FC236}">
+              <a16:creationId xmlns:a16="http://schemas.microsoft.com/office/drawing/2014/main" id="{06EEBA74-63CB-F526-C07E-AA2F80BCAD75}"/>
+            </a:ext>
+          </a:extLst>
+        </p:cNvPr>
+        <p:cNvGrpSpPr/>
+        <p:nvPr/>
+      </p:nvGrpSpPr>
+      <p:grpSpPr>
+        <a:xfrm>
+          <a:off x="0" y="0"/>
+          <a:ext cx="0" cy="0"/>
+          <a:chOff x="0" y="0"/>
+          <a:chExt cx="0" cy="0"/>
+        </a:xfrm>
+      </p:grpSpPr>
+      <p:sp>
+        <p:nvSpPr>
+          <p:cNvPr id="2" name="Marcador de imagen de diapositiva 1">
+            <a:extLst>
+              <a:ext uri="{FF2B5EF4-FFF2-40B4-BE49-F238E27FC236}">
+                <a16:creationId xmlns:a16="http://schemas.microsoft.com/office/drawing/2014/main" id="{538767D1-1CF1-95AF-0077-118E061A3E31}"/>
+              </a:ext>
+            </a:extLst>
+          </p:cNvPr>
+          <p:cNvSpPr>
+            <a:spLocks noGrp="1" noRot="1" noChangeAspect="1"/>
+          </p:cNvSpPr>
+          <p:nvPr>
+            <p:ph type="sldImg"/>
+          </p:nvPr>
+        </p:nvSpPr>
+        <p:spPr/>
+      </p:sp>
+      <p:sp>
+        <p:nvSpPr>
+          <p:cNvPr id="3" name="Marcador de notas 2">
+            <a:extLst>
+              <a:ext uri="{FF2B5EF4-FFF2-40B4-BE49-F238E27FC236}">
+                <a16:creationId xmlns:a16="http://schemas.microsoft.com/office/drawing/2014/main" id="{EAFA29DC-C2DF-4643-CF0B-C3396D33C91E}"/>
+              </a:ext>
+            </a:extLst>
+          </p:cNvPr>
+          <p:cNvSpPr>
+            <a:spLocks noGrp="1"/>
+          </p:cNvSpPr>
+          <p:nvPr>
+            <p:ph type="body" idx="1"/>
+          </p:nvPr>
+        </p:nvSpPr>
+        <p:spPr/>
+        <p:txBody>
+          <a:bodyPr/>
+          <a:lstStyle/>
+          <a:p>
+            <a:endParaRPr lang="es-ES" dirty="0"/>
+          </a:p>
+        </p:txBody>
+      </p:sp>
+      <p:sp>
+        <p:nvSpPr>
+          <p:cNvPr id="4" name="Marcador de número de diapositiva 3">
+            <a:extLst>
+              <a:ext uri="{FF2B5EF4-FFF2-40B4-BE49-F238E27FC236}">
+                <a16:creationId xmlns:a16="http://schemas.microsoft.com/office/drawing/2014/main" id="{5E1DBA3C-5C82-3D80-FE9E-EFE0EDAC45C8}"/>
+              </a:ext>
+            </a:extLst>
+          </p:cNvPr>
+          <p:cNvSpPr>
+            <a:spLocks noGrp="1"/>
+          </p:cNvSpPr>
+          <p:nvPr>
+            <p:ph type="sldNum" sz="quarter" idx="5"/>
+          </p:nvPr>
+        </p:nvSpPr>
+        <p:spPr/>
+        <p:txBody>
+          <a:bodyPr/>
+          <a:lstStyle/>
+          <a:p>
+            <a:fld id="{676223B9-C868-4436-87D9-1A3152E1157A}" type="slidenum">
+              <a:rPr lang="es-ES" smtClean="0"/>
+              <a:t>6</a:t>
+            </a:fld>
+            <a:endParaRPr lang="es-ES"/>
+          </a:p>
+        </p:txBody>
+      </p:sp>
+    </p:spTree>
+    <p:extLst>
+      <p:ext uri="{BB962C8B-B14F-4D97-AF65-F5344CB8AC3E}">
+        <p14:creationId xmlns:p14="http://schemas.microsoft.com/office/powerpoint/2010/main" val="2848977682"/>
       </p:ext>
     </p:extLst>
   </p:cSld>
@@ -1112,7 +1330,7 @@
           </a:lstStyle>
           <a:p>
             <a:fld id="{B6F15528-21DE-4FAA-801E-634DDDAF4B2B}" type="slidenum">
-              <a:t>‹Nº›</a:t>
+              <a:t>‹#›</a:t>
             </a:fld>
             <a:endParaRPr/>
           </a:p>
@@ -1279,7 +1497,7 @@
           </a:lstStyle>
           <a:p>
             <a:fld id="{B6F15528-21DE-4FAA-801E-634DDDAF4B2B}" type="slidenum">
-              <a:t>‹Nº›</a:t>
+              <a:t>‹#›</a:t>
             </a:fld>
             <a:endParaRPr/>
           </a:p>
@@ -1501,7 +1719,7 @@
           </a:lstStyle>
           <a:p>
             <a:fld id="{B6F15528-21DE-4FAA-801E-634DDDAF4B2B}" type="slidenum">
-              <a:t>‹Nº›</a:t>
+              <a:t>‹#›</a:t>
             </a:fld>
             <a:endParaRPr/>
           </a:p>
@@ -1708,7 +1926,7 @@
           </a:lstStyle>
           <a:p>
             <a:fld id="{B6F15528-21DE-4FAA-801E-634DDDAF4B2B}" type="slidenum">
-              <a:t>‹Nº›</a:t>
+              <a:t>‹#›</a:t>
             </a:fld>
             <a:endParaRPr/>
           </a:p>
@@ -1872,7 +2090,7 @@
           </a:lstStyle>
           <a:p>
             <a:fld id="{B6F15528-21DE-4FAA-801E-634DDDAF4B2B}" type="slidenum">
-              <a:t>‹Nº›</a:t>
+              <a:t>‹#›</a:t>
             </a:fld>
             <a:endParaRPr/>
           </a:p>
@@ -2174,7 +2392,7 @@
           </a:lstStyle>
           <a:p>
             <a:fld id="{B6F15528-21DE-4FAA-801E-634DDDAF4B2B}" type="slidenum">
-              <a:t>‹Nº›</a:t>
+              <a:t>‹#›</a:t>
             </a:fld>
             <a:endParaRPr/>
           </a:p>
@@ -4744,8 +4962,8 @@
           </a:p>
         </p:txBody>
       </p:sp>
-      <mc:AlternateContent xmlns:mc="http://schemas.openxmlformats.org/markup-compatibility/2006" xmlns:a14="http://schemas.microsoft.com/office/drawing/2010/main">
-        <mc:Choice Requires="a14">
+      <mc:AlternateContent xmlns:mc="http://schemas.openxmlformats.org/markup-compatibility/2006">
+        <mc:Choice xmlns:a14="http://schemas.microsoft.com/office/drawing/2010/main" Requires="a14">
           <p:sp>
             <p:nvSpPr>
               <p:cNvPr id="4" name="Marcador de texto 2">
@@ -4762,7 +4980,7 @@
             </p:nvSpPr>
             <p:spPr>
               <a:xfrm>
-                <a:off x="608012" y="1295400"/>
+                <a:off x="665776" y="1066800"/>
                 <a:ext cx="11048999" cy="4958137"/>
               </a:xfrm>
               <a:prstGeom prst="rect">
@@ -4843,7 +5061,7 @@
                   <a:buNone/>
                 </a:pPr>
                 <a:r>
-                  <a:rPr lang="en-US" sz="2000" b="1" dirty="0"/>
+                  <a:rPr lang="en-US" b="1" dirty="0"/>
                   <a:t>INSTRUCTOR:</a:t>
                 </a:r>
               </a:p>
@@ -4853,15 +5071,15 @@
                   <a:buChar char="•"/>
                 </a:pPr>
                 <a:r>
-                  <a:rPr lang="en-US" sz="2000" dirty="0"/>
+                  <a:rPr lang="en-US" dirty="0"/>
                   <a:t>Present Python and </a:t>
                 </a:r>
                 <a:r>
-                  <a:rPr lang="en-US" sz="2000" dirty="0" err="1"/>
+                  <a:rPr lang="en-US" dirty="0" err="1"/>
                   <a:t>GDSFactory</a:t>
                 </a:r>
                 <a:r>
-                  <a:rPr lang="en-US" sz="2000" dirty="0"/>
+                  <a:rPr lang="en-US" dirty="0"/>
                   <a:t> implementation of DC cross-section</a:t>
                 </a:r>
               </a:p>
@@ -4871,7 +5089,7 @@
                   <a:buChar char="•"/>
                 </a:pPr>
                 <a:r>
-                  <a:rPr lang="en-US" sz="2000" dirty="0"/>
+                  <a:rPr lang="en-US" dirty="0"/>
                   <a:t>Describe how to obtain the beating length </a:t>
                 </a:r>
                 <a14:m>
@@ -4879,14 +5097,14 @@
                     <m:sSub>
                       <m:sSubPr>
                         <m:ctrlPr>
-                          <a:rPr lang="es-ES" sz="2000" b="0" i="1" smtClean="0">
+                          <a:rPr lang="es-ES" b="0" i="1" smtClean="0">
                             <a:latin typeface="Cambria Math" panose="02040503050406030204" pitchFamily="18" charset="0"/>
                           </a:rPr>
                         </m:ctrlPr>
                       </m:sSubPr>
                       <m:e>
                         <m:r>
-                          <a:rPr lang="es-ES" sz="2000" b="0" i="1" smtClean="0">
+                          <a:rPr lang="es-ES" b="0" i="1" smtClean="0">
                             <a:latin typeface="Cambria Math" panose="02040503050406030204" pitchFamily="18" charset="0"/>
                           </a:rPr>
                           <m:t>𝐿</m:t>
@@ -4894,7 +5112,7 @@
                       </m:e>
                       <m:sub>
                         <m:r>
-                          <a:rPr lang="es-ES" sz="2000" b="0" i="1" smtClean="0">
+                          <a:rPr lang="es-ES" b="0" i="1" smtClean="0">
                             <a:latin typeface="Cambria Math" panose="02040503050406030204" pitchFamily="18" charset="0"/>
                           </a:rPr>
                           <m:t>𝜋</m:t>
@@ -4903,7 +5121,7 @@
                     </m:sSub>
                   </m:oMath>
                 </a14:m>
-                <a:endParaRPr lang="en-US" sz="2000" dirty="0"/>
+                <a:endParaRPr lang="en-US" dirty="0"/>
               </a:p>
               <a:p>
                 <a:pPr marL="342900" indent="-342900" algn="just">
@@ -4911,7 +5129,7 @@
                   <a:buChar char="•"/>
                 </a:pPr>
                 <a:r>
-                  <a:rPr lang="en-US" sz="2000" dirty="0"/>
+                  <a:rPr lang="en-US" dirty="0"/>
                   <a:t>Describe the outputs.</a:t>
                 </a:r>
               </a:p>
@@ -4920,47 +5138,47 @@
                   <a:buNone/>
                 </a:pPr>
                 <a:r>
-                  <a:rPr lang="en-US" sz="2000" b="1" dirty="0"/>
+                  <a:rPr lang="en-US" b="1" dirty="0"/>
                   <a:t>ALL EXAMPLE #1: </a:t>
                 </a:r>
                 <a:r>
-                  <a:rPr lang="en-US" sz="2000" dirty="0"/>
+                  <a:rPr lang="en-US" dirty="0"/>
                   <a:t>waveguide width 1.2 µm, gap between waveguides 0.6 µm, deep </a:t>
                 </a:r>
                 <a:r>
-                  <a:rPr lang="en-US" sz="2000" dirty="0" err="1"/>
+                  <a:rPr lang="en-US" dirty="0" err="1"/>
                   <a:t>wvg</a:t>
                 </a:r>
                 <a:r>
-                  <a:rPr lang="en-US" sz="2000" dirty="0"/>
+                  <a:rPr lang="en-US" dirty="0"/>
                   <a:t>, wavelength start and end same 1.55 µm </a:t>
                 </a:r>
                 <a:r>
-                  <a:rPr lang="en-US" sz="2000" dirty="0">
+                  <a:rPr lang="en-US" dirty="0">
                     <a:sym typeface="Wingdings" pitchFamily="2" charset="2"/>
                   </a:rPr>
                   <a:t> all ”Run”</a:t>
                 </a:r>
-                <a:endParaRPr lang="en-US" sz="2000" dirty="0"/>
+                <a:endParaRPr lang="en-US" dirty="0"/>
               </a:p>
               <a:p>
                 <a:pPr marL="0" indent="0" algn="just">
                   <a:buNone/>
                 </a:pPr>
                 <a:r>
-                  <a:rPr lang="en-US" sz="2000" b="1" dirty="0"/>
+                  <a:rPr lang="en-US" b="1" dirty="0"/>
                   <a:t>ALL: </a:t>
                 </a:r>
                 <a:r>
-                  <a:rPr lang="en-US" sz="2000" dirty="0"/>
+                  <a:rPr lang="en-US" dirty="0"/>
                   <a:t>Follow</a:t>
                 </a:r>
                 <a:r>
-                  <a:rPr lang="en-US" sz="2000" b="1" dirty="0"/>
+                  <a:rPr lang="en-US" b="1" dirty="0"/>
                   <a:t> </a:t>
                 </a:r>
                 <a:r>
-                  <a:rPr lang="en-US" sz="2000" dirty="0"/>
+                  <a:rPr lang="en-US" dirty="0"/>
                   <a:t>instructor, that will show how to 1) plot mode, 2) explore the results (neff …)</a:t>
                 </a:r>
               </a:p>
@@ -4968,18 +5186,10 @@
                 <a:pPr algn="just"/>
                 <a:endParaRPr lang="en-US" sz="2000" b="1" i="1" dirty="0"/>
               </a:p>
-              <a:p>
-                <a:pPr algn="just"/>
-                <a:endParaRPr lang="en-US" sz="2000" kern="0" dirty="0">
-                  <a:solidFill>
-                    <a:sysClr val="windowText" lastClr="000000"/>
-                  </a:solidFill>
-                </a:endParaRPr>
-              </a:p>
             </p:txBody>
           </p:sp>
         </mc:Choice>
-        <mc:Fallback xmlns="">
+        <mc:Fallback>
           <p:sp>
             <p:nvSpPr>
               <p:cNvPr id="4" name="Marcador de texto 2">
@@ -4996,7 +5206,7 @@
             </p:nvSpPr>
             <p:spPr>
               <a:xfrm>
-                <a:off x="608012" y="1295400"/>
+                <a:off x="665776" y="1066800"/>
                 <a:ext cx="11048999" cy="4958137"/>
               </a:xfrm>
               <a:prstGeom prst="rect">
@@ -5005,7 +5215,7 @@
               <a:blipFill>
                 <a:blip r:embed="rId5"/>
                 <a:stretch>
-                  <a:fillRect l="-607" t="-738" r="-552"/>
+                  <a:fillRect l="-441" t="-615" r="-441"/>
                 </a:stretch>
               </a:blipFill>
             </p:spPr>
@@ -5014,7 +5224,7 @@
               <a:lstStyle/>
               <a:p>
                 <a:r>
-                  <a:rPr lang="es-ES">
+                  <a:rPr lang="en-GB">
                     <a:noFill/>
                   </a:rPr>
                   <a:t> </a:t>
@@ -5038,8 +5248,8 @@
         </p:nvSpPr>
         <p:spPr>
           <a:xfrm>
-            <a:off x="609441" y="4860334"/>
-            <a:ext cx="11199971" cy="1200329"/>
+            <a:off x="609600" y="3194009"/>
+            <a:ext cx="11199971" cy="3046988"/>
           </a:xfrm>
           <a:prstGeom prst="rect">
             <a:avLst/>
@@ -5063,37 +5273,1092 @@
           <a:p>
             <a:pPr algn="just"/>
             <a:r>
-              <a:rPr lang="en-US" sz="1200" dirty="0">
-                <a:latin typeface="Arial" panose="020B0604020202020204" pitchFamily="34" charset="0"/>
-                <a:cs typeface="Arial" panose="020B0604020202020204" pitchFamily="34" charset="0"/>
-              </a:rPr>
-              <a:t>Document all your results (neff, plot fields </a:t>
-            </a:r>
-            <a:r>
-              <a:rPr lang="en-US" sz="1200">
-                <a:latin typeface="Arial" panose="020B0604020202020204" pitchFamily="34" charset="0"/>
-                <a:cs typeface="Arial" panose="020B0604020202020204" pitchFamily="34" charset="0"/>
-              </a:rPr>
-              <a:t>of different modes, </a:t>
-            </a:r>
-            <a:r>
-              <a:rPr lang="en-US" sz="1200" dirty="0">
-                <a:latin typeface="Arial" panose="020B0604020202020204" pitchFamily="34" charset="0"/>
-                <a:cs typeface="Arial" panose="020B0604020202020204" pitchFamily="34" charset="0"/>
-              </a:rPr>
-              <a:t>comparison between </a:t>
-            </a:r>
-            <a:r>
-              <a:rPr lang="en-US" sz="1200">
-                <a:latin typeface="Arial" panose="020B0604020202020204" pitchFamily="34" charset="0"/>
-                <a:cs typeface="Arial" panose="020B0604020202020204" pitchFamily="34" charset="0"/>
-              </a:rPr>
-              <a:t>different polarizations…)</a:t>
-            </a:r>
-            <a:endParaRPr lang="en-US" sz="1200" dirty="0">
-              <a:latin typeface="Arial" panose="020B0604020202020204" pitchFamily="34" charset="0"/>
-              <a:cs typeface="Arial" panose="020B0604020202020204" pitchFamily="34" charset="0"/>
-            </a:endParaRPr>
+              <a:rPr lang="en-US" sz="1200" b="1" dirty="0">
+                <a:latin typeface="Arial" panose="020B0604020202020204" pitchFamily="34" charset="0"/>
+                <a:cs typeface="Arial" panose="020B0604020202020204" pitchFamily="34" charset="0"/>
+              </a:rPr>
+              <a:t>Document all your results (neff, plot fields of different modes, comparison between different polarizations…)</a:t>
+            </a:r>
+          </a:p>
+          <a:p>
+            <a:pPr algn="just"/>
+            <a:r>
+              <a:rPr lang="en-US" sz="1200" dirty="0">
+                <a:latin typeface="Arial" panose="020B0604020202020204" pitchFamily="34" charset="0"/>
+                <a:cs typeface="Arial" panose="020B0604020202020204" pitchFamily="34" charset="0"/>
+              </a:rPr>
+              <a:t>Para </a:t>
+            </a:r>
+            <a:r>
+              <a:rPr lang="en-US" sz="1200" dirty="0" err="1">
+                <a:latin typeface="Arial" panose="020B0604020202020204" pitchFamily="34" charset="0"/>
+                <a:cs typeface="Arial" panose="020B0604020202020204" pitchFamily="34" charset="0"/>
+              </a:rPr>
+              <a:t>el</a:t>
+            </a:r>
+            <a:r>
+              <a:rPr lang="en-US" sz="1200" dirty="0">
+                <a:latin typeface="Arial" panose="020B0604020202020204" pitchFamily="34" charset="0"/>
+                <a:cs typeface="Arial" panose="020B0604020202020204" pitchFamily="34" charset="0"/>
+              </a:rPr>
+              <a:t> </a:t>
+            </a:r>
+            <a:r>
+              <a:rPr lang="en-US" sz="1200" dirty="0" err="1">
+                <a:latin typeface="Arial" panose="020B0604020202020204" pitchFamily="34" charset="0"/>
+                <a:cs typeface="Arial" panose="020B0604020202020204" pitchFamily="34" charset="0"/>
+              </a:rPr>
+              <a:t>análisis</a:t>
+            </a:r>
+            <a:r>
+              <a:rPr lang="en-US" sz="1200" dirty="0">
+                <a:latin typeface="Arial" panose="020B0604020202020204" pitchFamily="34" charset="0"/>
+                <a:cs typeface="Arial" panose="020B0604020202020204" pitchFamily="34" charset="0"/>
+              </a:rPr>
+              <a:t> del </a:t>
+            </a:r>
+            <a:r>
+              <a:rPr lang="en-US" sz="1200" dirty="0" err="1">
+                <a:latin typeface="Arial" panose="020B0604020202020204" pitchFamily="34" charset="0"/>
+                <a:cs typeface="Arial" panose="020B0604020202020204" pitchFamily="34" charset="0"/>
+              </a:rPr>
+              <a:t>acoplador</a:t>
+            </a:r>
+            <a:r>
+              <a:rPr lang="en-US" sz="1200" dirty="0">
+                <a:latin typeface="Arial" panose="020B0604020202020204" pitchFamily="34" charset="0"/>
+                <a:cs typeface="Arial" panose="020B0604020202020204" pitchFamily="34" charset="0"/>
+              </a:rPr>
+              <a:t> </a:t>
+            </a:r>
+            <a:r>
+              <a:rPr lang="en-US" sz="1200" dirty="0" err="1">
+                <a:latin typeface="Arial" panose="020B0604020202020204" pitchFamily="34" charset="0"/>
+                <a:cs typeface="Arial" panose="020B0604020202020204" pitchFamily="34" charset="0"/>
+              </a:rPr>
+              <a:t>direccional</a:t>
+            </a:r>
+            <a:r>
+              <a:rPr lang="en-US" sz="1200" dirty="0">
+                <a:latin typeface="Arial" panose="020B0604020202020204" pitchFamily="34" charset="0"/>
+                <a:cs typeface="Arial" panose="020B0604020202020204" pitchFamily="34" charset="0"/>
+              </a:rPr>
+              <a:t>, se ha </a:t>
+            </a:r>
+            <a:r>
+              <a:rPr lang="en-US" sz="1200" dirty="0" err="1">
+                <a:latin typeface="Arial" panose="020B0604020202020204" pitchFamily="34" charset="0"/>
+                <a:cs typeface="Arial" panose="020B0604020202020204" pitchFamily="34" charset="0"/>
+              </a:rPr>
+              <a:t>diseñado</a:t>
+            </a:r>
+            <a:r>
+              <a:rPr lang="en-US" sz="1200" dirty="0">
+                <a:latin typeface="Arial" panose="020B0604020202020204" pitchFamily="34" charset="0"/>
+                <a:cs typeface="Arial" panose="020B0604020202020204" pitchFamily="34" charset="0"/>
+              </a:rPr>
+              <a:t> </a:t>
+            </a:r>
+            <a:r>
+              <a:rPr lang="en-US" sz="1200" dirty="0" err="1">
+                <a:latin typeface="Arial" panose="020B0604020202020204" pitchFamily="34" charset="0"/>
+                <a:cs typeface="Arial" panose="020B0604020202020204" pitchFamily="34" charset="0"/>
+              </a:rPr>
+              <a:t>una</a:t>
+            </a:r>
+            <a:r>
+              <a:rPr lang="en-US" sz="1200" dirty="0">
+                <a:latin typeface="Arial" panose="020B0604020202020204" pitchFamily="34" charset="0"/>
+                <a:cs typeface="Arial" panose="020B0604020202020204" pitchFamily="34" charset="0"/>
+              </a:rPr>
+              <a:t> </a:t>
+            </a:r>
+            <a:r>
+              <a:rPr lang="en-US" sz="1200" dirty="0" err="1">
+                <a:latin typeface="Arial" panose="020B0604020202020204" pitchFamily="34" charset="0"/>
+                <a:cs typeface="Arial" panose="020B0604020202020204" pitchFamily="34" charset="0"/>
+              </a:rPr>
+              <a:t>sección</a:t>
+            </a:r>
+            <a:r>
+              <a:rPr lang="en-US" sz="1200" dirty="0">
+                <a:latin typeface="Arial" panose="020B0604020202020204" pitchFamily="34" charset="0"/>
+                <a:cs typeface="Arial" panose="020B0604020202020204" pitchFamily="34" charset="0"/>
+              </a:rPr>
+              <a:t> transversal </a:t>
+            </a:r>
+            <a:r>
+              <a:rPr lang="en-US" sz="1200" dirty="0" err="1">
+                <a:latin typeface="Arial" panose="020B0604020202020204" pitchFamily="34" charset="0"/>
+                <a:cs typeface="Arial" panose="020B0604020202020204" pitchFamily="34" charset="0"/>
+              </a:rPr>
+              <a:t>compuesta</a:t>
+            </a:r>
+            <a:r>
+              <a:rPr lang="en-US" sz="1200" dirty="0">
+                <a:latin typeface="Arial" panose="020B0604020202020204" pitchFamily="34" charset="0"/>
+                <a:cs typeface="Arial" panose="020B0604020202020204" pitchFamily="34" charset="0"/>
+              </a:rPr>
+              <a:t> </a:t>
+            </a:r>
+            <a:r>
+              <a:rPr lang="en-US" sz="1200" dirty="0" err="1">
+                <a:latin typeface="Arial" panose="020B0604020202020204" pitchFamily="34" charset="0"/>
+                <a:cs typeface="Arial" panose="020B0604020202020204" pitchFamily="34" charset="0"/>
+              </a:rPr>
+              <a:t>por</a:t>
+            </a:r>
+            <a:r>
+              <a:rPr lang="en-US" sz="1200" dirty="0">
+                <a:latin typeface="Arial" panose="020B0604020202020204" pitchFamily="34" charset="0"/>
+                <a:cs typeface="Arial" panose="020B0604020202020204" pitchFamily="34" charset="0"/>
+              </a:rPr>
+              <a:t> dos </a:t>
+            </a:r>
+            <a:r>
+              <a:rPr lang="en-US" sz="1200" dirty="0" err="1">
+                <a:latin typeface="Arial" panose="020B0604020202020204" pitchFamily="34" charset="0"/>
+                <a:cs typeface="Arial" panose="020B0604020202020204" pitchFamily="34" charset="0"/>
+              </a:rPr>
+              <a:t>guías</a:t>
+            </a:r>
+            <a:r>
+              <a:rPr lang="en-US" sz="1200" dirty="0">
+                <a:latin typeface="Arial" panose="020B0604020202020204" pitchFamily="34" charset="0"/>
+                <a:cs typeface="Arial" panose="020B0604020202020204" pitchFamily="34" charset="0"/>
+              </a:rPr>
+              <a:t> de 1.2 </a:t>
+            </a:r>
+            <a:r>
+              <a:rPr lang="en-US" sz="1200" dirty="0" err="1">
+                <a:latin typeface="Arial" panose="020B0604020202020204" pitchFamily="34" charset="0"/>
+                <a:cs typeface="Arial" panose="020B0604020202020204" pitchFamily="34" charset="0"/>
+              </a:rPr>
+              <a:t>micras</a:t>
+            </a:r>
+            <a:r>
+              <a:rPr lang="en-US" sz="1200" dirty="0">
+                <a:latin typeface="Arial" panose="020B0604020202020204" pitchFamily="34" charset="0"/>
+                <a:cs typeface="Arial" panose="020B0604020202020204" pitchFamily="34" charset="0"/>
+              </a:rPr>
+              <a:t> de </a:t>
+            </a:r>
+            <a:r>
+              <a:rPr lang="en-US" sz="1200" dirty="0" err="1">
+                <a:latin typeface="Arial" panose="020B0604020202020204" pitchFamily="34" charset="0"/>
+                <a:cs typeface="Arial" panose="020B0604020202020204" pitchFamily="34" charset="0"/>
+              </a:rPr>
+              <a:t>anchura</a:t>
+            </a:r>
+            <a:r>
+              <a:rPr lang="en-US" sz="1200" dirty="0">
+                <a:latin typeface="Arial" panose="020B0604020202020204" pitchFamily="34" charset="0"/>
+                <a:cs typeface="Arial" panose="020B0604020202020204" pitchFamily="34" charset="0"/>
+              </a:rPr>
+              <a:t> y 300 nm de </a:t>
+            </a:r>
+            <a:r>
+              <a:rPr lang="en-US" sz="1200" dirty="0" err="1">
+                <a:latin typeface="Arial" panose="020B0604020202020204" pitchFamily="34" charset="0"/>
+                <a:cs typeface="Arial" panose="020B0604020202020204" pitchFamily="34" charset="0"/>
+              </a:rPr>
+              <a:t>altura</a:t>
+            </a:r>
+            <a:r>
+              <a:rPr lang="en-US" sz="1200" dirty="0">
+                <a:latin typeface="Arial" panose="020B0604020202020204" pitchFamily="34" charset="0"/>
+                <a:cs typeface="Arial" panose="020B0604020202020204" pitchFamily="34" charset="0"/>
+              </a:rPr>
+              <a:t>, </a:t>
+            </a:r>
+            <a:r>
+              <a:rPr lang="en-US" sz="1200" dirty="0" err="1">
+                <a:latin typeface="Arial" panose="020B0604020202020204" pitchFamily="34" charset="0"/>
+                <a:cs typeface="Arial" panose="020B0604020202020204" pitchFamily="34" charset="0"/>
+              </a:rPr>
+              <a:t>separadas</a:t>
+            </a:r>
+            <a:r>
+              <a:rPr lang="en-US" sz="1200" dirty="0">
+                <a:latin typeface="Arial" panose="020B0604020202020204" pitchFamily="34" charset="0"/>
+                <a:cs typeface="Arial" panose="020B0604020202020204" pitchFamily="34" charset="0"/>
+              </a:rPr>
+              <a:t> </a:t>
+            </a:r>
+            <a:r>
+              <a:rPr lang="en-US" sz="1200" dirty="0" err="1">
+                <a:latin typeface="Arial" panose="020B0604020202020204" pitchFamily="34" charset="0"/>
+                <a:cs typeface="Arial" panose="020B0604020202020204" pitchFamily="34" charset="0"/>
+              </a:rPr>
+              <a:t>por</a:t>
+            </a:r>
+            <a:r>
+              <a:rPr lang="en-US" sz="1200" dirty="0">
+                <a:latin typeface="Arial" panose="020B0604020202020204" pitchFamily="34" charset="0"/>
+                <a:cs typeface="Arial" panose="020B0604020202020204" pitchFamily="34" charset="0"/>
+              </a:rPr>
+              <a:t> un gap de 600 nm, </a:t>
+            </a:r>
+            <a:r>
+              <a:rPr lang="en-US" sz="1200" dirty="0" err="1">
+                <a:latin typeface="Arial" panose="020B0604020202020204" pitchFamily="34" charset="0"/>
+                <a:cs typeface="Arial" panose="020B0604020202020204" pitchFamily="34" charset="0"/>
+              </a:rPr>
+              <a:t>utilizando</a:t>
+            </a:r>
+            <a:r>
+              <a:rPr lang="en-US" sz="1200" dirty="0">
+                <a:latin typeface="Arial" panose="020B0604020202020204" pitchFamily="34" charset="0"/>
+                <a:cs typeface="Arial" panose="020B0604020202020204" pitchFamily="34" charset="0"/>
+              </a:rPr>
+              <a:t> la </a:t>
+            </a:r>
+            <a:r>
+              <a:rPr lang="en-US" sz="1200" dirty="0" err="1">
+                <a:latin typeface="Arial" panose="020B0604020202020204" pitchFamily="34" charset="0"/>
+                <a:cs typeface="Arial" panose="020B0604020202020204" pitchFamily="34" charset="0"/>
+              </a:rPr>
+              <a:t>función</a:t>
+            </a:r>
+            <a:r>
+              <a:rPr lang="en-US" sz="1200" dirty="0">
+                <a:latin typeface="Arial" panose="020B0604020202020204" pitchFamily="34" charset="0"/>
+                <a:cs typeface="Arial" panose="020B0604020202020204" pitchFamily="34" charset="0"/>
+              </a:rPr>
+              <a:t> de </a:t>
+            </a:r>
+            <a:r>
+              <a:rPr lang="en-US" sz="1200" dirty="0" err="1">
+                <a:latin typeface="Arial" panose="020B0604020202020204" pitchFamily="34" charset="0"/>
+                <a:cs typeface="Arial" panose="020B0604020202020204" pitchFamily="34" charset="0"/>
+              </a:rPr>
+              <a:t>GDSFactory</a:t>
+            </a:r>
+            <a:r>
+              <a:rPr lang="en-US" sz="1200" dirty="0">
+                <a:latin typeface="Arial" panose="020B0604020202020204" pitchFamily="34" charset="0"/>
+                <a:cs typeface="Arial" panose="020B0604020202020204" pitchFamily="34" charset="0"/>
+              </a:rPr>
+              <a:t> “</a:t>
+            </a:r>
+            <a:r>
+              <a:rPr lang="en-US" sz="1200" dirty="0" err="1">
+                <a:latin typeface="Arial" panose="020B0604020202020204" pitchFamily="34" charset="0"/>
+                <a:cs typeface="Arial" panose="020B0604020202020204" pitchFamily="34" charset="0"/>
+              </a:rPr>
+              <a:t>gt.modes.WaveguideCoupler</a:t>
+            </a:r>
+            <a:r>
+              <a:rPr lang="en-US" sz="1200" dirty="0">
+                <a:latin typeface="Arial" panose="020B0604020202020204" pitchFamily="34" charset="0"/>
+                <a:cs typeface="Arial" panose="020B0604020202020204" pitchFamily="34" charset="0"/>
+              </a:rPr>
+              <a:t>”. Al </a:t>
+            </a:r>
+            <a:r>
+              <a:rPr lang="en-US" sz="1200" dirty="0" err="1">
+                <a:latin typeface="Arial" panose="020B0604020202020204" pitchFamily="34" charset="0"/>
+                <a:cs typeface="Arial" panose="020B0604020202020204" pitchFamily="34" charset="0"/>
+              </a:rPr>
+              <a:t>solucionar</a:t>
+            </a:r>
+            <a:r>
+              <a:rPr lang="en-US" sz="1200" dirty="0">
+                <a:latin typeface="Arial" panose="020B0604020202020204" pitchFamily="34" charset="0"/>
+                <a:cs typeface="Arial" panose="020B0604020202020204" pitchFamily="34" charset="0"/>
+              </a:rPr>
+              <a:t> </a:t>
+            </a:r>
+            <a:r>
+              <a:rPr lang="en-US" sz="1200" dirty="0" err="1">
+                <a:latin typeface="Arial" panose="020B0604020202020204" pitchFamily="34" charset="0"/>
+                <a:cs typeface="Arial" panose="020B0604020202020204" pitchFamily="34" charset="0"/>
+              </a:rPr>
+              <a:t>el</a:t>
+            </a:r>
+            <a:r>
+              <a:rPr lang="en-US" sz="1200" dirty="0">
+                <a:latin typeface="Arial" panose="020B0604020202020204" pitchFamily="34" charset="0"/>
+                <a:cs typeface="Arial" panose="020B0604020202020204" pitchFamily="34" charset="0"/>
+              </a:rPr>
+              <a:t> </a:t>
+            </a:r>
+            <a:r>
+              <a:rPr lang="en-US" sz="1200" dirty="0" err="1">
+                <a:latin typeface="Arial" panose="020B0604020202020204" pitchFamily="34" charset="0"/>
+                <a:cs typeface="Arial" panose="020B0604020202020204" pitchFamily="34" charset="0"/>
+              </a:rPr>
+              <a:t>sistema</a:t>
+            </a:r>
+            <a:r>
+              <a:rPr lang="en-US" sz="1200" dirty="0">
+                <a:latin typeface="Arial" panose="020B0604020202020204" pitchFamily="34" charset="0"/>
+                <a:cs typeface="Arial" panose="020B0604020202020204" pitchFamily="34" charset="0"/>
+              </a:rPr>
+              <a:t> para cuatro </a:t>
+            </a:r>
+            <a:r>
+              <a:rPr lang="en-US" sz="1200" dirty="0" err="1">
+                <a:latin typeface="Arial" panose="020B0604020202020204" pitchFamily="34" charset="0"/>
+                <a:cs typeface="Arial" panose="020B0604020202020204" pitchFamily="34" charset="0"/>
+              </a:rPr>
+              <a:t>modos</a:t>
+            </a:r>
+            <a:r>
+              <a:rPr lang="en-US" sz="1200" dirty="0">
+                <a:latin typeface="Arial" panose="020B0604020202020204" pitchFamily="34" charset="0"/>
+                <a:cs typeface="Arial" panose="020B0604020202020204" pitchFamily="34" charset="0"/>
+              </a:rPr>
+              <a:t>, se </a:t>
+            </a:r>
+            <a:r>
+              <a:rPr lang="en-US" sz="1200" dirty="0" err="1">
+                <a:latin typeface="Arial" panose="020B0604020202020204" pitchFamily="34" charset="0"/>
+                <a:cs typeface="Arial" panose="020B0604020202020204" pitchFamily="34" charset="0"/>
+              </a:rPr>
+              <a:t>obtienen</a:t>
+            </a:r>
+            <a:r>
+              <a:rPr lang="en-US" sz="1200" dirty="0">
+                <a:latin typeface="Arial" panose="020B0604020202020204" pitchFamily="34" charset="0"/>
+                <a:cs typeface="Arial" panose="020B0604020202020204" pitchFamily="34" charset="0"/>
+              </a:rPr>
+              <a:t> </a:t>
+            </a:r>
+            <a:r>
+              <a:rPr lang="en-US" sz="1200" dirty="0" err="1">
+                <a:latin typeface="Arial" panose="020B0604020202020204" pitchFamily="34" charset="0"/>
+                <a:cs typeface="Arial" panose="020B0604020202020204" pitchFamily="34" charset="0"/>
+              </a:rPr>
+              <a:t>los</a:t>
+            </a:r>
+            <a:r>
+              <a:rPr lang="en-US" sz="1200" dirty="0">
+                <a:latin typeface="Arial" panose="020B0604020202020204" pitchFamily="34" charset="0"/>
+                <a:cs typeface="Arial" panose="020B0604020202020204" pitchFamily="34" charset="0"/>
+              </a:rPr>
+              <a:t> </a:t>
+            </a:r>
+            <a:r>
+              <a:rPr lang="en-US" sz="1200" dirty="0" err="1">
+                <a:latin typeface="Arial" panose="020B0604020202020204" pitchFamily="34" charset="0"/>
+                <a:cs typeface="Arial" panose="020B0604020202020204" pitchFamily="34" charset="0"/>
+              </a:rPr>
+              <a:t>siguientes</a:t>
+            </a:r>
+            <a:r>
+              <a:rPr lang="en-US" sz="1200" dirty="0">
+                <a:latin typeface="Arial" panose="020B0604020202020204" pitchFamily="34" charset="0"/>
+                <a:cs typeface="Arial" panose="020B0604020202020204" pitchFamily="34" charset="0"/>
+              </a:rPr>
+              <a:t> </a:t>
+            </a:r>
+            <a:r>
+              <a:rPr lang="en-US" sz="1200" dirty="0" err="1">
+                <a:latin typeface="Arial" panose="020B0604020202020204" pitchFamily="34" charset="0"/>
+                <a:cs typeface="Arial" panose="020B0604020202020204" pitchFamily="34" charset="0"/>
+              </a:rPr>
+              <a:t>resultados</a:t>
+            </a:r>
+            <a:r>
+              <a:rPr lang="en-US" sz="1200" dirty="0">
+                <a:latin typeface="Arial" panose="020B0604020202020204" pitchFamily="34" charset="0"/>
+                <a:cs typeface="Arial" panose="020B0604020202020204" pitchFamily="34" charset="0"/>
+              </a:rPr>
+              <a:t>:</a:t>
+            </a:r>
+          </a:p>
+          <a:p>
+            <a:pPr marL="171450" indent="-171450" algn="just">
+              <a:buFontTx/>
+              <a:buChar char="-"/>
+            </a:pPr>
+            <a:r>
+              <a:rPr lang="en-US" sz="1200" dirty="0">
+                <a:latin typeface="Arial" panose="020B0604020202020204" pitchFamily="34" charset="0"/>
+                <a:cs typeface="Arial" panose="020B0604020202020204" pitchFamily="34" charset="0"/>
+              </a:rPr>
+              <a:t>Mode 0: </a:t>
+            </a:r>
+            <a:r>
+              <a:rPr lang="en-US" sz="1200" dirty="0" err="1">
+                <a:latin typeface="Arial" panose="020B0604020202020204" pitchFamily="34" charset="0"/>
+                <a:cs typeface="Arial" panose="020B0604020202020204" pitchFamily="34" charset="0"/>
+              </a:rPr>
+              <a:t>n_eff</a:t>
+            </a:r>
+            <a:r>
+              <a:rPr lang="en-US" sz="1200" dirty="0">
+                <a:latin typeface="Arial" panose="020B0604020202020204" pitchFamily="34" charset="0"/>
+                <a:cs typeface="Arial" panose="020B0604020202020204" pitchFamily="34" charset="0"/>
+              </a:rPr>
+              <a:t>=1.609, </a:t>
+            </a:r>
+            <a:r>
+              <a:rPr lang="en-US" sz="1200" dirty="0" err="1">
+                <a:latin typeface="Arial" panose="020B0604020202020204" pitchFamily="34" charset="0"/>
+                <a:cs typeface="Arial" panose="020B0604020202020204" pitchFamily="34" charset="0"/>
+              </a:rPr>
+              <a:t>polarización</a:t>
+            </a:r>
+            <a:r>
+              <a:rPr lang="en-US" sz="1200" dirty="0">
+                <a:latin typeface="Arial" panose="020B0604020202020204" pitchFamily="34" charset="0"/>
+                <a:cs typeface="Arial" panose="020B0604020202020204" pitchFamily="34" charset="0"/>
+              </a:rPr>
+              <a:t> TE</a:t>
+            </a:r>
+          </a:p>
+          <a:p>
+            <a:pPr marL="171450" indent="-171450" algn="just">
+              <a:buFontTx/>
+              <a:buChar char="-"/>
+            </a:pPr>
+            <a:r>
+              <a:rPr lang="en-US" sz="1200" dirty="0">
+                <a:latin typeface="Arial" panose="020B0604020202020204" pitchFamily="34" charset="0"/>
+                <a:cs typeface="Arial" panose="020B0604020202020204" pitchFamily="34" charset="0"/>
+              </a:rPr>
+              <a:t>Mode 1: </a:t>
+            </a:r>
+            <a:r>
+              <a:rPr lang="en-US" sz="1200" dirty="0" err="1">
+                <a:latin typeface="Arial" panose="020B0604020202020204" pitchFamily="34" charset="0"/>
+                <a:cs typeface="Arial" panose="020B0604020202020204" pitchFamily="34" charset="0"/>
+              </a:rPr>
+              <a:t>n_eff</a:t>
+            </a:r>
+            <a:r>
+              <a:rPr lang="en-US" sz="1200" dirty="0">
+                <a:latin typeface="Arial" panose="020B0604020202020204" pitchFamily="34" charset="0"/>
+                <a:cs typeface="Arial" panose="020B0604020202020204" pitchFamily="34" charset="0"/>
+              </a:rPr>
+              <a:t>=1.6011, </a:t>
+            </a:r>
+            <a:r>
+              <a:rPr lang="en-US" sz="1200" dirty="0" err="1">
+                <a:latin typeface="Arial" panose="020B0604020202020204" pitchFamily="34" charset="0"/>
+                <a:cs typeface="Arial" panose="020B0604020202020204" pitchFamily="34" charset="0"/>
+              </a:rPr>
+              <a:t>polarización</a:t>
+            </a:r>
+            <a:r>
+              <a:rPr lang="en-US" sz="1200" dirty="0">
+                <a:latin typeface="Arial" panose="020B0604020202020204" pitchFamily="34" charset="0"/>
+                <a:cs typeface="Arial" panose="020B0604020202020204" pitchFamily="34" charset="0"/>
+              </a:rPr>
+              <a:t> TE</a:t>
+            </a:r>
+          </a:p>
+          <a:p>
+            <a:pPr marL="171450" indent="-171450" algn="just">
+              <a:buFontTx/>
+              <a:buChar char="-"/>
+            </a:pPr>
+            <a:r>
+              <a:rPr lang="en-US" sz="1200" dirty="0">
+                <a:latin typeface="Arial" panose="020B0604020202020204" pitchFamily="34" charset="0"/>
+                <a:cs typeface="Arial" panose="020B0604020202020204" pitchFamily="34" charset="0"/>
+              </a:rPr>
+              <a:t>Mode 2: </a:t>
+            </a:r>
+            <a:r>
+              <a:rPr lang="en-US" sz="1200" dirty="0" err="1">
+                <a:latin typeface="Arial" panose="020B0604020202020204" pitchFamily="34" charset="0"/>
+                <a:cs typeface="Arial" panose="020B0604020202020204" pitchFamily="34" charset="0"/>
+              </a:rPr>
+              <a:t>n_eff</a:t>
+            </a:r>
+            <a:r>
+              <a:rPr lang="en-US" sz="1200" dirty="0">
+                <a:latin typeface="Arial" panose="020B0604020202020204" pitchFamily="34" charset="0"/>
+                <a:cs typeface="Arial" panose="020B0604020202020204" pitchFamily="34" charset="0"/>
+              </a:rPr>
+              <a:t>=1.535, </a:t>
+            </a:r>
+            <a:r>
+              <a:rPr lang="en-US" sz="1200" dirty="0" err="1">
+                <a:latin typeface="Arial" panose="020B0604020202020204" pitchFamily="34" charset="0"/>
+                <a:cs typeface="Arial" panose="020B0604020202020204" pitchFamily="34" charset="0"/>
+              </a:rPr>
+              <a:t>polarización</a:t>
+            </a:r>
+            <a:r>
+              <a:rPr lang="en-US" sz="1200" dirty="0">
+                <a:latin typeface="Arial" panose="020B0604020202020204" pitchFamily="34" charset="0"/>
+                <a:cs typeface="Arial" panose="020B0604020202020204" pitchFamily="34" charset="0"/>
+              </a:rPr>
+              <a:t> TM</a:t>
+            </a:r>
+          </a:p>
+          <a:p>
+            <a:pPr marL="171450" indent="-171450" algn="just">
+              <a:buFontTx/>
+              <a:buChar char="-"/>
+            </a:pPr>
+            <a:r>
+              <a:rPr lang="en-US" sz="1200" dirty="0">
+                <a:latin typeface="Arial" panose="020B0604020202020204" pitchFamily="34" charset="0"/>
+                <a:cs typeface="Arial" panose="020B0604020202020204" pitchFamily="34" charset="0"/>
+              </a:rPr>
+              <a:t>Mode 3: </a:t>
+            </a:r>
+            <a:r>
+              <a:rPr lang="en-US" sz="1200" dirty="0" err="1">
+                <a:latin typeface="Arial" panose="020B0604020202020204" pitchFamily="34" charset="0"/>
+                <a:cs typeface="Arial" panose="020B0604020202020204" pitchFamily="34" charset="0"/>
+              </a:rPr>
+              <a:t>n_eff</a:t>
+            </a:r>
+            <a:r>
+              <a:rPr lang="en-US" sz="1200" dirty="0">
+                <a:latin typeface="Arial" panose="020B0604020202020204" pitchFamily="34" charset="0"/>
+                <a:cs typeface="Arial" panose="020B0604020202020204" pitchFamily="34" charset="0"/>
+              </a:rPr>
+              <a:t>=1.520, </a:t>
+            </a:r>
+            <a:r>
+              <a:rPr lang="en-US" sz="1200" dirty="0" err="1">
+                <a:latin typeface="Arial" panose="020B0604020202020204" pitchFamily="34" charset="0"/>
+                <a:cs typeface="Arial" panose="020B0604020202020204" pitchFamily="34" charset="0"/>
+              </a:rPr>
+              <a:t>polarización</a:t>
+            </a:r>
+            <a:r>
+              <a:rPr lang="en-US" sz="1200" dirty="0">
+                <a:latin typeface="Arial" panose="020B0604020202020204" pitchFamily="34" charset="0"/>
+                <a:cs typeface="Arial" panose="020B0604020202020204" pitchFamily="34" charset="0"/>
+              </a:rPr>
+              <a:t> TM</a:t>
+            </a:r>
+          </a:p>
+          <a:p>
+            <a:pPr algn="just"/>
+            <a:r>
+              <a:rPr lang="en-US" sz="1200" dirty="0">
+                <a:latin typeface="Arial" panose="020B0604020202020204" pitchFamily="34" charset="0"/>
+                <a:cs typeface="Arial" panose="020B0604020202020204" pitchFamily="34" charset="0"/>
+              </a:rPr>
+              <a:t>Por tanto, </a:t>
+            </a:r>
+            <a:r>
+              <a:rPr lang="en-US" sz="1200" dirty="0" err="1">
+                <a:latin typeface="Arial" panose="020B0604020202020204" pitchFamily="34" charset="0"/>
+                <a:cs typeface="Arial" panose="020B0604020202020204" pitchFamily="34" charset="0"/>
+              </a:rPr>
+              <a:t>los</a:t>
+            </a:r>
+            <a:r>
+              <a:rPr lang="en-US" sz="1200" dirty="0">
+                <a:latin typeface="Arial" panose="020B0604020202020204" pitchFamily="34" charset="0"/>
+                <a:cs typeface="Arial" panose="020B0604020202020204" pitchFamily="34" charset="0"/>
+              </a:rPr>
+              <a:t> cuatro </a:t>
+            </a:r>
+            <a:r>
+              <a:rPr lang="en-US" sz="1200" dirty="0" err="1">
+                <a:latin typeface="Arial" panose="020B0604020202020204" pitchFamily="34" charset="0"/>
+                <a:cs typeface="Arial" panose="020B0604020202020204" pitchFamily="34" charset="0"/>
+              </a:rPr>
+              <a:t>modos</a:t>
+            </a:r>
+            <a:r>
+              <a:rPr lang="en-US" sz="1200" dirty="0">
+                <a:latin typeface="Arial" panose="020B0604020202020204" pitchFamily="34" charset="0"/>
+                <a:cs typeface="Arial" panose="020B0604020202020204" pitchFamily="34" charset="0"/>
+              </a:rPr>
+              <a:t> se </a:t>
+            </a:r>
+            <a:r>
+              <a:rPr lang="en-US" sz="1200" dirty="0" err="1">
+                <a:latin typeface="Arial" panose="020B0604020202020204" pitchFamily="34" charset="0"/>
+                <a:cs typeface="Arial" panose="020B0604020202020204" pitchFamily="34" charset="0"/>
+              </a:rPr>
+              <a:t>propagan</a:t>
+            </a:r>
+            <a:r>
+              <a:rPr lang="en-US" sz="1200" dirty="0">
+                <a:latin typeface="Arial" panose="020B0604020202020204" pitchFamily="34" charset="0"/>
+                <a:cs typeface="Arial" panose="020B0604020202020204" pitchFamily="34" charset="0"/>
+              </a:rPr>
+              <a:t>, </a:t>
+            </a:r>
+            <a:r>
+              <a:rPr lang="en-US" sz="1200" dirty="0" err="1">
+                <a:latin typeface="Arial" panose="020B0604020202020204" pitchFamily="34" charset="0"/>
+                <a:cs typeface="Arial" panose="020B0604020202020204" pitchFamily="34" charset="0"/>
+              </a:rPr>
+              <a:t>pues</a:t>
+            </a:r>
+            <a:r>
+              <a:rPr lang="en-US" sz="1200" dirty="0">
+                <a:latin typeface="Arial" panose="020B0604020202020204" pitchFamily="34" charset="0"/>
+                <a:cs typeface="Arial" panose="020B0604020202020204" pitchFamily="34" charset="0"/>
+              </a:rPr>
+              <a:t> </a:t>
+            </a:r>
+            <a:r>
+              <a:rPr lang="en-US" sz="1200" dirty="0" err="1">
+                <a:latin typeface="Arial" panose="020B0604020202020204" pitchFamily="34" charset="0"/>
+                <a:cs typeface="Arial" panose="020B0604020202020204" pitchFamily="34" charset="0"/>
+              </a:rPr>
+              <a:t>su</a:t>
+            </a:r>
+            <a:r>
+              <a:rPr lang="en-US" sz="1200" dirty="0">
+                <a:latin typeface="Arial" panose="020B0604020202020204" pitchFamily="34" charset="0"/>
+                <a:cs typeface="Arial" panose="020B0604020202020204" pitchFamily="34" charset="0"/>
+              </a:rPr>
+              <a:t> </a:t>
+            </a:r>
+            <a:r>
+              <a:rPr lang="en-US" sz="1200" dirty="0" err="1">
+                <a:latin typeface="Arial" panose="020B0604020202020204" pitchFamily="34" charset="0"/>
+                <a:cs typeface="Arial" panose="020B0604020202020204" pitchFamily="34" charset="0"/>
+              </a:rPr>
+              <a:t>índice</a:t>
+            </a:r>
+            <a:r>
+              <a:rPr lang="en-US" sz="1200" dirty="0">
+                <a:latin typeface="Arial" panose="020B0604020202020204" pitchFamily="34" charset="0"/>
+                <a:cs typeface="Arial" panose="020B0604020202020204" pitchFamily="34" charset="0"/>
+              </a:rPr>
+              <a:t> </a:t>
+            </a:r>
+            <a:r>
+              <a:rPr lang="en-US" sz="1200" dirty="0" err="1">
+                <a:latin typeface="Arial" panose="020B0604020202020204" pitchFamily="34" charset="0"/>
+                <a:cs typeface="Arial" panose="020B0604020202020204" pitchFamily="34" charset="0"/>
+              </a:rPr>
+              <a:t>efectivo</a:t>
+            </a:r>
+            <a:r>
+              <a:rPr lang="en-US" sz="1200" dirty="0">
+                <a:latin typeface="Arial" panose="020B0604020202020204" pitchFamily="34" charset="0"/>
+                <a:cs typeface="Arial" panose="020B0604020202020204" pitchFamily="34" charset="0"/>
+              </a:rPr>
+              <a:t> es mayor al del cladding. Sim embargo, </a:t>
+            </a:r>
+            <a:r>
+              <a:rPr lang="en-US" sz="1200" dirty="0" err="1">
+                <a:latin typeface="Arial" panose="020B0604020202020204" pitchFamily="34" charset="0"/>
+                <a:cs typeface="Arial" panose="020B0604020202020204" pitchFamily="34" charset="0"/>
+              </a:rPr>
+              <a:t>los</a:t>
+            </a:r>
+            <a:r>
+              <a:rPr lang="en-US" sz="1200" dirty="0">
+                <a:latin typeface="Arial" panose="020B0604020202020204" pitchFamily="34" charset="0"/>
+                <a:cs typeface="Arial" panose="020B0604020202020204" pitchFamily="34" charset="0"/>
+              </a:rPr>
+              <a:t> </a:t>
+            </a:r>
+            <a:r>
+              <a:rPr lang="en-US" sz="1200" dirty="0" err="1">
+                <a:latin typeface="Arial" panose="020B0604020202020204" pitchFamily="34" charset="0"/>
+                <a:cs typeface="Arial" panose="020B0604020202020204" pitchFamily="34" charset="0"/>
+              </a:rPr>
+              <a:t>modos</a:t>
+            </a:r>
+            <a:r>
+              <a:rPr lang="en-US" sz="1200" dirty="0">
+                <a:latin typeface="Arial" panose="020B0604020202020204" pitchFamily="34" charset="0"/>
+                <a:cs typeface="Arial" panose="020B0604020202020204" pitchFamily="34" charset="0"/>
+              </a:rPr>
+              <a:t> TE </a:t>
+            </a:r>
+            <a:r>
+              <a:rPr lang="en-US" sz="1200" dirty="0" err="1">
+                <a:latin typeface="Arial" panose="020B0604020202020204" pitchFamily="34" charset="0"/>
+                <a:cs typeface="Arial" panose="020B0604020202020204" pitchFamily="34" charset="0"/>
+              </a:rPr>
+              <a:t>estarán</a:t>
+            </a:r>
+            <a:r>
+              <a:rPr lang="en-US" sz="1200" dirty="0">
+                <a:latin typeface="Arial" panose="020B0604020202020204" pitchFamily="34" charset="0"/>
+                <a:cs typeface="Arial" panose="020B0604020202020204" pitchFamily="34" charset="0"/>
+              </a:rPr>
+              <a:t> </a:t>
+            </a:r>
+            <a:r>
+              <a:rPr lang="en-US" sz="1200" dirty="0" err="1">
+                <a:latin typeface="Arial" panose="020B0604020202020204" pitchFamily="34" charset="0"/>
+                <a:cs typeface="Arial" panose="020B0604020202020204" pitchFamily="34" charset="0"/>
+              </a:rPr>
+              <a:t>más</a:t>
+            </a:r>
+            <a:r>
+              <a:rPr lang="en-US" sz="1200" dirty="0">
+                <a:latin typeface="Arial" panose="020B0604020202020204" pitchFamily="34" charset="0"/>
+                <a:cs typeface="Arial" panose="020B0604020202020204" pitchFamily="34" charset="0"/>
+              </a:rPr>
+              <a:t> </a:t>
+            </a:r>
+            <a:r>
+              <a:rPr lang="en-US" sz="1200" dirty="0" err="1">
+                <a:latin typeface="Arial" panose="020B0604020202020204" pitchFamily="34" charset="0"/>
+                <a:cs typeface="Arial" panose="020B0604020202020204" pitchFamily="34" charset="0"/>
+              </a:rPr>
+              <a:t>confinados</a:t>
+            </a:r>
+            <a:r>
+              <a:rPr lang="en-US" sz="1200" dirty="0">
+                <a:latin typeface="Arial" panose="020B0604020202020204" pitchFamily="34" charset="0"/>
+                <a:cs typeface="Arial" panose="020B0604020202020204" pitchFamily="34" charset="0"/>
+              </a:rPr>
+              <a:t> </a:t>
+            </a:r>
+            <a:r>
+              <a:rPr lang="en-US" sz="1200" dirty="0" err="1">
+                <a:latin typeface="Arial" panose="020B0604020202020204" pitchFamily="34" charset="0"/>
+                <a:cs typeface="Arial" panose="020B0604020202020204" pitchFamily="34" charset="0"/>
+              </a:rPr>
+              <a:t>por</a:t>
+            </a:r>
+            <a:r>
+              <a:rPr lang="en-US" sz="1200" dirty="0">
+                <a:latin typeface="Arial" panose="020B0604020202020204" pitchFamily="34" charset="0"/>
+                <a:cs typeface="Arial" panose="020B0604020202020204" pitchFamily="34" charset="0"/>
+              </a:rPr>
+              <a:t> </a:t>
+            </a:r>
+            <a:r>
+              <a:rPr lang="en-US" sz="1200" dirty="0" err="1">
+                <a:latin typeface="Arial" panose="020B0604020202020204" pitchFamily="34" charset="0"/>
+                <a:cs typeface="Arial" panose="020B0604020202020204" pitchFamily="34" charset="0"/>
+              </a:rPr>
+              <a:t>tener</a:t>
+            </a:r>
+            <a:r>
+              <a:rPr lang="en-US" sz="1200" dirty="0">
+                <a:latin typeface="Arial" panose="020B0604020202020204" pitchFamily="34" charset="0"/>
+                <a:cs typeface="Arial" panose="020B0604020202020204" pitchFamily="34" charset="0"/>
+              </a:rPr>
+              <a:t> un </a:t>
+            </a:r>
+            <a:r>
+              <a:rPr lang="en-US" sz="1200" dirty="0" err="1">
+                <a:latin typeface="Arial" panose="020B0604020202020204" pitchFamily="34" charset="0"/>
+                <a:cs typeface="Arial" panose="020B0604020202020204" pitchFamily="34" charset="0"/>
+              </a:rPr>
+              <a:t>índice</a:t>
+            </a:r>
+            <a:r>
+              <a:rPr lang="en-US" sz="1200" dirty="0">
+                <a:latin typeface="Arial" panose="020B0604020202020204" pitchFamily="34" charset="0"/>
+                <a:cs typeface="Arial" panose="020B0604020202020204" pitchFamily="34" charset="0"/>
+              </a:rPr>
+              <a:t> mayor, lo </a:t>
+            </a:r>
+            <a:r>
+              <a:rPr lang="en-US" sz="1200" dirty="0" err="1">
+                <a:latin typeface="Arial" panose="020B0604020202020204" pitchFamily="34" charset="0"/>
+                <a:cs typeface="Arial" panose="020B0604020202020204" pitchFamily="34" charset="0"/>
+              </a:rPr>
+              <a:t>que</a:t>
+            </a:r>
+            <a:r>
+              <a:rPr lang="en-US" sz="1200" dirty="0">
+                <a:latin typeface="Arial" panose="020B0604020202020204" pitchFamily="34" charset="0"/>
+                <a:cs typeface="Arial" panose="020B0604020202020204" pitchFamily="34" charset="0"/>
+              </a:rPr>
+              <a:t> </a:t>
+            </a:r>
+            <a:r>
+              <a:rPr lang="en-US" sz="1200" dirty="0" err="1">
+                <a:latin typeface="Arial" panose="020B0604020202020204" pitchFamily="34" charset="0"/>
+                <a:cs typeface="Arial" panose="020B0604020202020204" pitchFamily="34" charset="0"/>
+              </a:rPr>
+              <a:t>previsiblemente</a:t>
+            </a:r>
+            <a:r>
+              <a:rPr lang="en-US" sz="1200" dirty="0">
+                <a:latin typeface="Arial" panose="020B0604020202020204" pitchFamily="34" charset="0"/>
+                <a:cs typeface="Arial" panose="020B0604020202020204" pitchFamily="34" charset="0"/>
+              </a:rPr>
+              <a:t> </a:t>
+            </a:r>
+            <a:r>
+              <a:rPr lang="en-US" sz="1200" dirty="0" err="1">
+                <a:latin typeface="Arial" panose="020B0604020202020204" pitchFamily="34" charset="0"/>
+                <a:cs typeface="Arial" panose="020B0604020202020204" pitchFamily="34" charset="0"/>
+              </a:rPr>
+              <a:t>provocará</a:t>
+            </a:r>
+            <a:r>
+              <a:rPr lang="en-US" sz="1200" dirty="0">
+                <a:latin typeface="Arial" panose="020B0604020202020204" pitchFamily="34" charset="0"/>
+                <a:cs typeface="Arial" panose="020B0604020202020204" pitchFamily="34" charset="0"/>
+              </a:rPr>
+              <a:t> </a:t>
+            </a:r>
+            <a:r>
+              <a:rPr lang="en-US" sz="1200" dirty="0" err="1">
+                <a:latin typeface="Arial" panose="020B0604020202020204" pitchFamily="34" charset="0"/>
+                <a:cs typeface="Arial" panose="020B0604020202020204" pitchFamily="34" charset="0"/>
+              </a:rPr>
+              <a:t>una</a:t>
+            </a:r>
+            <a:r>
+              <a:rPr lang="en-US" sz="1200" dirty="0">
+                <a:latin typeface="Arial" panose="020B0604020202020204" pitchFamily="34" charset="0"/>
+                <a:cs typeface="Arial" panose="020B0604020202020204" pitchFamily="34" charset="0"/>
+              </a:rPr>
+              <a:t> </a:t>
+            </a:r>
+            <a:r>
+              <a:rPr lang="en-US" sz="1200" dirty="0" err="1">
+                <a:latin typeface="Arial" panose="020B0604020202020204" pitchFamily="34" charset="0"/>
+                <a:cs typeface="Arial" panose="020B0604020202020204" pitchFamily="34" charset="0"/>
+              </a:rPr>
+              <a:t>distancia</a:t>
+            </a:r>
+            <a:r>
+              <a:rPr lang="en-US" sz="1200" dirty="0">
+                <a:latin typeface="Arial" panose="020B0604020202020204" pitchFamily="34" charset="0"/>
+                <a:cs typeface="Arial" panose="020B0604020202020204" pitchFamily="34" charset="0"/>
+              </a:rPr>
+              <a:t> de batido mayor. Al </a:t>
+            </a:r>
+            <a:r>
+              <a:rPr lang="en-US" sz="1200" dirty="0" err="1">
+                <a:latin typeface="Arial" panose="020B0604020202020204" pitchFamily="34" charset="0"/>
+                <a:cs typeface="Arial" panose="020B0604020202020204" pitchFamily="34" charset="0"/>
+              </a:rPr>
+              <a:t>representar</a:t>
+            </a:r>
+            <a:r>
+              <a:rPr lang="en-US" sz="1200" dirty="0">
+                <a:latin typeface="Arial" panose="020B0604020202020204" pitchFamily="34" charset="0"/>
+                <a:cs typeface="Arial" panose="020B0604020202020204" pitchFamily="34" charset="0"/>
+              </a:rPr>
+              <a:t> la </a:t>
+            </a:r>
+            <a:r>
+              <a:rPr lang="en-US" sz="1200" dirty="0" err="1">
+                <a:latin typeface="Arial" panose="020B0604020202020204" pitchFamily="34" charset="0"/>
+                <a:cs typeface="Arial" panose="020B0604020202020204" pitchFamily="34" charset="0"/>
+              </a:rPr>
+              <a:t>sección</a:t>
+            </a:r>
+            <a:r>
+              <a:rPr lang="en-US" sz="1200" dirty="0">
+                <a:latin typeface="Arial" panose="020B0604020202020204" pitchFamily="34" charset="0"/>
+                <a:cs typeface="Arial" panose="020B0604020202020204" pitchFamily="34" charset="0"/>
+              </a:rPr>
+              <a:t> transversal de </a:t>
+            </a:r>
+            <a:r>
+              <a:rPr lang="en-US" sz="1200" dirty="0" err="1">
+                <a:latin typeface="Arial" panose="020B0604020202020204" pitchFamily="34" charset="0"/>
+                <a:cs typeface="Arial" panose="020B0604020202020204" pitchFamily="34" charset="0"/>
+              </a:rPr>
+              <a:t>cada</a:t>
+            </a:r>
+            <a:r>
+              <a:rPr lang="en-US" sz="1200" dirty="0">
+                <a:latin typeface="Arial" panose="020B0604020202020204" pitchFamily="34" charset="0"/>
+                <a:cs typeface="Arial" panose="020B0604020202020204" pitchFamily="34" charset="0"/>
+              </a:rPr>
+              <a:t> </a:t>
+            </a:r>
+            <a:r>
+              <a:rPr lang="en-US" sz="1200" dirty="0" err="1">
+                <a:latin typeface="Arial" panose="020B0604020202020204" pitchFamily="34" charset="0"/>
+                <a:cs typeface="Arial" panose="020B0604020202020204" pitchFamily="34" charset="0"/>
+              </a:rPr>
+              <a:t>solución</a:t>
+            </a:r>
+            <a:r>
+              <a:rPr lang="en-US" sz="1200" dirty="0">
+                <a:latin typeface="Arial" panose="020B0604020202020204" pitchFamily="34" charset="0"/>
+                <a:cs typeface="Arial" panose="020B0604020202020204" pitchFamily="34" charset="0"/>
+              </a:rPr>
+              <a:t> se </a:t>
+            </a:r>
+            <a:r>
+              <a:rPr lang="en-US" sz="1200" dirty="0" err="1">
+                <a:latin typeface="Arial" panose="020B0604020202020204" pitchFamily="34" charset="0"/>
+                <a:cs typeface="Arial" panose="020B0604020202020204" pitchFamily="34" charset="0"/>
+              </a:rPr>
+              <a:t>obtiene</a:t>
+            </a:r>
+            <a:r>
+              <a:rPr lang="en-US" sz="1200" dirty="0">
+                <a:latin typeface="Arial" panose="020B0604020202020204" pitchFamily="34" charset="0"/>
+                <a:cs typeface="Arial" panose="020B0604020202020204" pitchFamily="34" charset="0"/>
+              </a:rPr>
+              <a:t> </a:t>
+            </a:r>
+            <a:r>
+              <a:rPr lang="en-US" sz="1200" dirty="0" err="1">
+                <a:latin typeface="Arial" panose="020B0604020202020204" pitchFamily="34" charset="0"/>
+                <a:cs typeface="Arial" panose="020B0604020202020204" pitchFamily="34" charset="0"/>
+              </a:rPr>
+              <a:t>que</a:t>
+            </a:r>
+            <a:r>
+              <a:rPr lang="en-US" sz="1200" dirty="0">
+                <a:latin typeface="Arial" panose="020B0604020202020204" pitchFamily="34" charset="0"/>
+                <a:cs typeface="Arial" panose="020B0604020202020204" pitchFamily="34" charset="0"/>
+              </a:rPr>
+              <a:t> </a:t>
+            </a:r>
+            <a:r>
+              <a:rPr lang="en-US" sz="1200" dirty="0" err="1">
+                <a:latin typeface="Arial" panose="020B0604020202020204" pitchFamily="34" charset="0"/>
+                <a:cs typeface="Arial" panose="020B0604020202020204" pitchFamily="34" charset="0"/>
+              </a:rPr>
+              <a:t>los</a:t>
+            </a:r>
+            <a:r>
+              <a:rPr lang="en-US" sz="1200" dirty="0">
+                <a:latin typeface="Arial" panose="020B0604020202020204" pitchFamily="34" charset="0"/>
+                <a:cs typeface="Arial" panose="020B0604020202020204" pitchFamily="34" charset="0"/>
+              </a:rPr>
+              <a:t> </a:t>
+            </a:r>
+            <a:r>
+              <a:rPr lang="en-US" sz="1200" dirty="0" err="1">
+                <a:latin typeface="Arial" panose="020B0604020202020204" pitchFamily="34" charset="0"/>
+                <a:cs typeface="Arial" panose="020B0604020202020204" pitchFamily="34" charset="0"/>
+              </a:rPr>
+              <a:t>modos</a:t>
+            </a:r>
+            <a:r>
+              <a:rPr lang="en-US" sz="1200" dirty="0">
+                <a:latin typeface="Arial" panose="020B0604020202020204" pitchFamily="34" charset="0"/>
+                <a:cs typeface="Arial" panose="020B0604020202020204" pitchFamily="34" charset="0"/>
+              </a:rPr>
+              <a:t> 0 y 2 son pares y </a:t>
+            </a:r>
+            <a:r>
+              <a:rPr lang="en-US" sz="1200" dirty="0" err="1">
+                <a:latin typeface="Arial" panose="020B0604020202020204" pitchFamily="34" charset="0"/>
+                <a:cs typeface="Arial" panose="020B0604020202020204" pitchFamily="34" charset="0"/>
+              </a:rPr>
+              <a:t>los</a:t>
+            </a:r>
+            <a:r>
+              <a:rPr lang="en-US" sz="1200" dirty="0">
+                <a:latin typeface="Arial" panose="020B0604020202020204" pitchFamily="34" charset="0"/>
+                <a:cs typeface="Arial" panose="020B0604020202020204" pitchFamily="34" charset="0"/>
+              </a:rPr>
+              <a:t> </a:t>
+            </a:r>
+            <a:r>
+              <a:rPr lang="en-US" sz="1200" dirty="0" err="1">
+                <a:latin typeface="Arial" panose="020B0604020202020204" pitchFamily="34" charset="0"/>
+                <a:cs typeface="Arial" panose="020B0604020202020204" pitchFamily="34" charset="0"/>
+              </a:rPr>
+              <a:t>modos</a:t>
+            </a:r>
+            <a:r>
+              <a:rPr lang="en-US" sz="1200" dirty="0">
+                <a:latin typeface="Arial" panose="020B0604020202020204" pitchFamily="34" charset="0"/>
+                <a:cs typeface="Arial" panose="020B0604020202020204" pitchFamily="34" charset="0"/>
+              </a:rPr>
+              <a:t> 1 y 3 son </a:t>
+            </a:r>
+            <a:r>
+              <a:rPr lang="en-US" sz="1200" dirty="0" err="1">
+                <a:latin typeface="Arial" panose="020B0604020202020204" pitchFamily="34" charset="0"/>
+                <a:cs typeface="Arial" panose="020B0604020202020204" pitchFamily="34" charset="0"/>
+              </a:rPr>
+              <a:t>impares</a:t>
+            </a:r>
+            <a:r>
+              <a:rPr lang="en-US" sz="1200" dirty="0">
+                <a:latin typeface="Arial" panose="020B0604020202020204" pitchFamily="34" charset="0"/>
+                <a:cs typeface="Arial" panose="020B0604020202020204" pitchFamily="34" charset="0"/>
+              </a:rPr>
+              <a:t>. Las </a:t>
+            </a:r>
+            <a:r>
+              <a:rPr lang="en-US" sz="1200" dirty="0" err="1">
+                <a:latin typeface="Arial" panose="020B0604020202020204" pitchFamily="34" charset="0"/>
+                <a:cs typeface="Arial" panose="020B0604020202020204" pitchFamily="34" charset="0"/>
+              </a:rPr>
+              <a:t>respectivas</a:t>
+            </a:r>
+            <a:r>
+              <a:rPr lang="en-US" sz="1200" dirty="0">
+                <a:latin typeface="Arial" panose="020B0604020202020204" pitchFamily="34" charset="0"/>
+                <a:cs typeface="Arial" panose="020B0604020202020204" pitchFamily="34" charset="0"/>
+              </a:rPr>
+              <a:t> </a:t>
+            </a:r>
+            <a:r>
+              <a:rPr lang="en-US" sz="1200" dirty="0" err="1">
+                <a:latin typeface="Arial" panose="020B0604020202020204" pitchFamily="34" charset="0"/>
+                <a:cs typeface="Arial" panose="020B0604020202020204" pitchFamily="34" charset="0"/>
+              </a:rPr>
+              <a:t>gráficas</a:t>
+            </a:r>
+            <a:r>
+              <a:rPr lang="en-US" sz="1200" dirty="0">
+                <a:latin typeface="Arial" panose="020B0604020202020204" pitchFamily="34" charset="0"/>
+                <a:cs typeface="Arial" panose="020B0604020202020204" pitchFamily="34" charset="0"/>
+              </a:rPr>
+              <a:t> se </a:t>
+            </a:r>
+            <a:r>
+              <a:rPr lang="en-US" sz="1200" dirty="0" err="1">
+                <a:latin typeface="Arial" panose="020B0604020202020204" pitchFamily="34" charset="0"/>
+                <a:cs typeface="Arial" panose="020B0604020202020204" pitchFamily="34" charset="0"/>
+              </a:rPr>
+              <a:t>encuentran</a:t>
+            </a:r>
+            <a:r>
+              <a:rPr lang="en-US" sz="1200" dirty="0">
+                <a:latin typeface="Arial" panose="020B0604020202020204" pitchFamily="34" charset="0"/>
+                <a:cs typeface="Arial" panose="020B0604020202020204" pitchFamily="34" charset="0"/>
+              </a:rPr>
+              <a:t> </a:t>
+            </a:r>
+            <a:r>
+              <a:rPr lang="en-US" sz="1200" dirty="0" err="1">
+                <a:latin typeface="Arial" panose="020B0604020202020204" pitchFamily="34" charset="0"/>
+                <a:cs typeface="Arial" panose="020B0604020202020204" pitchFamily="34" charset="0"/>
+              </a:rPr>
+              <a:t>en</a:t>
+            </a:r>
+            <a:r>
+              <a:rPr lang="en-US" sz="1200" dirty="0">
+                <a:latin typeface="Arial" panose="020B0604020202020204" pitchFamily="34" charset="0"/>
+                <a:cs typeface="Arial" panose="020B0604020202020204" pitchFamily="34" charset="0"/>
+              </a:rPr>
+              <a:t> la </a:t>
+            </a:r>
+            <a:r>
+              <a:rPr lang="en-US" sz="1200" dirty="0" err="1">
+                <a:latin typeface="Arial" panose="020B0604020202020204" pitchFamily="34" charset="0"/>
+                <a:cs typeface="Arial" panose="020B0604020202020204" pitchFamily="34" charset="0"/>
+              </a:rPr>
+              <a:t>siguiente</a:t>
+            </a:r>
+            <a:r>
+              <a:rPr lang="en-US" sz="1200" dirty="0">
+                <a:latin typeface="Arial" panose="020B0604020202020204" pitchFamily="34" charset="0"/>
+                <a:cs typeface="Arial" panose="020B0604020202020204" pitchFamily="34" charset="0"/>
+              </a:rPr>
+              <a:t> </a:t>
+            </a:r>
+            <a:r>
+              <a:rPr lang="en-US" sz="1200" dirty="0" err="1">
+                <a:latin typeface="Arial" panose="020B0604020202020204" pitchFamily="34" charset="0"/>
+                <a:cs typeface="Arial" panose="020B0604020202020204" pitchFamily="34" charset="0"/>
+              </a:rPr>
+              <a:t>diapositiva</a:t>
+            </a:r>
+            <a:r>
+              <a:rPr lang="en-US" sz="1200" dirty="0">
+                <a:latin typeface="Arial" panose="020B0604020202020204" pitchFamily="34" charset="0"/>
+                <a:cs typeface="Arial" panose="020B0604020202020204" pitchFamily="34" charset="0"/>
+              </a:rPr>
+              <a:t>.</a:t>
+            </a:r>
           </a:p>
           <a:p>
             <a:pPr algn="just"/>
@@ -5104,24 +6369,545 @@
           </a:p>
           <a:p>
             <a:pPr algn="just"/>
-            <a:endParaRPr lang="en-US" sz="1200" dirty="0">
-              <a:latin typeface="Arial" panose="020B0604020202020204" pitchFamily="34" charset="0"/>
-              <a:cs typeface="Arial" panose="020B0604020202020204" pitchFamily="34" charset="0"/>
-            </a:endParaRPr>
-          </a:p>
-          <a:p>
-            <a:pPr algn="just"/>
-            <a:endParaRPr lang="en-US" sz="1200" dirty="0">
-              <a:latin typeface="Arial" panose="020B0604020202020204" pitchFamily="34" charset="0"/>
-              <a:cs typeface="Arial" panose="020B0604020202020204" pitchFamily="34" charset="0"/>
-            </a:endParaRPr>
-          </a:p>
-          <a:p>
-            <a:pPr algn="just"/>
-            <a:endParaRPr lang="en-US" sz="1200" dirty="0">
-              <a:latin typeface="Arial" panose="020B0604020202020204" pitchFamily="34" charset="0"/>
-              <a:cs typeface="Arial" panose="020B0604020202020204" pitchFamily="34" charset="0"/>
-            </a:endParaRPr>
+            <a:r>
+              <a:rPr lang="en-US" sz="1200" dirty="0">
+                <a:latin typeface="Arial" panose="020B0604020202020204" pitchFamily="34" charset="0"/>
+                <a:cs typeface="Arial" panose="020B0604020202020204" pitchFamily="34" charset="0"/>
+              </a:rPr>
+              <a:t>La </a:t>
+            </a:r>
+            <a:r>
+              <a:rPr lang="en-US" sz="1200" dirty="0" err="1">
+                <a:latin typeface="Arial" panose="020B0604020202020204" pitchFamily="34" charset="0"/>
+                <a:cs typeface="Arial" panose="020B0604020202020204" pitchFamily="34" charset="0"/>
+              </a:rPr>
+              <a:t>distancia</a:t>
+            </a:r>
+            <a:r>
+              <a:rPr lang="en-US" sz="1200" dirty="0">
+                <a:latin typeface="Arial" panose="020B0604020202020204" pitchFamily="34" charset="0"/>
+                <a:cs typeface="Arial" panose="020B0604020202020204" pitchFamily="34" charset="0"/>
+              </a:rPr>
+              <a:t> de batido </a:t>
+            </a:r>
+            <a:r>
+              <a:rPr lang="en-US" sz="1200" dirty="0" err="1">
+                <a:latin typeface="Arial" panose="020B0604020202020204" pitchFamily="34" charset="0"/>
+                <a:cs typeface="Arial" panose="020B0604020202020204" pitchFamily="34" charset="0"/>
+              </a:rPr>
+              <a:t>determina</a:t>
+            </a:r>
+            <a:r>
+              <a:rPr lang="en-US" sz="1200" dirty="0">
+                <a:latin typeface="Arial" panose="020B0604020202020204" pitchFamily="34" charset="0"/>
+                <a:cs typeface="Arial" panose="020B0604020202020204" pitchFamily="34" charset="0"/>
+              </a:rPr>
+              <a:t> la </a:t>
+            </a:r>
+            <a:r>
+              <a:rPr lang="en-US" sz="1200" dirty="0" err="1">
+                <a:latin typeface="Arial" panose="020B0604020202020204" pitchFamily="34" charset="0"/>
+                <a:cs typeface="Arial" panose="020B0604020202020204" pitchFamily="34" charset="0"/>
+              </a:rPr>
+              <a:t>longitud</a:t>
+            </a:r>
+            <a:r>
+              <a:rPr lang="en-US" sz="1200" dirty="0">
+                <a:latin typeface="Arial" panose="020B0604020202020204" pitchFamily="34" charset="0"/>
+                <a:cs typeface="Arial" panose="020B0604020202020204" pitchFamily="34" charset="0"/>
+              </a:rPr>
+              <a:t> a la </a:t>
+            </a:r>
+            <a:r>
+              <a:rPr lang="en-US" sz="1200" dirty="0" err="1">
+                <a:latin typeface="Arial" panose="020B0604020202020204" pitchFamily="34" charset="0"/>
+                <a:cs typeface="Arial" panose="020B0604020202020204" pitchFamily="34" charset="0"/>
+              </a:rPr>
+              <a:t>que</a:t>
+            </a:r>
+            <a:r>
+              <a:rPr lang="en-US" sz="1200" dirty="0">
+                <a:latin typeface="Arial" panose="020B0604020202020204" pitchFamily="34" charset="0"/>
+                <a:cs typeface="Arial" panose="020B0604020202020204" pitchFamily="34" charset="0"/>
+              </a:rPr>
+              <a:t> hay </a:t>
+            </a:r>
+            <a:r>
+              <a:rPr lang="en-US" sz="1200" dirty="0" err="1">
+                <a:latin typeface="Arial" panose="020B0604020202020204" pitchFamily="34" charset="0"/>
+                <a:cs typeface="Arial" panose="020B0604020202020204" pitchFamily="34" charset="0"/>
+              </a:rPr>
+              <a:t>transferencia</a:t>
+            </a:r>
+            <a:r>
+              <a:rPr lang="en-US" sz="1200" dirty="0">
+                <a:latin typeface="Arial" panose="020B0604020202020204" pitchFamily="34" charset="0"/>
+                <a:cs typeface="Arial" panose="020B0604020202020204" pitchFamily="34" charset="0"/>
+              </a:rPr>
+              <a:t> total de </a:t>
+            </a:r>
+            <a:r>
+              <a:rPr lang="en-US" sz="1200" dirty="0" err="1">
+                <a:latin typeface="Arial" panose="020B0604020202020204" pitchFamily="34" charset="0"/>
+                <a:cs typeface="Arial" panose="020B0604020202020204" pitchFamily="34" charset="0"/>
+              </a:rPr>
+              <a:t>energía</a:t>
+            </a:r>
+            <a:r>
+              <a:rPr lang="en-US" sz="1200" dirty="0">
+                <a:latin typeface="Arial" panose="020B0604020202020204" pitchFamily="34" charset="0"/>
+                <a:cs typeface="Arial" panose="020B0604020202020204" pitchFamily="34" charset="0"/>
+              </a:rPr>
+              <a:t> de </a:t>
+            </a:r>
+            <a:r>
+              <a:rPr lang="en-US" sz="1200" dirty="0" err="1">
+                <a:latin typeface="Arial" panose="020B0604020202020204" pitchFamily="34" charset="0"/>
+                <a:cs typeface="Arial" panose="020B0604020202020204" pitchFamily="34" charset="0"/>
+              </a:rPr>
+              <a:t>una</a:t>
+            </a:r>
+            <a:r>
+              <a:rPr lang="en-US" sz="1200" dirty="0">
+                <a:latin typeface="Arial" panose="020B0604020202020204" pitchFamily="34" charset="0"/>
+                <a:cs typeface="Arial" panose="020B0604020202020204" pitchFamily="34" charset="0"/>
+              </a:rPr>
+              <a:t> </a:t>
+            </a:r>
+            <a:r>
+              <a:rPr lang="en-US" sz="1200" dirty="0" err="1">
+                <a:latin typeface="Arial" panose="020B0604020202020204" pitchFamily="34" charset="0"/>
+                <a:cs typeface="Arial" panose="020B0604020202020204" pitchFamily="34" charset="0"/>
+              </a:rPr>
+              <a:t>guía</a:t>
+            </a:r>
+            <a:r>
+              <a:rPr lang="en-US" sz="1200" dirty="0">
+                <a:latin typeface="Arial" panose="020B0604020202020204" pitchFamily="34" charset="0"/>
+                <a:cs typeface="Arial" panose="020B0604020202020204" pitchFamily="34" charset="0"/>
+              </a:rPr>
+              <a:t> a la </a:t>
+            </a:r>
+            <a:r>
+              <a:rPr lang="en-US" sz="1200" dirty="0" err="1">
+                <a:latin typeface="Arial" panose="020B0604020202020204" pitchFamily="34" charset="0"/>
+                <a:cs typeface="Arial" panose="020B0604020202020204" pitchFamily="34" charset="0"/>
+              </a:rPr>
+              <a:t>otra</a:t>
+            </a:r>
+            <a:r>
+              <a:rPr lang="en-US" sz="1200" dirty="0">
+                <a:latin typeface="Arial" panose="020B0604020202020204" pitchFamily="34" charset="0"/>
+                <a:cs typeface="Arial" panose="020B0604020202020204" pitchFamily="34" charset="0"/>
+              </a:rPr>
+              <a:t>, </a:t>
+            </a:r>
+            <a:r>
+              <a:rPr lang="en-US" sz="1200" dirty="0" err="1">
+                <a:latin typeface="Arial" panose="020B0604020202020204" pitchFamily="34" charset="0"/>
+                <a:cs typeface="Arial" panose="020B0604020202020204" pitchFamily="34" charset="0"/>
+              </a:rPr>
+              <a:t>sucediendo</a:t>
+            </a:r>
+            <a:r>
+              <a:rPr lang="en-US" sz="1200" dirty="0">
+                <a:latin typeface="Arial" panose="020B0604020202020204" pitchFamily="34" charset="0"/>
+                <a:cs typeface="Arial" panose="020B0604020202020204" pitchFamily="34" charset="0"/>
+              </a:rPr>
+              <a:t> </a:t>
+            </a:r>
+            <a:r>
+              <a:rPr lang="en-US" sz="1200" dirty="0" err="1">
+                <a:latin typeface="Arial" panose="020B0604020202020204" pitchFamily="34" charset="0"/>
+                <a:cs typeface="Arial" panose="020B0604020202020204" pitchFamily="34" charset="0"/>
+              </a:rPr>
+              <a:t>como</a:t>
+            </a:r>
+            <a:r>
+              <a:rPr lang="en-US" sz="1200" dirty="0">
+                <a:latin typeface="Arial" panose="020B0604020202020204" pitchFamily="34" charset="0"/>
+                <a:cs typeface="Arial" panose="020B0604020202020204" pitchFamily="34" charset="0"/>
+              </a:rPr>
+              <a:t> </a:t>
+            </a:r>
+            <a:r>
+              <a:rPr lang="en-US" sz="1200" dirty="0" err="1">
+                <a:latin typeface="Arial" panose="020B0604020202020204" pitchFamily="34" charset="0"/>
+                <a:cs typeface="Arial" panose="020B0604020202020204" pitchFamily="34" charset="0"/>
+              </a:rPr>
+              <a:t>consecuencia</a:t>
+            </a:r>
+            <a:r>
+              <a:rPr lang="en-US" sz="1200" dirty="0">
+                <a:latin typeface="Arial" panose="020B0604020202020204" pitchFamily="34" charset="0"/>
+                <a:cs typeface="Arial" panose="020B0604020202020204" pitchFamily="34" charset="0"/>
+              </a:rPr>
+              <a:t> del </a:t>
+            </a:r>
+            <a:r>
+              <a:rPr lang="en-US" sz="1200" dirty="0" err="1">
+                <a:latin typeface="Arial" panose="020B0604020202020204" pitchFamily="34" charset="0"/>
+                <a:cs typeface="Arial" panose="020B0604020202020204" pitchFamily="34" charset="0"/>
+              </a:rPr>
+              <a:t>acoplo</a:t>
+            </a:r>
+            <a:r>
+              <a:rPr lang="en-US" sz="1200" dirty="0">
+                <a:latin typeface="Arial" panose="020B0604020202020204" pitchFamily="34" charset="0"/>
+                <a:cs typeface="Arial" panose="020B0604020202020204" pitchFamily="34" charset="0"/>
+              </a:rPr>
+              <a:t> de </a:t>
+            </a:r>
+            <a:r>
+              <a:rPr lang="en-US" sz="1200" dirty="0" err="1">
+                <a:latin typeface="Arial" panose="020B0604020202020204" pitchFamily="34" charset="0"/>
+                <a:cs typeface="Arial" panose="020B0604020202020204" pitchFamily="34" charset="0"/>
+              </a:rPr>
+              <a:t>energía</a:t>
+            </a:r>
+            <a:r>
+              <a:rPr lang="en-US" sz="1200" dirty="0">
+                <a:latin typeface="Arial" panose="020B0604020202020204" pitchFamily="34" charset="0"/>
+                <a:cs typeface="Arial" panose="020B0604020202020204" pitchFamily="34" charset="0"/>
+              </a:rPr>
+              <a:t> entre </a:t>
+            </a:r>
+            <a:r>
+              <a:rPr lang="en-US" sz="1200" dirty="0" err="1">
+                <a:latin typeface="Arial" panose="020B0604020202020204" pitchFamily="34" charset="0"/>
+                <a:cs typeface="Arial" panose="020B0604020202020204" pitchFamily="34" charset="0"/>
+              </a:rPr>
+              <a:t>los</a:t>
+            </a:r>
+            <a:r>
+              <a:rPr lang="en-US" sz="1200" dirty="0">
+                <a:latin typeface="Arial" panose="020B0604020202020204" pitchFamily="34" charset="0"/>
+                <a:cs typeface="Arial" panose="020B0604020202020204" pitchFamily="34" charset="0"/>
+              </a:rPr>
+              <a:t> </a:t>
+            </a:r>
+            <a:r>
+              <a:rPr lang="en-US" sz="1200" dirty="0" err="1">
+                <a:latin typeface="Arial" panose="020B0604020202020204" pitchFamily="34" charset="0"/>
+                <a:cs typeface="Arial" panose="020B0604020202020204" pitchFamily="34" charset="0"/>
+              </a:rPr>
+              <a:t>modos</a:t>
+            </a:r>
+            <a:r>
+              <a:rPr lang="en-US" sz="1200" dirty="0">
+                <a:latin typeface="Arial" panose="020B0604020202020204" pitchFamily="34" charset="0"/>
+                <a:cs typeface="Arial" panose="020B0604020202020204" pitchFamily="34" charset="0"/>
+              </a:rPr>
+              <a:t> TE o TM (par e impar). Esta </a:t>
+            </a:r>
+            <a:r>
+              <a:rPr lang="en-US" sz="1200" dirty="0" err="1">
+                <a:latin typeface="Arial" panose="020B0604020202020204" pitchFamily="34" charset="0"/>
+                <a:cs typeface="Arial" panose="020B0604020202020204" pitchFamily="34" charset="0"/>
+              </a:rPr>
+              <a:t>distancia</a:t>
+            </a:r>
+            <a:r>
+              <a:rPr lang="en-US" sz="1200" dirty="0">
+                <a:latin typeface="Arial" panose="020B0604020202020204" pitchFamily="34" charset="0"/>
+                <a:cs typeface="Arial" panose="020B0604020202020204" pitchFamily="34" charset="0"/>
+              </a:rPr>
+              <a:t> </a:t>
+            </a:r>
+            <a:r>
+              <a:rPr lang="en-US" sz="1200" dirty="0" err="1">
+                <a:latin typeface="Arial" panose="020B0604020202020204" pitchFamily="34" charset="0"/>
+                <a:cs typeface="Arial" panose="020B0604020202020204" pitchFamily="34" charset="0"/>
+              </a:rPr>
+              <a:t>depende</a:t>
+            </a:r>
+            <a:r>
+              <a:rPr lang="en-US" sz="1200" dirty="0">
+                <a:latin typeface="Arial" panose="020B0604020202020204" pitchFamily="34" charset="0"/>
+                <a:cs typeface="Arial" panose="020B0604020202020204" pitchFamily="34" charset="0"/>
+              </a:rPr>
+              <a:t> </a:t>
+            </a:r>
+            <a:r>
+              <a:rPr lang="en-US" sz="1200" dirty="0" err="1">
+                <a:latin typeface="Arial" panose="020B0604020202020204" pitchFamily="34" charset="0"/>
+                <a:cs typeface="Arial" panose="020B0604020202020204" pitchFamily="34" charset="0"/>
+              </a:rPr>
+              <a:t>fundamentalmente</a:t>
+            </a:r>
+            <a:r>
+              <a:rPr lang="en-US" sz="1200" dirty="0">
+                <a:latin typeface="Arial" panose="020B0604020202020204" pitchFamily="34" charset="0"/>
+                <a:cs typeface="Arial" panose="020B0604020202020204" pitchFamily="34" charset="0"/>
+              </a:rPr>
+              <a:t> de la </a:t>
+            </a:r>
+            <a:r>
+              <a:rPr lang="en-US" sz="1200" dirty="0" err="1">
+                <a:latin typeface="Arial" panose="020B0604020202020204" pitchFamily="34" charset="0"/>
+                <a:cs typeface="Arial" panose="020B0604020202020204" pitchFamily="34" charset="0"/>
+              </a:rPr>
+              <a:t>distancia</a:t>
+            </a:r>
+            <a:r>
+              <a:rPr lang="en-US" sz="1200" dirty="0">
+                <a:latin typeface="Arial" panose="020B0604020202020204" pitchFamily="34" charset="0"/>
+                <a:cs typeface="Arial" panose="020B0604020202020204" pitchFamily="34" charset="0"/>
+              </a:rPr>
+              <a:t> entre las </a:t>
+            </a:r>
+            <a:r>
+              <a:rPr lang="en-US" sz="1200" dirty="0" err="1">
+                <a:latin typeface="Arial" panose="020B0604020202020204" pitchFamily="34" charset="0"/>
+                <a:cs typeface="Arial" panose="020B0604020202020204" pitchFamily="34" charset="0"/>
+              </a:rPr>
+              <a:t>guías</a:t>
+            </a:r>
+            <a:r>
+              <a:rPr lang="en-US" sz="1200" dirty="0">
+                <a:latin typeface="Arial" panose="020B0604020202020204" pitchFamily="34" charset="0"/>
+                <a:cs typeface="Arial" panose="020B0604020202020204" pitchFamily="34" charset="0"/>
+              </a:rPr>
+              <a:t> (gap) y la </a:t>
+            </a:r>
+            <a:r>
+              <a:rPr lang="en-US" sz="1200" dirty="0" err="1">
+                <a:latin typeface="Arial" panose="020B0604020202020204" pitchFamily="34" charset="0"/>
+                <a:cs typeface="Arial" panose="020B0604020202020204" pitchFamily="34" charset="0"/>
+              </a:rPr>
+              <a:t>diferencia</a:t>
+            </a:r>
+            <a:r>
+              <a:rPr lang="en-US" sz="1200" dirty="0">
+                <a:latin typeface="Arial" panose="020B0604020202020204" pitchFamily="34" charset="0"/>
+                <a:cs typeface="Arial" panose="020B0604020202020204" pitchFamily="34" charset="0"/>
+              </a:rPr>
+              <a:t> entre </a:t>
+            </a:r>
+            <a:r>
+              <a:rPr lang="en-US" sz="1200" dirty="0" err="1">
+                <a:latin typeface="Arial" panose="020B0604020202020204" pitchFamily="34" charset="0"/>
+                <a:cs typeface="Arial" panose="020B0604020202020204" pitchFamily="34" charset="0"/>
+              </a:rPr>
+              <a:t>índices</a:t>
+            </a:r>
+            <a:r>
+              <a:rPr lang="en-US" sz="1200" dirty="0">
+                <a:latin typeface="Arial" panose="020B0604020202020204" pitchFamily="34" charset="0"/>
+                <a:cs typeface="Arial" panose="020B0604020202020204" pitchFamily="34" charset="0"/>
+              </a:rPr>
+              <a:t> de </a:t>
+            </a:r>
+            <a:r>
+              <a:rPr lang="en-US" sz="1200" dirty="0" err="1">
+                <a:latin typeface="Arial" panose="020B0604020202020204" pitchFamily="34" charset="0"/>
+                <a:cs typeface="Arial" panose="020B0604020202020204" pitchFamily="34" charset="0"/>
+              </a:rPr>
+              <a:t>refracción</a:t>
+            </a:r>
+            <a:r>
+              <a:rPr lang="en-US" sz="1200" dirty="0">
+                <a:latin typeface="Arial" panose="020B0604020202020204" pitchFamily="34" charset="0"/>
+                <a:cs typeface="Arial" panose="020B0604020202020204" pitchFamily="34" charset="0"/>
+              </a:rPr>
+              <a:t> </a:t>
+            </a:r>
+            <a:r>
+              <a:rPr lang="en-US" sz="1200" dirty="0" err="1">
+                <a:latin typeface="Arial" panose="020B0604020202020204" pitchFamily="34" charset="0"/>
+                <a:cs typeface="Arial" panose="020B0604020202020204" pitchFamily="34" charset="0"/>
+              </a:rPr>
+              <a:t>efectivos</a:t>
+            </a:r>
+            <a:r>
+              <a:rPr lang="en-US" sz="1200" dirty="0">
+                <a:latin typeface="Arial" panose="020B0604020202020204" pitchFamily="34" charset="0"/>
+                <a:cs typeface="Arial" panose="020B0604020202020204" pitchFamily="34" charset="0"/>
+              </a:rPr>
+              <a:t> del </a:t>
+            </a:r>
+            <a:r>
+              <a:rPr lang="en-US" sz="1200" dirty="0" err="1">
+                <a:latin typeface="Arial" panose="020B0604020202020204" pitchFamily="34" charset="0"/>
+                <a:cs typeface="Arial" panose="020B0604020202020204" pitchFamily="34" charset="0"/>
+              </a:rPr>
+              <a:t>núcleo</a:t>
+            </a:r>
+            <a:r>
+              <a:rPr lang="en-US" sz="1200" dirty="0">
+                <a:latin typeface="Arial" panose="020B0604020202020204" pitchFamily="34" charset="0"/>
+                <a:cs typeface="Arial" panose="020B0604020202020204" pitchFamily="34" charset="0"/>
+              </a:rPr>
+              <a:t> y </a:t>
+            </a:r>
+            <a:r>
+              <a:rPr lang="en-US" sz="1200" dirty="0" err="1">
+                <a:latin typeface="Arial" panose="020B0604020202020204" pitchFamily="34" charset="0"/>
+                <a:cs typeface="Arial" panose="020B0604020202020204" pitchFamily="34" charset="0"/>
+              </a:rPr>
+              <a:t>el</a:t>
+            </a:r>
+            <a:r>
+              <a:rPr lang="en-US" sz="1200" dirty="0">
+                <a:latin typeface="Arial" panose="020B0604020202020204" pitchFamily="34" charset="0"/>
+                <a:cs typeface="Arial" panose="020B0604020202020204" pitchFamily="34" charset="0"/>
+              </a:rPr>
+              <a:t> cladding, </a:t>
+            </a:r>
+            <a:r>
+              <a:rPr lang="en-US" sz="1200" dirty="0" err="1">
+                <a:latin typeface="Arial" panose="020B0604020202020204" pitchFamily="34" charset="0"/>
+                <a:cs typeface="Arial" panose="020B0604020202020204" pitchFamily="34" charset="0"/>
+              </a:rPr>
+              <a:t>por</a:t>
+            </a:r>
+            <a:r>
+              <a:rPr lang="en-US" sz="1200" dirty="0">
+                <a:latin typeface="Arial" panose="020B0604020202020204" pitchFamily="34" charset="0"/>
+                <a:cs typeface="Arial" panose="020B0604020202020204" pitchFamily="34" charset="0"/>
+              </a:rPr>
+              <a:t> lo </a:t>
+            </a:r>
+            <a:r>
+              <a:rPr lang="en-US" sz="1200" dirty="0" err="1">
+                <a:latin typeface="Arial" panose="020B0604020202020204" pitchFamily="34" charset="0"/>
+                <a:cs typeface="Arial" panose="020B0604020202020204" pitchFamily="34" charset="0"/>
+              </a:rPr>
+              <a:t>que</a:t>
+            </a:r>
+            <a:r>
+              <a:rPr lang="en-US" sz="1200" dirty="0">
+                <a:latin typeface="Arial" panose="020B0604020202020204" pitchFamily="34" charset="0"/>
+                <a:cs typeface="Arial" panose="020B0604020202020204" pitchFamily="34" charset="0"/>
+              </a:rPr>
+              <a:t> </a:t>
+            </a:r>
+            <a:r>
+              <a:rPr lang="en-US" sz="1200" dirty="0" err="1">
+                <a:latin typeface="Arial" panose="020B0604020202020204" pitchFamily="34" charset="0"/>
+                <a:cs typeface="Arial" panose="020B0604020202020204" pitchFamily="34" charset="0"/>
+              </a:rPr>
+              <a:t>será</a:t>
+            </a:r>
+            <a:r>
+              <a:rPr lang="en-US" sz="1200" dirty="0">
+                <a:latin typeface="Arial" panose="020B0604020202020204" pitchFamily="34" charset="0"/>
+                <a:cs typeface="Arial" panose="020B0604020202020204" pitchFamily="34" charset="0"/>
+              </a:rPr>
+              <a:t> </a:t>
+            </a:r>
+            <a:r>
+              <a:rPr lang="en-US" sz="1200" dirty="0" err="1">
+                <a:latin typeface="Arial" panose="020B0604020202020204" pitchFamily="34" charset="0"/>
+                <a:cs typeface="Arial" panose="020B0604020202020204" pitchFamily="34" charset="0"/>
+              </a:rPr>
+              <a:t>diferente</a:t>
+            </a:r>
+            <a:r>
+              <a:rPr lang="en-US" sz="1200" dirty="0">
+                <a:latin typeface="Arial" panose="020B0604020202020204" pitchFamily="34" charset="0"/>
+                <a:cs typeface="Arial" panose="020B0604020202020204" pitchFamily="34" charset="0"/>
+              </a:rPr>
+              <a:t> para </a:t>
+            </a:r>
+            <a:r>
+              <a:rPr lang="en-US" sz="1200" dirty="0" err="1">
+                <a:latin typeface="Arial" panose="020B0604020202020204" pitchFamily="34" charset="0"/>
+                <a:cs typeface="Arial" panose="020B0604020202020204" pitchFamily="34" charset="0"/>
+              </a:rPr>
+              <a:t>cada</a:t>
+            </a:r>
+            <a:r>
+              <a:rPr lang="en-US" sz="1200" dirty="0">
+                <a:latin typeface="Arial" panose="020B0604020202020204" pitchFamily="34" charset="0"/>
+                <a:cs typeface="Arial" panose="020B0604020202020204" pitchFamily="34" charset="0"/>
+              </a:rPr>
+              <a:t> </a:t>
+            </a:r>
+            <a:r>
+              <a:rPr lang="en-US" sz="1200" dirty="0" err="1">
+                <a:latin typeface="Arial" panose="020B0604020202020204" pitchFamily="34" charset="0"/>
+                <a:cs typeface="Arial" panose="020B0604020202020204" pitchFamily="34" charset="0"/>
+              </a:rPr>
+              <a:t>estado</a:t>
+            </a:r>
+            <a:r>
+              <a:rPr lang="en-US" sz="1200" dirty="0">
+                <a:latin typeface="Arial" panose="020B0604020202020204" pitchFamily="34" charset="0"/>
+                <a:cs typeface="Arial" panose="020B0604020202020204" pitchFamily="34" charset="0"/>
+              </a:rPr>
+              <a:t> de </a:t>
+            </a:r>
+            <a:r>
+              <a:rPr lang="en-US" sz="1200" dirty="0" err="1">
+                <a:latin typeface="Arial" panose="020B0604020202020204" pitchFamily="34" charset="0"/>
+                <a:cs typeface="Arial" panose="020B0604020202020204" pitchFamily="34" charset="0"/>
+              </a:rPr>
+              <a:t>polarización</a:t>
+            </a:r>
+            <a:r>
+              <a:rPr lang="en-US" sz="1200" dirty="0">
+                <a:latin typeface="Arial" panose="020B0604020202020204" pitchFamily="34" charset="0"/>
+                <a:cs typeface="Arial" panose="020B0604020202020204" pitchFamily="34" charset="0"/>
+              </a:rPr>
+              <a:t>. Los </a:t>
+            </a:r>
+            <a:r>
+              <a:rPr lang="en-US" sz="1200" dirty="0" err="1">
+                <a:latin typeface="Arial" panose="020B0604020202020204" pitchFamily="34" charset="0"/>
+                <a:cs typeface="Arial" panose="020B0604020202020204" pitchFamily="34" charset="0"/>
+              </a:rPr>
+              <a:t>resultados</a:t>
+            </a:r>
+            <a:r>
+              <a:rPr lang="en-US" sz="1200" dirty="0">
+                <a:latin typeface="Arial" panose="020B0604020202020204" pitchFamily="34" charset="0"/>
+                <a:cs typeface="Arial" panose="020B0604020202020204" pitchFamily="34" charset="0"/>
+              </a:rPr>
+              <a:t> se indican </a:t>
+            </a:r>
+            <a:r>
+              <a:rPr lang="en-US" sz="1200" dirty="0" err="1">
+                <a:latin typeface="Arial" panose="020B0604020202020204" pitchFamily="34" charset="0"/>
+                <a:cs typeface="Arial" panose="020B0604020202020204" pitchFamily="34" charset="0"/>
+              </a:rPr>
+              <a:t>en</a:t>
+            </a:r>
+            <a:r>
+              <a:rPr lang="en-US" sz="1200" dirty="0">
+                <a:latin typeface="Arial" panose="020B0604020202020204" pitchFamily="34" charset="0"/>
+                <a:cs typeface="Arial" panose="020B0604020202020204" pitchFamily="34" charset="0"/>
+              </a:rPr>
+              <a:t> la </a:t>
+            </a:r>
+            <a:r>
+              <a:rPr lang="en-US" sz="1200" dirty="0" err="1">
+                <a:latin typeface="Arial" panose="020B0604020202020204" pitchFamily="34" charset="0"/>
+                <a:cs typeface="Arial" panose="020B0604020202020204" pitchFamily="34" charset="0"/>
+              </a:rPr>
+              <a:t>siguiente</a:t>
+            </a:r>
+            <a:r>
+              <a:rPr lang="en-US" sz="1200" dirty="0">
+                <a:latin typeface="Arial" panose="020B0604020202020204" pitchFamily="34" charset="0"/>
+                <a:cs typeface="Arial" panose="020B0604020202020204" pitchFamily="34" charset="0"/>
+              </a:rPr>
+              <a:t> </a:t>
+            </a:r>
+            <a:r>
+              <a:rPr lang="en-US" sz="1200" dirty="0" err="1">
+                <a:latin typeface="Arial" panose="020B0604020202020204" pitchFamily="34" charset="0"/>
+                <a:cs typeface="Arial" panose="020B0604020202020204" pitchFamily="34" charset="0"/>
+              </a:rPr>
+              <a:t>transparencia</a:t>
+            </a:r>
+            <a:r>
+              <a:rPr lang="en-US" sz="1200" dirty="0">
+                <a:latin typeface="Arial" panose="020B0604020202020204" pitchFamily="34" charset="0"/>
+                <a:cs typeface="Arial" panose="020B0604020202020204" pitchFamily="34" charset="0"/>
+              </a:rPr>
+              <a:t>.</a:t>
+            </a:r>
           </a:p>
           <a:p>
             <a:pPr algn="just"/>
@@ -5146,6 +6932,808 @@
 </file>
 
 <file path=ppt/slides/slide4.xml><?xml version="1.0" encoding="utf-8"?>
+<p:sld xmlns:a="http://schemas.openxmlformats.org/drawingml/2006/main" xmlns:r="http://schemas.openxmlformats.org/officeDocument/2006/relationships" xmlns:p="http://schemas.openxmlformats.org/presentationml/2006/main">
+  <p:cSld>
+    <p:spTree>
+      <p:nvGrpSpPr>
+        <p:cNvPr id="1" name="">
+          <a:extLst>
+            <a:ext uri="{FF2B5EF4-FFF2-40B4-BE49-F238E27FC236}">
+              <a16:creationId xmlns:a16="http://schemas.microsoft.com/office/drawing/2014/main" id="{9E00B685-52DE-A2E4-0A81-7EC278FE5B92}"/>
+            </a:ext>
+          </a:extLst>
+        </p:cNvPr>
+        <p:cNvGrpSpPr/>
+        <p:nvPr/>
+      </p:nvGrpSpPr>
+      <p:grpSpPr>
+        <a:xfrm>
+          <a:off x="0" y="0"/>
+          <a:ext cx="0" cy="0"/>
+          <a:chOff x="0" y="0"/>
+          <a:chExt cx="0" cy="0"/>
+        </a:xfrm>
+      </p:grpSpPr>
+      <p:sp>
+        <p:nvSpPr>
+          <p:cNvPr id="16" name="object 16">
+            <a:extLst>
+              <a:ext uri="{FF2B5EF4-FFF2-40B4-BE49-F238E27FC236}">
+                <a16:creationId xmlns:a16="http://schemas.microsoft.com/office/drawing/2014/main" id="{863464E3-32F0-BDB0-C86D-77868A92A1CE}"/>
+              </a:ext>
+            </a:extLst>
+          </p:cNvPr>
+          <p:cNvSpPr txBox="1">
+            <a:spLocks noGrp="1"/>
+          </p:cNvSpPr>
+          <p:nvPr>
+            <p:ph type="title"/>
+          </p:nvPr>
+        </p:nvSpPr>
+        <p:spPr>
+          <a:xfrm>
+            <a:off x="685800" y="408883"/>
+            <a:ext cx="10994410" cy="782265"/>
+          </a:xfrm>
+          <a:prstGeom prst="rect">
+            <a:avLst/>
+          </a:prstGeom>
+        </p:spPr>
+        <p:txBody>
+          <a:bodyPr vert="horz" wrap="square" lIns="0" tIns="12700" rIns="0" bIns="0" rtlCol="0">
+            <a:spAutoFit/>
+          </a:bodyPr>
+          <a:lstStyle/>
+          <a:p>
+            <a:pPr marL="12700">
+              <a:lnSpc>
+                <a:spcPct val="100000"/>
+              </a:lnSpc>
+              <a:spcBef>
+                <a:spcPts val="100"/>
+              </a:spcBef>
+            </a:pPr>
+            <a:r>
+              <a:rPr lang="en-US" sz="2500" dirty="0"/>
+              <a:t>Learning outcome #1 – Directional coupler cross-section in </a:t>
+            </a:r>
+            <a:r>
+              <a:rPr lang="en-US" sz="2500" dirty="0" err="1"/>
+              <a:t>GDSFactory</a:t>
+            </a:r>
+            <a:br>
+              <a:rPr lang="es-ES" sz="2500" spc="-5" dirty="0">
+                <a:latin typeface="+mj-lt"/>
+                <a:cs typeface="Lucida Sans"/>
+              </a:rPr>
+            </a:br>
+            <a:endParaRPr sz="2500" b="0" dirty="0">
+              <a:latin typeface="+mj-lt"/>
+              <a:cs typeface="Lucida Sans"/>
+            </a:endParaRPr>
+          </a:p>
+        </p:txBody>
+      </p:sp>
+      <p:pic>
+        <p:nvPicPr>
+          <p:cNvPr id="83" name="Gráfico 82">
+            <a:extLst>
+              <a:ext uri="{FF2B5EF4-FFF2-40B4-BE49-F238E27FC236}">
+                <a16:creationId xmlns:a16="http://schemas.microsoft.com/office/drawing/2014/main" id="{D06ADE66-A44D-896B-03DB-FE01F1D9B478}"/>
+              </a:ext>
+            </a:extLst>
+          </p:cNvPr>
+          <p:cNvPicPr>
+            <a:picLocks noChangeAspect="1"/>
+          </p:cNvPicPr>
+          <p:nvPr/>
+        </p:nvPicPr>
+        <p:blipFill>
+          <a:blip r:embed="rId3">
+            <a:extLst>
+              <a:ext uri="{96DAC541-7B7A-43D3-8B79-37D633B846F1}">
+                <asvg:svgBlip xmlns:asvg="http://schemas.microsoft.com/office/drawing/2016/SVG/main" r:embed="rId4"/>
+              </a:ext>
+            </a:extLst>
+          </a:blip>
+          <a:stretch>
+            <a:fillRect/>
+          </a:stretch>
+        </p:blipFill>
+        <p:spPr>
+          <a:xfrm>
+            <a:off x="5045006" y="6356057"/>
+            <a:ext cx="6409575" cy="363174"/>
+          </a:xfrm>
+          <a:prstGeom prst="rect">
+            <a:avLst/>
+          </a:prstGeom>
+        </p:spPr>
+      </p:pic>
+      <p:sp>
+        <p:nvSpPr>
+          <p:cNvPr id="84" name="Marcador de número de diapositiva 83">
+            <a:extLst>
+              <a:ext uri="{FF2B5EF4-FFF2-40B4-BE49-F238E27FC236}">
+                <a16:creationId xmlns:a16="http://schemas.microsoft.com/office/drawing/2014/main" id="{CD5EC50D-C5ED-A9BA-7E33-E6C2CBE06814}"/>
+              </a:ext>
+            </a:extLst>
+          </p:cNvPr>
+          <p:cNvSpPr>
+            <a:spLocks noGrp="1"/>
+          </p:cNvSpPr>
+          <p:nvPr>
+            <p:ph type="sldNum" sz="quarter" idx="7"/>
+          </p:nvPr>
+        </p:nvSpPr>
+        <p:spPr/>
+        <p:txBody>
+          <a:bodyPr/>
+          <a:lstStyle/>
+          <a:p>
+            <a:fld id="{B6F15528-21DE-4FAA-801E-634DDDAF4B2B}" type="slidenum">
+              <a:rPr lang="es-ES" smtClean="0"/>
+              <a:t>4</a:t>
+            </a:fld>
+            <a:endParaRPr lang="es-ES"/>
+          </a:p>
+        </p:txBody>
+      </p:sp>
+      <p:sp>
+        <p:nvSpPr>
+          <p:cNvPr id="3" name="Marcador de pie de página 2">
+            <a:extLst>
+              <a:ext uri="{FF2B5EF4-FFF2-40B4-BE49-F238E27FC236}">
+                <a16:creationId xmlns:a16="http://schemas.microsoft.com/office/drawing/2014/main" id="{24A63526-8B19-5D7A-88C4-13B1932D8DD4}"/>
+              </a:ext>
+            </a:extLst>
+          </p:cNvPr>
+          <p:cNvSpPr>
+            <a:spLocks noGrp="1"/>
+          </p:cNvSpPr>
+          <p:nvPr>
+            <p:ph type="ftr" sz="quarter" idx="5"/>
+          </p:nvPr>
+        </p:nvSpPr>
+        <p:spPr/>
+        <p:txBody>
+          <a:bodyPr/>
+          <a:lstStyle/>
+          <a:p>
+            <a:pPr marL="12700">
+              <a:spcBef>
+                <a:spcPts val="15"/>
+              </a:spcBef>
+            </a:pPr>
+            <a:r>
+              <a:rPr lang="es-ES" spc="-5"/>
+              <a:t>LAB 0.2. COUPLERS</a:t>
+            </a:r>
+            <a:endParaRPr lang="es-ES" spc="-5" dirty="0"/>
+          </a:p>
+        </p:txBody>
+      </p:sp>
+      <p:pic>
+        <p:nvPicPr>
+          <p:cNvPr id="5" name="Picture 4" descr="A blue rectangular with red circles&#10;&#10;AI-generated content may be incorrect.">
+            <a:extLst>
+              <a:ext uri="{FF2B5EF4-FFF2-40B4-BE49-F238E27FC236}">
+                <a16:creationId xmlns:a16="http://schemas.microsoft.com/office/drawing/2014/main" id="{7F333E5E-0E67-48FD-7E24-CAFF2A12044D}"/>
+              </a:ext>
+            </a:extLst>
+          </p:cNvPr>
+          <p:cNvPicPr>
+            <a:picLocks noChangeAspect="1"/>
+          </p:cNvPicPr>
+          <p:nvPr/>
+        </p:nvPicPr>
+        <p:blipFill>
+          <a:blip r:embed="rId5"/>
+          <a:stretch>
+            <a:fillRect/>
+          </a:stretch>
+        </p:blipFill>
+        <p:spPr>
+          <a:xfrm>
+            <a:off x="6194382" y="1187861"/>
+            <a:ext cx="2685680" cy="1836080"/>
+          </a:xfrm>
+          <a:prstGeom prst="rect">
+            <a:avLst/>
+          </a:prstGeom>
+        </p:spPr>
+      </p:pic>
+      <p:pic>
+        <p:nvPicPr>
+          <p:cNvPr id="6" name="Picture 5" descr="A graph with red and blue circles&#10;&#10;AI-generated content may be incorrect.">
+            <a:extLst>
+              <a:ext uri="{FF2B5EF4-FFF2-40B4-BE49-F238E27FC236}">
+                <a16:creationId xmlns:a16="http://schemas.microsoft.com/office/drawing/2014/main" id="{446029C2-A599-5F68-3CBE-F888B255BD25}"/>
+              </a:ext>
+            </a:extLst>
+          </p:cNvPr>
+          <p:cNvPicPr>
+            <a:picLocks noChangeAspect="1"/>
+          </p:cNvPicPr>
+          <p:nvPr/>
+        </p:nvPicPr>
+        <p:blipFill>
+          <a:blip r:embed="rId6"/>
+          <a:stretch>
+            <a:fillRect/>
+          </a:stretch>
+        </p:blipFill>
+        <p:spPr>
+          <a:xfrm>
+            <a:off x="9179307" y="1187861"/>
+            <a:ext cx="2691885" cy="1802313"/>
+          </a:xfrm>
+          <a:prstGeom prst="rect">
+            <a:avLst/>
+          </a:prstGeom>
+        </p:spPr>
+      </p:pic>
+      <p:pic>
+        <p:nvPicPr>
+          <p:cNvPr id="7" name="Picture 6" descr="A graph showing a number of red circles&#10;&#10;AI-generated content may be incorrect.">
+            <a:extLst>
+              <a:ext uri="{FF2B5EF4-FFF2-40B4-BE49-F238E27FC236}">
+                <a16:creationId xmlns:a16="http://schemas.microsoft.com/office/drawing/2014/main" id="{063D3DE4-00DB-8D00-109E-74C23A8C5DF0}"/>
+              </a:ext>
+            </a:extLst>
+          </p:cNvPr>
+          <p:cNvPicPr>
+            <a:picLocks noChangeAspect="1"/>
+          </p:cNvPicPr>
+          <p:nvPr/>
+        </p:nvPicPr>
+        <p:blipFill>
+          <a:blip r:embed="rId7"/>
+          <a:stretch>
+            <a:fillRect/>
+          </a:stretch>
+        </p:blipFill>
+        <p:spPr>
+          <a:xfrm>
+            <a:off x="6299958" y="3679911"/>
+            <a:ext cx="2747041" cy="1836080"/>
+          </a:xfrm>
+          <a:prstGeom prst="rect">
+            <a:avLst/>
+          </a:prstGeom>
+        </p:spPr>
+      </p:pic>
+      <p:pic>
+        <p:nvPicPr>
+          <p:cNvPr id="8" name="Picture 7" descr="A graph of red and blue lines&#10;&#10;AI-generated content may be incorrect.">
+            <a:extLst>
+              <a:ext uri="{FF2B5EF4-FFF2-40B4-BE49-F238E27FC236}">
+                <a16:creationId xmlns:a16="http://schemas.microsoft.com/office/drawing/2014/main" id="{E4E719AB-1EEE-F072-658E-9707F76D8128}"/>
+              </a:ext>
+            </a:extLst>
+          </p:cNvPr>
+          <p:cNvPicPr>
+            <a:picLocks noChangeAspect="1"/>
+          </p:cNvPicPr>
+          <p:nvPr/>
+        </p:nvPicPr>
+        <p:blipFill>
+          <a:blip r:embed="rId8"/>
+          <a:stretch>
+            <a:fillRect/>
+          </a:stretch>
+        </p:blipFill>
+        <p:spPr>
+          <a:xfrm>
+            <a:off x="9157605" y="3643668"/>
+            <a:ext cx="2735287" cy="1836079"/>
+          </a:xfrm>
+          <a:prstGeom prst="rect">
+            <a:avLst/>
+          </a:prstGeom>
+        </p:spPr>
+      </p:pic>
+      <p:sp>
+        <p:nvSpPr>
+          <p:cNvPr id="9" name="TextBox 8">
+            <a:extLst>
+              <a:ext uri="{FF2B5EF4-FFF2-40B4-BE49-F238E27FC236}">
+                <a16:creationId xmlns:a16="http://schemas.microsoft.com/office/drawing/2014/main" id="{9E13872D-847D-0DF7-B1E5-8A818F29E577}"/>
+              </a:ext>
+            </a:extLst>
+          </p:cNvPr>
+          <p:cNvSpPr txBox="1"/>
+          <p:nvPr/>
+        </p:nvSpPr>
+        <p:spPr>
+          <a:xfrm>
+            <a:off x="657520" y="1407711"/>
+            <a:ext cx="2681234" cy="307777"/>
+          </a:xfrm>
+          <a:prstGeom prst="rect">
+            <a:avLst/>
+          </a:prstGeom>
+          <a:noFill/>
+        </p:spPr>
+        <p:txBody>
+          <a:bodyPr wrap="square" rtlCol="0">
+            <a:spAutoFit/>
+          </a:bodyPr>
+          <a:lstStyle/>
+          <a:p>
+            <a:r>
+              <a:rPr lang="en-GB" sz="1400" b="1" dirty="0"/>
+              <a:t>Cross-section directional coupler:</a:t>
+            </a:r>
+          </a:p>
+        </p:txBody>
+      </p:sp>
+      <p:pic>
+        <p:nvPicPr>
+          <p:cNvPr id="14" name="Picture 13" descr="A screen shot of a computer program&#10;&#10;AI-generated content may be incorrect.">
+            <a:extLst>
+              <a:ext uri="{FF2B5EF4-FFF2-40B4-BE49-F238E27FC236}">
+                <a16:creationId xmlns:a16="http://schemas.microsoft.com/office/drawing/2014/main" id="{2B6A0902-E104-A579-83F7-AEC27439D8EA}"/>
+              </a:ext>
+            </a:extLst>
+          </p:cNvPr>
+          <p:cNvPicPr>
+            <a:picLocks noChangeAspect="1"/>
+          </p:cNvPicPr>
+          <p:nvPr/>
+        </p:nvPicPr>
+        <p:blipFill>
+          <a:blip r:embed="rId9"/>
+          <a:stretch>
+            <a:fillRect/>
+          </a:stretch>
+        </p:blipFill>
+        <p:spPr>
+          <a:xfrm>
+            <a:off x="699333" y="4512011"/>
+            <a:ext cx="4345673" cy="1525108"/>
+          </a:xfrm>
+          <a:prstGeom prst="rect">
+            <a:avLst/>
+          </a:prstGeom>
+        </p:spPr>
+      </p:pic>
+      <p:sp>
+        <p:nvSpPr>
+          <p:cNvPr id="15" name="TextBox 14">
+            <a:extLst>
+              <a:ext uri="{FF2B5EF4-FFF2-40B4-BE49-F238E27FC236}">
+                <a16:creationId xmlns:a16="http://schemas.microsoft.com/office/drawing/2014/main" id="{3C32D9D5-5E61-983B-CF56-745908DA2EA9}"/>
+              </a:ext>
+            </a:extLst>
+          </p:cNvPr>
+          <p:cNvSpPr txBox="1"/>
+          <p:nvPr/>
+        </p:nvSpPr>
+        <p:spPr>
+          <a:xfrm>
+            <a:off x="657520" y="2590800"/>
+            <a:ext cx="4811806" cy="1815882"/>
+          </a:xfrm>
+          <a:prstGeom prst="rect">
+            <a:avLst/>
+          </a:prstGeom>
+          <a:noFill/>
+        </p:spPr>
+        <p:txBody>
+          <a:bodyPr wrap="square" rtlCol="0">
+            <a:spAutoFit/>
+          </a:bodyPr>
+          <a:lstStyle/>
+          <a:p>
+            <a:r>
+              <a:rPr lang="en-GB" sz="1400" dirty="0"/>
+              <a:t>La </a:t>
+            </a:r>
+            <a:r>
+              <a:rPr lang="en-GB" sz="1400" dirty="0" err="1"/>
+              <a:t>distancia</a:t>
+            </a:r>
+            <a:r>
+              <a:rPr lang="en-GB" sz="1400" dirty="0"/>
+              <a:t> de batido para </a:t>
+            </a:r>
+            <a:r>
+              <a:rPr lang="en-GB" sz="1400" dirty="0" err="1"/>
+              <a:t>los</a:t>
+            </a:r>
+            <a:r>
+              <a:rPr lang="en-GB" sz="1400" dirty="0"/>
+              <a:t> </a:t>
+            </a:r>
+            <a:r>
+              <a:rPr lang="en-GB" sz="1400" dirty="0" err="1"/>
+              <a:t>modos</a:t>
+            </a:r>
+            <a:r>
+              <a:rPr lang="en-GB" sz="1400" dirty="0"/>
+              <a:t> TE es de 93.837 </a:t>
+            </a:r>
+            <a:r>
+              <a:rPr lang="en-GB" sz="1400" dirty="0" err="1"/>
+              <a:t>micras</a:t>
+            </a:r>
+            <a:r>
+              <a:rPr lang="en-GB" sz="1400" dirty="0"/>
+              <a:t> y para </a:t>
+            </a:r>
+            <a:r>
+              <a:rPr lang="en-GB" sz="1400" dirty="0" err="1"/>
+              <a:t>los</a:t>
+            </a:r>
+            <a:r>
+              <a:rPr lang="en-GB" sz="1400" dirty="0"/>
+              <a:t> </a:t>
+            </a:r>
+            <a:r>
+              <a:rPr lang="en-GB" sz="1400" dirty="0" err="1"/>
+              <a:t>modos</a:t>
+            </a:r>
+            <a:r>
+              <a:rPr lang="en-GB" sz="1400" dirty="0"/>
+              <a:t> TM es de 52.260 </a:t>
+            </a:r>
+            <a:r>
+              <a:rPr lang="en-GB" sz="1400" dirty="0" err="1"/>
+              <a:t>micras</a:t>
+            </a:r>
+            <a:r>
+              <a:rPr lang="en-GB" sz="1400" dirty="0"/>
+              <a:t>, </a:t>
+            </a:r>
+            <a:r>
+              <a:rPr lang="en-GB" sz="1400" dirty="0" err="1"/>
+              <a:t>por</a:t>
+            </a:r>
+            <a:r>
+              <a:rPr lang="en-GB" sz="1400" dirty="0"/>
+              <a:t> lo </a:t>
+            </a:r>
+            <a:r>
+              <a:rPr lang="en-GB" sz="1400" dirty="0" err="1"/>
+              <a:t>que</a:t>
+            </a:r>
+            <a:r>
+              <a:rPr lang="en-GB" sz="1400" dirty="0"/>
+              <a:t> </a:t>
+            </a:r>
+            <a:r>
+              <a:rPr lang="en-GB" sz="1400" dirty="0" err="1"/>
+              <a:t>el</a:t>
+            </a:r>
+            <a:r>
+              <a:rPr lang="en-GB" sz="1400" dirty="0"/>
+              <a:t> </a:t>
+            </a:r>
+            <a:r>
+              <a:rPr lang="en-GB" sz="1400" dirty="0" err="1"/>
+              <a:t>dispositivo</a:t>
+            </a:r>
+            <a:r>
+              <a:rPr lang="en-GB" sz="1400" dirty="0"/>
+              <a:t> se </a:t>
+            </a:r>
+            <a:r>
+              <a:rPr lang="en-GB" sz="1400" dirty="0" err="1"/>
+              <a:t>comporta</a:t>
+            </a:r>
+            <a:r>
+              <a:rPr lang="en-GB" sz="1400" dirty="0"/>
+              <a:t> </a:t>
+            </a:r>
+            <a:r>
+              <a:rPr lang="en-GB" sz="1400" dirty="0" err="1"/>
+              <a:t>muy</a:t>
+            </a:r>
+            <a:r>
+              <a:rPr lang="en-GB" sz="1400" dirty="0"/>
+              <a:t> </a:t>
+            </a:r>
+            <a:r>
+              <a:rPr lang="en-GB" sz="1400" dirty="0" err="1"/>
+              <a:t>diferente</a:t>
+            </a:r>
+            <a:r>
+              <a:rPr lang="en-GB" sz="1400" dirty="0"/>
+              <a:t> para ambas </a:t>
+            </a:r>
+            <a:r>
+              <a:rPr lang="en-GB" sz="1400" dirty="0" err="1"/>
+              <a:t>polarizaciones</a:t>
+            </a:r>
+            <a:r>
+              <a:rPr lang="en-GB" sz="1400" dirty="0"/>
+              <a:t>.</a:t>
+            </a:r>
+          </a:p>
+          <a:p>
+            <a:endParaRPr lang="en-GB" sz="1400" dirty="0"/>
+          </a:p>
+          <a:p>
+            <a:r>
+              <a:rPr lang="en-GB" sz="1400" dirty="0"/>
+              <a:t>Esta </a:t>
+            </a:r>
+            <a:r>
+              <a:rPr lang="en-GB" sz="1400" dirty="0" err="1"/>
+              <a:t>distancia</a:t>
+            </a:r>
+            <a:r>
+              <a:rPr lang="en-GB" sz="1400" dirty="0"/>
+              <a:t> se </a:t>
+            </a:r>
+            <a:r>
+              <a:rPr lang="en-GB" sz="1400" dirty="0" err="1"/>
+              <a:t>obtiene</a:t>
+            </a:r>
+            <a:r>
+              <a:rPr lang="en-GB" sz="1400" dirty="0"/>
+              <a:t> </a:t>
+            </a:r>
+            <a:r>
+              <a:rPr lang="en-GB" sz="1400" dirty="0" err="1"/>
+              <a:t>dividiendo</a:t>
+            </a:r>
+            <a:r>
+              <a:rPr lang="en-GB" sz="1400" dirty="0"/>
+              <a:t> 0.5*lambda entre la </a:t>
+            </a:r>
+            <a:r>
+              <a:rPr lang="en-GB" sz="1400" dirty="0" err="1"/>
+              <a:t>diferencia</a:t>
+            </a:r>
+            <a:r>
+              <a:rPr lang="en-GB" sz="1400" dirty="0"/>
+              <a:t> de </a:t>
+            </a:r>
+            <a:r>
+              <a:rPr lang="en-GB" sz="1400" dirty="0" err="1"/>
+              <a:t>índices</a:t>
+            </a:r>
+            <a:r>
+              <a:rPr lang="en-GB" sz="1400" dirty="0"/>
+              <a:t> </a:t>
+            </a:r>
+            <a:r>
+              <a:rPr lang="en-GB" sz="1400" dirty="0" err="1"/>
+              <a:t>efectivos</a:t>
+            </a:r>
+            <a:r>
+              <a:rPr lang="en-GB" sz="1400" dirty="0"/>
+              <a:t> (</a:t>
+            </a:r>
+            <a:r>
+              <a:rPr lang="en-GB" sz="1400" dirty="0" err="1"/>
+              <a:t>parte</a:t>
+            </a:r>
+            <a:r>
+              <a:rPr lang="en-GB" sz="1400" dirty="0"/>
+              <a:t> real) de ambos </a:t>
+            </a:r>
+            <a:r>
+              <a:rPr lang="en-GB" sz="1400" dirty="0" err="1"/>
+              <a:t>primeros</a:t>
+            </a:r>
+            <a:r>
+              <a:rPr lang="en-GB" sz="1400" dirty="0"/>
+              <a:t> </a:t>
+            </a:r>
+            <a:r>
+              <a:rPr lang="en-GB" sz="1400" dirty="0" err="1"/>
+              <a:t>modos</a:t>
+            </a:r>
+            <a:r>
+              <a:rPr lang="en-GB" sz="1400" dirty="0"/>
+              <a:t> de la </a:t>
+            </a:r>
+            <a:r>
+              <a:rPr lang="en-GB" sz="1400" dirty="0" err="1"/>
+              <a:t>respectiva</a:t>
+            </a:r>
+            <a:r>
+              <a:rPr lang="en-GB" sz="1400" dirty="0"/>
+              <a:t> </a:t>
+            </a:r>
+            <a:r>
+              <a:rPr lang="en-GB" sz="1400" dirty="0" err="1"/>
+              <a:t>polarización</a:t>
+            </a:r>
+            <a:r>
+              <a:rPr lang="en-GB" sz="1400" dirty="0"/>
+              <a:t>.</a:t>
+            </a:r>
+          </a:p>
+        </p:txBody>
+      </p:sp>
+      <p:pic>
+        <p:nvPicPr>
+          <p:cNvPr id="17" name="Picture 16" descr="A purple rectangular with yellow lines&#10;&#10;AI-generated content may be incorrect.">
+            <a:extLst>
+              <a:ext uri="{FF2B5EF4-FFF2-40B4-BE49-F238E27FC236}">
+                <a16:creationId xmlns:a16="http://schemas.microsoft.com/office/drawing/2014/main" id="{B4C38257-B732-F3A2-E750-9EE83FCF6697}"/>
+              </a:ext>
+            </a:extLst>
+          </p:cNvPr>
+          <p:cNvPicPr>
+            <a:picLocks noChangeAspect="1"/>
+          </p:cNvPicPr>
+          <p:nvPr/>
+        </p:nvPicPr>
+        <p:blipFill>
+          <a:blip r:embed="rId10"/>
+          <a:stretch>
+            <a:fillRect/>
+          </a:stretch>
+        </p:blipFill>
+        <p:spPr>
+          <a:xfrm>
+            <a:off x="3461900" y="912912"/>
+            <a:ext cx="2286000" cy="1605152"/>
+          </a:xfrm>
+          <a:prstGeom prst="rect">
+            <a:avLst/>
+          </a:prstGeom>
+        </p:spPr>
+      </p:pic>
+      <p:sp>
+        <p:nvSpPr>
+          <p:cNvPr id="18" name="TextBox 17">
+            <a:extLst>
+              <a:ext uri="{FF2B5EF4-FFF2-40B4-BE49-F238E27FC236}">
+                <a16:creationId xmlns:a16="http://schemas.microsoft.com/office/drawing/2014/main" id="{3D1A2153-BAC3-F07C-2A8B-F80A76BDFD3E}"/>
+              </a:ext>
+            </a:extLst>
+          </p:cNvPr>
+          <p:cNvSpPr txBox="1"/>
+          <p:nvPr/>
+        </p:nvSpPr>
+        <p:spPr>
+          <a:xfrm>
+            <a:off x="9839450" y="3016953"/>
+            <a:ext cx="1371600" cy="307777"/>
+          </a:xfrm>
+          <a:prstGeom prst="rect">
+            <a:avLst/>
+          </a:prstGeom>
+          <a:noFill/>
+        </p:spPr>
+        <p:txBody>
+          <a:bodyPr wrap="square" rtlCol="0">
+            <a:spAutoFit/>
+          </a:bodyPr>
+          <a:lstStyle/>
+          <a:p>
+            <a:r>
+              <a:rPr lang="en-GB" sz="1400" dirty="0"/>
+              <a:t>Mode 1 (TE)</a:t>
+            </a:r>
+          </a:p>
+        </p:txBody>
+      </p:sp>
+      <p:sp>
+        <p:nvSpPr>
+          <p:cNvPr id="19" name="TextBox 18">
+            <a:extLst>
+              <a:ext uri="{FF2B5EF4-FFF2-40B4-BE49-F238E27FC236}">
+                <a16:creationId xmlns:a16="http://schemas.microsoft.com/office/drawing/2014/main" id="{2070229E-16D2-D56C-F907-258E36C18BED}"/>
+              </a:ext>
+            </a:extLst>
+          </p:cNvPr>
+          <p:cNvSpPr txBox="1"/>
+          <p:nvPr/>
+        </p:nvSpPr>
+        <p:spPr>
+          <a:xfrm>
+            <a:off x="7048908" y="5491676"/>
+            <a:ext cx="1371600" cy="307777"/>
+          </a:xfrm>
+          <a:prstGeom prst="rect">
+            <a:avLst/>
+          </a:prstGeom>
+          <a:noFill/>
+        </p:spPr>
+        <p:txBody>
+          <a:bodyPr wrap="square" rtlCol="0">
+            <a:spAutoFit/>
+          </a:bodyPr>
+          <a:lstStyle/>
+          <a:p>
+            <a:r>
+              <a:rPr lang="en-GB" sz="1400" dirty="0"/>
+              <a:t>Mode 2 (TM)</a:t>
+            </a:r>
+          </a:p>
+        </p:txBody>
+      </p:sp>
+      <p:sp>
+        <p:nvSpPr>
+          <p:cNvPr id="20" name="TextBox 19">
+            <a:extLst>
+              <a:ext uri="{FF2B5EF4-FFF2-40B4-BE49-F238E27FC236}">
+                <a16:creationId xmlns:a16="http://schemas.microsoft.com/office/drawing/2014/main" id="{44135107-321E-8300-AC19-F9179F03B9A2}"/>
+              </a:ext>
+            </a:extLst>
+          </p:cNvPr>
+          <p:cNvSpPr txBox="1"/>
+          <p:nvPr/>
+        </p:nvSpPr>
+        <p:spPr>
+          <a:xfrm>
+            <a:off x="10082981" y="5473779"/>
+            <a:ext cx="1371600" cy="307777"/>
+          </a:xfrm>
+          <a:prstGeom prst="rect">
+            <a:avLst/>
+          </a:prstGeom>
+          <a:noFill/>
+        </p:spPr>
+        <p:txBody>
+          <a:bodyPr wrap="square" rtlCol="0">
+            <a:spAutoFit/>
+          </a:bodyPr>
+          <a:lstStyle/>
+          <a:p>
+            <a:r>
+              <a:rPr lang="en-GB" sz="1400" dirty="0"/>
+              <a:t>Mode 3 (TM)</a:t>
+            </a:r>
+          </a:p>
+        </p:txBody>
+      </p:sp>
+      <p:sp>
+        <p:nvSpPr>
+          <p:cNvPr id="21" name="TextBox 20">
+            <a:extLst>
+              <a:ext uri="{FF2B5EF4-FFF2-40B4-BE49-F238E27FC236}">
+                <a16:creationId xmlns:a16="http://schemas.microsoft.com/office/drawing/2014/main" id="{7A13690A-EAED-4FD0-19DD-F65FC14158DB}"/>
+              </a:ext>
+            </a:extLst>
+          </p:cNvPr>
+          <p:cNvSpPr txBox="1"/>
+          <p:nvPr/>
+        </p:nvSpPr>
+        <p:spPr>
+          <a:xfrm>
+            <a:off x="6932250" y="3020654"/>
+            <a:ext cx="1371600" cy="307777"/>
+          </a:xfrm>
+          <a:prstGeom prst="rect">
+            <a:avLst/>
+          </a:prstGeom>
+          <a:noFill/>
+        </p:spPr>
+        <p:txBody>
+          <a:bodyPr wrap="square" rtlCol="0">
+            <a:spAutoFit/>
+          </a:bodyPr>
+          <a:lstStyle/>
+          <a:p>
+            <a:r>
+              <a:rPr lang="en-GB" sz="1400" dirty="0"/>
+              <a:t>Mode 0 (TE)</a:t>
+            </a:r>
+          </a:p>
+        </p:txBody>
+      </p:sp>
+    </p:spTree>
+    <p:extLst>
+      <p:ext uri="{BB962C8B-B14F-4D97-AF65-F5344CB8AC3E}">
+        <p14:creationId xmlns:p14="http://schemas.microsoft.com/office/powerpoint/2010/main" val="3620802620"/>
+      </p:ext>
+    </p:extLst>
+  </p:cSld>
+  <p:clrMapOvr>
+    <a:masterClrMapping/>
+  </p:clrMapOvr>
+</p:sld>
+</file>
+
+<file path=ppt/slides/slide5.xml><?xml version="1.0" encoding="utf-8"?>
 <p:sld xmlns:a="http://schemas.openxmlformats.org/drawingml/2006/main" xmlns:r="http://schemas.openxmlformats.org/officeDocument/2006/relationships" xmlns:p="http://schemas.openxmlformats.org/presentationml/2006/main">
   <p:cSld>
     <p:spTree>
@@ -5277,7 +7865,7 @@
           <a:p>
             <a:fld id="{B6F15528-21DE-4FAA-801E-634DDDAF4B2B}" type="slidenum">
               <a:rPr lang="es-ES" smtClean="0"/>
-              <a:t>4</a:t>
+              <a:t>5</a:t>
             </a:fld>
             <a:endParaRPr lang="es-ES"/>
           </a:p>
@@ -5335,7 +7923,7 @@
             </p:nvSpPr>
             <p:spPr>
               <a:xfrm>
-                <a:off x="608012" y="1295400"/>
+                <a:off x="670874" y="1066800"/>
                 <a:ext cx="11048999" cy="4958137"/>
               </a:xfrm>
               <a:prstGeom prst="rect">
@@ -5416,7 +8004,7 @@
                   <a:buNone/>
                 </a:pPr>
                 <a:r>
-                  <a:rPr lang="en-US" sz="2000" b="1" dirty="0"/>
+                  <a:rPr lang="en-US" b="1" dirty="0"/>
                   <a:t>INSTRUCTOR:</a:t>
                 </a:r>
               </a:p>
@@ -5426,15 +8014,15 @@
                   <a:buChar char="•"/>
                 </a:pPr>
                 <a:r>
-                  <a:rPr lang="en-US" sz="2000" dirty="0"/>
+                  <a:rPr lang="en-US" dirty="0"/>
                   <a:t>Present Python and </a:t>
                 </a:r>
                 <a:r>
-                  <a:rPr lang="en-US" sz="2000" dirty="0" err="1"/>
+                  <a:rPr lang="en-US" dirty="0" err="1"/>
                   <a:t>GDSFactory</a:t>
                 </a:r>
                 <a:r>
-                  <a:rPr lang="en-US" sz="2000" dirty="0"/>
+                  <a:rPr lang="en-US" dirty="0"/>
                   <a:t> implementation of DC cross-section</a:t>
                 </a:r>
               </a:p>
@@ -5444,7 +8032,7 @@
                   <a:buChar char="•"/>
                 </a:pPr>
                 <a:r>
-                  <a:rPr lang="en-US" sz="2000" dirty="0"/>
+                  <a:rPr lang="en-US" dirty="0"/>
                   <a:t>Describe how to obtain the beating length </a:t>
                 </a:r>
                 <a14:m>
@@ -5452,14 +8040,14 @@
                     <m:sSub>
                       <m:sSubPr>
                         <m:ctrlPr>
-                          <a:rPr lang="es-ES" sz="2000" b="0" i="1" smtClean="0">
+                          <a:rPr lang="es-ES" b="0" i="1" smtClean="0">
                             <a:latin typeface="Cambria Math" panose="02040503050406030204" pitchFamily="18" charset="0"/>
                           </a:rPr>
                         </m:ctrlPr>
                       </m:sSubPr>
                       <m:e>
                         <m:r>
-                          <a:rPr lang="es-ES" sz="2000" b="0" i="1" smtClean="0">
+                          <a:rPr lang="es-ES" b="0" i="1" smtClean="0">
                             <a:latin typeface="Cambria Math" panose="02040503050406030204" pitchFamily="18" charset="0"/>
                           </a:rPr>
                           <m:t>𝐿</m:t>
@@ -5467,7 +8055,7 @@
                       </m:e>
                       <m:sub>
                         <m:r>
-                          <a:rPr lang="es-ES" sz="2000" b="0" i="1" smtClean="0">
+                          <a:rPr lang="es-ES" b="0" i="1" smtClean="0">
                             <a:latin typeface="Cambria Math" panose="02040503050406030204" pitchFamily="18" charset="0"/>
                           </a:rPr>
                           <m:t>𝜋</m:t>
@@ -5476,7 +8064,7 @@
                     </m:sSub>
                   </m:oMath>
                 </a14:m>
-                <a:endParaRPr lang="en-US" sz="2000" dirty="0"/>
+                <a:endParaRPr lang="en-US" dirty="0"/>
               </a:p>
               <a:p>
                 <a:pPr marL="342900" indent="-342900" algn="just">
@@ -5484,7 +8072,7 @@
                   <a:buChar char="•"/>
                 </a:pPr>
                 <a:r>
-                  <a:rPr lang="en-US" sz="2000" dirty="0"/>
+                  <a:rPr lang="en-US" dirty="0"/>
                   <a:t>Describe the outputs.</a:t>
                 </a:r>
               </a:p>
@@ -5493,47 +8081,47 @@
                   <a:buNone/>
                 </a:pPr>
                 <a:r>
-                  <a:rPr lang="en-US" sz="2000" b="1" dirty="0"/>
+                  <a:rPr lang="en-US" b="1" dirty="0"/>
                   <a:t>ALL EXAMPLE #2: </a:t>
                 </a:r>
                 <a:r>
-                  <a:rPr lang="en-US" sz="2000" dirty="0"/>
+                  <a:rPr lang="en-US" dirty="0"/>
                   <a:t>waveguide width 12 µm, gap between waveguides 0.6 µm, deep </a:t>
                 </a:r>
                 <a:r>
-                  <a:rPr lang="en-US" sz="2000" dirty="0" err="1"/>
+                  <a:rPr lang="en-US" dirty="0" err="1"/>
                   <a:t>wvg</a:t>
                 </a:r>
                 <a:r>
-                  <a:rPr lang="en-US" sz="2000" dirty="0"/>
+                  <a:rPr lang="en-US" dirty="0"/>
                   <a:t>, wavelength start and end same 1.55 µm </a:t>
                 </a:r>
                 <a:r>
-                  <a:rPr lang="en-US" sz="2000" dirty="0">
+                  <a:rPr lang="en-US" dirty="0">
                     <a:sym typeface="Wingdings" pitchFamily="2" charset="2"/>
                   </a:rPr>
                   <a:t> all ”Run”</a:t>
                 </a:r>
-                <a:endParaRPr lang="en-US" sz="2000" dirty="0"/>
+                <a:endParaRPr lang="en-US" dirty="0"/>
               </a:p>
               <a:p>
                 <a:pPr marL="0" indent="0" algn="just">
                   <a:buNone/>
                 </a:pPr>
                 <a:r>
-                  <a:rPr lang="en-US" sz="2000" b="1" dirty="0"/>
+                  <a:rPr lang="en-US" b="1" dirty="0"/>
                   <a:t>ALL: </a:t>
                 </a:r>
                 <a:r>
-                  <a:rPr lang="en-US" sz="2000" dirty="0"/>
+                  <a:rPr lang="en-US" dirty="0"/>
                   <a:t>Follow</a:t>
                 </a:r>
                 <a:r>
-                  <a:rPr lang="en-US" sz="2000" b="1" dirty="0"/>
+                  <a:rPr lang="en-US" b="1" dirty="0"/>
                   <a:t> </a:t>
                 </a:r>
                 <a:r>
-                  <a:rPr lang="en-US" sz="2000" dirty="0"/>
+                  <a:rPr lang="en-US" dirty="0"/>
                   <a:t>instructor, that will show how to 1) plot mode, 2) explore the results (neff …)</a:t>
                 </a:r>
               </a:p>
@@ -5569,7 +8157,7 @@
             </p:nvSpPr>
             <p:spPr>
               <a:xfrm>
-                <a:off x="608012" y="1295400"/>
+                <a:off x="670874" y="1066800"/>
                 <a:ext cx="11048999" cy="4958137"/>
               </a:xfrm>
               <a:prstGeom prst="rect">
@@ -5578,7 +8166,7 @@
               <a:blipFill>
                 <a:blip r:embed="rId5"/>
                 <a:stretch>
-                  <a:fillRect l="-607" t="-738" r="-552"/>
+                  <a:fillRect l="-441" t="-615" r="-441"/>
                 </a:stretch>
               </a:blipFill>
             </p:spPr>
@@ -5587,7 +8175,7 @@
               <a:lstStyle/>
               <a:p>
                 <a:r>
-                  <a:rPr lang="es-ES">
+                  <a:rPr lang="en-GB">
                     <a:noFill/>
                   </a:rPr>
                   <a:t> </a:t>
@@ -5611,8 +8199,8 @@
         </p:nvSpPr>
         <p:spPr>
           <a:xfrm>
-            <a:off x="609441" y="4860334"/>
-            <a:ext cx="11199971" cy="1200329"/>
+            <a:off x="583019" y="3316913"/>
+            <a:ext cx="11199971" cy="2677656"/>
           </a:xfrm>
           <a:prstGeom prst="rect">
             <a:avLst/>
@@ -5636,37 +8224,767 @@
           <a:p>
             <a:pPr algn="just"/>
             <a:r>
-              <a:rPr lang="en-US" sz="1200" dirty="0">
-                <a:latin typeface="Arial" panose="020B0604020202020204" pitchFamily="34" charset="0"/>
-                <a:cs typeface="Arial" panose="020B0604020202020204" pitchFamily="34" charset="0"/>
-              </a:rPr>
-              <a:t>Document all your results (neff, plot fields </a:t>
-            </a:r>
-            <a:r>
-              <a:rPr lang="en-US" sz="1200">
-                <a:latin typeface="Arial" panose="020B0604020202020204" pitchFamily="34" charset="0"/>
-                <a:cs typeface="Arial" panose="020B0604020202020204" pitchFamily="34" charset="0"/>
-              </a:rPr>
-              <a:t>of different modes, </a:t>
-            </a:r>
-            <a:r>
-              <a:rPr lang="en-US" sz="1200" dirty="0">
-                <a:latin typeface="Arial" panose="020B0604020202020204" pitchFamily="34" charset="0"/>
-                <a:cs typeface="Arial" panose="020B0604020202020204" pitchFamily="34" charset="0"/>
-              </a:rPr>
-              <a:t>comparison between </a:t>
-            </a:r>
-            <a:r>
-              <a:rPr lang="en-US" sz="1200">
-                <a:latin typeface="Arial" panose="020B0604020202020204" pitchFamily="34" charset="0"/>
-                <a:cs typeface="Arial" panose="020B0604020202020204" pitchFamily="34" charset="0"/>
-              </a:rPr>
-              <a:t>different polarizations…)</a:t>
-            </a:r>
-            <a:endParaRPr lang="en-US" sz="1200" dirty="0">
-              <a:latin typeface="Arial" panose="020B0604020202020204" pitchFamily="34" charset="0"/>
-              <a:cs typeface="Arial" panose="020B0604020202020204" pitchFamily="34" charset="0"/>
-            </a:endParaRPr>
+              <a:rPr lang="en-US" sz="1200" b="1" dirty="0">
+                <a:latin typeface="Arial" panose="020B0604020202020204" pitchFamily="34" charset="0"/>
+                <a:cs typeface="Arial" panose="020B0604020202020204" pitchFamily="34" charset="0"/>
+              </a:rPr>
+              <a:t>Document all your results (neff, plot fields of different modes, comparison between different polarizations…)</a:t>
+            </a:r>
+          </a:p>
+          <a:p>
+            <a:pPr algn="just"/>
+            <a:r>
+              <a:rPr lang="en-US" sz="1200" dirty="0">
+                <a:latin typeface="Arial" panose="020B0604020202020204" pitchFamily="34" charset="0"/>
+                <a:cs typeface="Arial" panose="020B0604020202020204" pitchFamily="34" charset="0"/>
+              </a:rPr>
+              <a:t>Para </a:t>
+            </a:r>
+            <a:r>
+              <a:rPr lang="en-US" sz="1200" dirty="0" err="1">
+                <a:latin typeface="Arial" panose="020B0604020202020204" pitchFamily="34" charset="0"/>
+                <a:cs typeface="Arial" panose="020B0604020202020204" pitchFamily="34" charset="0"/>
+              </a:rPr>
+              <a:t>el</a:t>
+            </a:r>
+            <a:r>
+              <a:rPr lang="en-US" sz="1200" dirty="0">
+                <a:latin typeface="Arial" panose="020B0604020202020204" pitchFamily="34" charset="0"/>
+                <a:cs typeface="Arial" panose="020B0604020202020204" pitchFamily="34" charset="0"/>
+              </a:rPr>
+              <a:t> </a:t>
+            </a:r>
+            <a:r>
+              <a:rPr lang="en-US" sz="1200" dirty="0" err="1">
+                <a:latin typeface="Arial" panose="020B0604020202020204" pitchFamily="34" charset="0"/>
+                <a:cs typeface="Arial" panose="020B0604020202020204" pitchFamily="34" charset="0"/>
+              </a:rPr>
+              <a:t>análisis</a:t>
+            </a:r>
+            <a:r>
+              <a:rPr lang="en-US" sz="1200" dirty="0">
+                <a:latin typeface="Arial" panose="020B0604020202020204" pitchFamily="34" charset="0"/>
+                <a:cs typeface="Arial" panose="020B0604020202020204" pitchFamily="34" charset="0"/>
+              </a:rPr>
+              <a:t> del </a:t>
+            </a:r>
+            <a:r>
+              <a:rPr lang="en-US" sz="1200" dirty="0" err="1">
+                <a:latin typeface="Arial" panose="020B0604020202020204" pitchFamily="34" charset="0"/>
+                <a:cs typeface="Arial" panose="020B0604020202020204" pitchFamily="34" charset="0"/>
+              </a:rPr>
+              <a:t>acoplador</a:t>
+            </a:r>
+            <a:r>
+              <a:rPr lang="en-US" sz="1200" dirty="0">
+                <a:latin typeface="Arial" panose="020B0604020202020204" pitchFamily="34" charset="0"/>
+                <a:cs typeface="Arial" panose="020B0604020202020204" pitchFamily="34" charset="0"/>
+              </a:rPr>
+              <a:t> </a:t>
+            </a:r>
+            <a:r>
+              <a:rPr lang="en-US" sz="1200" dirty="0" err="1">
+                <a:latin typeface="Arial" panose="020B0604020202020204" pitchFamily="34" charset="0"/>
+                <a:cs typeface="Arial" panose="020B0604020202020204" pitchFamily="34" charset="0"/>
+              </a:rPr>
+              <a:t>multimodo</a:t>
+            </a:r>
+            <a:r>
+              <a:rPr lang="en-US" sz="1200" dirty="0">
+                <a:latin typeface="Arial" panose="020B0604020202020204" pitchFamily="34" charset="0"/>
+                <a:cs typeface="Arial" panose="020B0604020202020204" pitchFamily="34" charset="0"/>
+              </a:rPr>
+              <a:t> </a:t>
+            </a:r>
+            <a:r>
+              <a:rPr lang="en-US" sz="1200" dirty="0" err="1">
+                <a:latin typeface="Arial" panose="020B0604020202020204" pitchFamily="34" charset="0"/>
+                <a:cs typeface="Arial" panose="020B0604020202020204" pitchFamily="34" charset="0"/>
+              </a:rPr>
+              <a:t>hemos</a:t>
+            </a:r>
+            <a:r>
+              <a:rPr lang="en-US" sz="1200" dirty="0">
+                <a:latin typeface="Arial" panose="020B0604020202020204" pitchFamily="34" charset="0"/>
+                <a:cs typeface="Arial" panose="020B0604020202020204" pitchFamily="34" charset="0"/>
+              </a:rPr>
+              <a:t> </a:t>
+            </a:r>
+            <a:r>
+              <a:rPr lang="en-US" sz="1200" dirty="0" err="1">
+                <a:latin typeface="Arial" panose="020B0604020202020204" pitchFamily="34" charset="0"/>
+                <a:cs typeface="Arial" panose="020B0604020202020204" pitchFamily="34" charset="0"/>
+              </a:rPr>
+              <a:t>diseñado</a:t>
+            </a:r>
+            <a:r>
+              <a:rPr lang="en-US" sz="1200" dirty="0">
+                <a:latin typeface="Arial" panose="020B0604020202020204" pitchFamily="34" charset="0"/>
+                <a:cs typeface="Arial" panose="020B0604020202020204" pitchFamily="34" charset="0"/>
+              </a:rPr>
+              <a:t> </a:t>
+            </a:r>
+            <a:r>
+              <a:rPr lang="en-US" sz="1200" dirty="0" err="1">
+                <a:latin typeface="Arial" panose="020B0604020202020204" pitchFamily="34" charset="0"/>
+                <a:cs typeface="Arial" panose="020B0604020202020204" pitchFamily="34" charset="0"/>
+              </a:rPr>
+              <a:t>una</a:t>
+            </a:r>
+            <a:r>
+              <a:rPr lang="en-US" sz="1200" dirty="0">
+                <a:latin typeface="Arial" panose="020B0604020202020204" pitchFamily="34" charset="0"/>
+                <a:cs typeface="Arial" panose="020B0604020202020204" pitchFamily="34" charset="0"/>
+              </a:rPr>
+              <a:t> </a:t>
+            </a:r>
+            <a:r>
+              <a:rPr lang="en-US" sz="1200" dirty="0" err="1">
+                <a:latin typeface="Arial" panose="020B0604020202020204" pitchFamily="34" charset="0"/>
+                <a:cs typeface="Arial" panose="020B0604020202020204" pitchFamily="34" charset="0"/>
+              </a:rPr>
+              <a:t>guía</a:t>
+            </a:r>
+            <a:r>
+              <a:rPr lang="en-US" sz="1200" dirty="0">
+                <a:latin typeface="Arial" panose="020B0604020202020204" pitchFamily="34" charset="0"/>
+                <a:cs typeface="Arial" panose="020B0604020202020204" pitchFamily="34" charset="0"/>
+              </a:rPr>
+              <a:t> de 12 </a:t>
+            </a:r>
+            <a:r>
+              <a:rPr lang="en-US" sz="1200" dirty="0" err="1">
+                <a:latin typeface="Arial" panose="020B0604020202020204" pitchFamily="34" charset="0"/>
+                <a:cs typeface="Arial" panose="020B0604020202020204" pitchFamily="34" charset="0"/>
+              </a:rPr>
+              <a:t>micras</a:t>
+            </a:r>
+            <a:r>
+              <a:rPr lang="en-US" sz="1200" dirty="0">
+                <a:latin typeface="Arial" panose="020B0604020202020204" pitchFamily="34" charset="0"/>
+                <a:cs typeface="Arial" panose="020B0604020202020204" pitchFamily="34" charset="0"/>
+              </a:rPr>
+              <a:t> de </a:t>
+            </a:r>
+            <a:r>
+              <a:rPr lang="en-US" sz="1200" dirty="0" err="1">
+                <a:latin typeface="Arial" panose="020B0604020202020204" pitchFamily="34" charset="0"/>
+                <a:cs typeface="Arial" panose="020B0604020202020204" pitchFamily="34" charset="0"/>
+              </a:rPr>
+              <a:t>anchura</a:t>
+            </a:r>
+            <a:r>
+              <a:rPr lang="en-US" sz="1200" dirty="0">
+                <a:latin typeface="Arial" panose="020B0604020202020204" pitchFamily="34" charset="0"/>
+                <a:cs typeface="Arial" panose="020B0604020202020204" pitchFamily="34" charset="0"/>
+              </a:rPr>
+              <a:t> y 300 nm de </a:t>
+            </a:r>
+            <a:r>
+              <a:rPr lang="en-US" sz="1200" dirty="0" err="1">
+                <a:latin typeface="Arial" panose="020B0604020202020204" pitchFamily="34" charset="0"/>
+                <a:cs typeface="Arial" panose="020B0604020202020204" pitchFamily="34" charset="0"/>
+              </a:rPr>
+              <a:t>altura</a:t>
+            </a:r>
+            <a:r>
+              <a:rPr lang="en-US" sz="1200" dirty="0">
+                <a:latin typeface="Arial" panose="020B0604020202020204" pitchFamily="34" charset="0"/>
+                <a:cs typeface="Arial" panose="020B0604020202020204" pitchFamily="34" charset="0"/>
+              </a:rPr>
+              <a:t> </a:t>
+            </a:r>
+            <a:r>
+              <a:rPr lang="en-US" sz="1200" dirty="0" err="1">
+                <a:latin typeface="Arial" panose="020B0604020202020204" pitchFamily="34" charset="0"/>
+                <a:cs typeface="Arial" panose="020B0604020202020204" pitchFamily="34" charset="0"/>
+              </a:rPr>
+              <a:t>utilizando</a:t>
+            </a:r>
+            <a:r>
+              <a:rPr lang="en-US" sz="1200" dirty="0">
+                <a:latin typeface="Arial" panose="020B0604020202020204" pitchFamily="34" charset="0"/>
+                <a:cs typeface="Arial" panose="020B0604020202020204" pitchFamily="34" charset="0"/>
+              </a:rPr>
+              <a:t> la </a:t>
+            </a:r>
+            <a:r>
+              <a:rPr lang="en-US" sz="1200" dirty="0" err="1">
+                <a:latin typeface="Arial" panose="020B0604020202020204" pitchFamily="34" charset="0"/>
+                <a:cs typeface="Arial" panose="020B0604020202020204" pitchFamily="34" charset="0"/>
+              </a:rPr>
+              <a:t>función</a:t>
+            </a:r>
+            <a:r>
+              <a:rPr lang="en-US" sz="1200" dirty="0">
+                <a:latin typeface="Arial" panose="020B0604020202020204" pitchFamily="34" charset="0"/>
+                <a:cs typeface="Arial" panose="020B0604020202020204" pitchFamily="34" charset="0"/>
+              </a:rPr>
+              <a:t> de </a:t>
+            </a:r>
+            <a:r>
+              <a:rPr lang="en-US" sz="1200" dirty="0" err="1">
+                <a:latin typeface="Arial" panose="020B0604020202020204" pitchFamily="34" charset="0"/>
+                <a:cs typeface="Arial" panose="020B0604020202020204" pitchFamily="34" charset="0"/>
+              </a:rPr>
+              <a:t>GDSFactory</a:t>
+            </a:r>
+            <a:r>
+              <a:rPr lang="en-US" sz="1200" dirty="0">
+                <a:latin typeface="Arial" panose="020B0604020202020204" pitchFamily="34" charset="0"/>
+                <a:cs typeface="Arial" panose="020B0604020202020204" pitchFamily="34" charset="0"/>
+              </a:rPr>
+              <a:t> “</a:t>
+            </a:r>
+            <a:r>
+              <a:rPr lang="en-US" sz="1200" dirty="0" err="1">
+                <a:latin typeface="Arial" panose="020B0604020202020204" pitchFamily="34" charset="0"/>
+                <a:cs typeface="Arial" panose="020B0604020202020204" pitchFamily="34" charset="0"/>
+              </a:rPr>
+              <a:t>gt.modes.waveguide</a:t>
+            </a:r>
+            <a:r>
+              <a:rPr lang="en-US" sz="1200" dirty="0">
+                <a:latin typeface="Arial" panose="020B0604020202020204" pitchFamily="34" charset="0"/>
+                <a:cs typeface="Arial" panose="020B0604020202020204" pitchFamily="34" charset="0"/>
+              </a:rPr>
+              <a:t>”. </a:t>
+            </a:r>
+            <a:r>
+              <a:rPr lang="en-US" sz="1200" dirty="0" err="1">
+                <a:latin typeface="Arial" panose="020B0604020202020204" pitchFamily="34" charset="0"/>
+                <a:cs typeface="Arial" panose="020B0604020202020204" pitchFamily="34" charset="0"/>
+              </a:rPr>
+              <a:t>Hemos</a:t>
+            </a:r>
+            <a:r>
+              <a:rPr lang="en-US" sz="1200" dirty="0">
+                <a:latin typeface="Arial" panose="020B0604020202020204" pitchFamily="34" charset="0"/>
+                <a:cs typeface="Arial" panose="020B0604020202020204" pitchFamily="34" charset="0"/>
+              </a:rPr>
+              <a:t> </a:t>
+            </a:r>
+            <a:r>
+              <a:rPr lang="en-US" sz="1200" dirty="0" err="1">
+                <a:latin typeface="Arial" panose="020B0604020202020204" pitchFamily="34" charset="0"/>
+                <a:cs typeface="Arial" panose="020B0604020202020204" pitchFamily="34" charset="0"/>
+              </a:rPr>
+              <a:t>solucionado</a:t>
+            </a:r>
+            <a:r>
+              <a:rPr lang="en-US" sz="1200" dirty="0">
+                <a:latin typeface="Arial" panose="020B0604020202020204" pitchFamily="34" charset="0"/>
+                <a:cs typeface="Arial" panose="020B0604020202020204" pitchFamily="34" charset="0"/>
+              </a:rPr>
+              <a:t> </a:t>
+            </a:r>
+            <a:r>
+              <a:rPr lang="en-US" sz="1200" dirty="0" err="1">
+                <a:latin typeface="Arial" panose="020B0604020202020204" pitchFamily="34" charset="0"/>
+                <a:cs typeface="Arial" panose="020B0604020202020204" pitchFamily="34" charset="0"/>
+              </a:rPr>
+              <a:t>el</a:t>
+            </a:r>
+            <a:r>
+              <a:rPr lang="en-US" sz="1200" dirty="0">
+                <a:latin typeface="Arial" panose="020B0604020202020204" pitchFamily="34" charset="0"/>
+                <a:cs typeface="Arial" panose="020B0604020202020204" pitchFamily="34" charset="0"/>
+              </a:rPr>
+              <a:t> </a:t>
+            </a:r>
+            <a:r>
+              <a:rPr lang="en-US" sz="1200" dirty="0" err="1">
+                <a:latin typeface="Arial" panose="020B0604020202020204" pitchFamily="34" charset="0"/>
+                <a:cs typeface="Arial" panose="020B0604020202020204" pitchFamily="34" charset="0"/>
+              </a:rPr>
+              <a:t>sistema</a:t>
+            </a:r>
+            <a:r>
+              <a:rPr lang="en-US" sz="1200" dirty="0">
+                <a:latin typeface="Arial" panose="020B0604020202020204" pitchFamily="34" charset="0"/>
+                <a:cs typeface="Arial" panose="020B0604020202020204" pitchFamily="34" charset="0"/>
+              </a:rPr>
+              <a:t> para 15 </a:t>
+            </a:r>
+            <a:r>
+              <a:rPr lang="en-US" sz="1200" dirty="0" err="1">
+                <a:latin typeface="Arial" panose="020B0604020202020204" pitchFamily="34" charset="0"/>
+                <a:cs typeface="Arial" panose="020B0604020202020204" pitchFamily="34" charset="0"/>
+              </a:rPr>
+              <a:t>modos</a:t>
+            </a:r>
+            <a:r>
+              <a:rPr lang="en-US" sz="1200" dirty="0">
+                <a:latin typeface="Arial" panose="020B0604020202020204" pitchFamily="34" charset="0"/>
+                <a:cs typeface="Arial" panose="020B0604020202020204" pitchFamily="34" charset="0"/>
+              </a:rPr>
+              <a:t>, </a:t>
+            </a:r>
+            <a:r>
+              <a:rPr lang="en-US" sz="1200" dirty="0" err="1">
+                <a:latin typeface="Arial" panose="020B0604020202020204" pitchFamily="34" charset="0"/>
+                <a:cs typeface="Arial" panose="020B0604020202020204" pitchFamily="34" charset="0"/>
+              </a:rPr>
+              <a:t>pero</a:t>
+            </a:r>
+            <a:r>
+              <a:rPr lang="en-US" sz="1200" dirty="0">
+                <a:latin typeface="Arial" panose="020B0604020202020204" pitchFamily="34" charset="0"/>
+                <a:cs typeface="Arial" panose="020B0604020202020204" pitchFamily="34" charset="0"/>
+              </a:rPr>
+              <a:t> dada la </a:t>
+            </a:r>
+            <a:r>
+              <a:rPr lang="en-US" sz="1200" dirty="0" err="1">
+                <a:latin typeface="Arial" panose="020B0604020202020204" pitchFamily="34" charset="0"/>
+                <a:cs typeface="Arial" panose="020B0604020202020204" pitchFamily="34" charset="0"/>
+              </a:rPr>
+              <a:t>diferencia</a:t>
+            </a:r>
+            <a:r>
+              <a:rPr lang="en-US" sz="1200" dirty="0">
+                <a:latin typeface="Arial" panose="020B0604020202020204" pitchFamily="34" charset="0"/>
+                <a:cs typeface="Arial" panose="020B0604020202020204" pitchFamily="34" charset="0"/>
+              </a:rPr>
+              <a:t> entre </a:t>
+            </a:r>
+            <a:r>
+              <a:rPr lang="en-US" sz="1200" dirty="0" err="1">
+                <a:latin typeface="Arial" panose="020B0604020202020204" pitchFamily="34" charset="0"/>
+                <a:cs typeface="Arial" panose="020B0604020202020204" pitchFamily="34" charset="0"/>
+              </a:rPr>
+              <a:t>el</a:t>
+            </a:r>
+            <a:r>
+              <a:rPr lang="en-US" sz="1200" dirty="0">
+                <a:latin typeface="Arial" panose="020B0604020202020204" pitchFamily="34" charset="0"/>
+                <a:cs typeface="Arial" panose="020B0604020202020204" pitchFamily="34" charset="0"/>
+              </a:rPr>
+              <a:t> </a:t>
+            </a:r>
+            <a:r>
+              <a:rPr lang="en-US" sz="1200" dirty="0" err="1">
+                <a:latin typeface="Arial" panose="020B0604020202020204" pitchFamily="34" charset="0"/>
+                <a:cs typeface="Arial" panose="020B0604020202020204" pitchFamily="34" charset="0"/>
+              </a:rPr>
+              <a:t>índice</a:t>
+            </a:r>
+            <a:r>
+              <a:rPr lang="en-US" sz="1200" dirty="0">
+                <a:latin typeface="Arial" panose="020B0604020202020204" pitchFamily="34" charset="0"/>
+                <a:cs typeface="Arial" panose="020B0604020202020204" pitchFamily="34" charset="0"/>
+              </a:rPr>
+              <a:t> </a:t>
+            </a:r>
+            <a:r>
+              <a:rPr lang="en-US" sz="1200" dirty="0" err="1">
+                <a:latin typeface="Arial" panose="020B0604020202020204" pitchFamily="34" charset="0"/>
+                <a:cs typeface="Arial" panose="020B0604020202020204" pitchFamily="34" charset="0"/>
+              </a:rPr>
+              <a:t>efectivo</a:t>
+            </a:r>
+            <a:r>
+              <a:rPr lang="en-US" sz="1200" dirty="0">
+                <a:latin typeface="Arial" panose="020B0604020202020204" pitchFamily="34" charset="0"/>
+                <a:cs typeface="Arial" panose="020B0604020202020204" pitchFamily="34" charset="0"/>
+              </a:rPr>
+              <a:t> del </a:t>
+            </a:r>
+            <a:r>
+              <a:rPr lang="en-US" sz="1200" dirty="0" err="1">
+                <a:latin typeface="Arial" panose="020B0604020202020204" pitchFamily="34" charset="0"/>
+                <a:cs typeface="Arial" panose="020B0604020202020204" pitchFamily="34" charset="0"/>
+              </a:rPr>
+              <a:t>último</a:t>
+            </a:r>
+            <a:r>
+              <a:rPr lang="en-US" sz="1200" dirty="0">
+                <a:latin typeface="Arial" panose="020B0604020202020204" pitchFamily="34" charset="0"/>
+                <a:cs typeface="Arial" panose="020B0604020202020204" pitchFamily="34" charset="0"/>
+              </a:rPr>
+              <a:t> modo </a:t>
+            </a:r>
+            <a:r>
+              <a:rPr lang="en-US" sz="1200" dirty="0" err="1">
+                <a:latin typeface="Arial" panose="020B0604020202020204" pitchFamily="34" charset="0"/>
+                <a:cs typeface="Arial" panose="020B0604020202020204" pitchFamily="34" charset="0"/>
+              </a:rPr>
+              <a:t>obtenido</a:t>
+            </a:r>
+            <a:r>
+              <a:rPr lang="en-US" sz="1200" dirty="0">
+                <a:latin typeface="Arial" panose="020B0604020202020204" pitchFamily="34" charset="0"/>
+                <a:cs typeface="Arial" panose="020B0604020202020204" pitchFamily="34" charset="0"/>
+              </a:rPr>
+              <a:t> y </a:t>
+            </a:r>
+            <a:r>
+              <a:rPr lang="en-US" sz="1200" dirty="0" err="1">
+                <a:latin typeface="Arial" panose="020B0604020202020204" pitchFamily="34" charset="0"/>
+                <a:cs typeface="Arial" panose="020B0604020202020204" pitchFamily="34" charset="0"/>
+              </a:rPr>
+              <a:t>el</a:t>
+            </a:r>
+            <a:r>
+              <a:rPr lang="en-US" sz="1200" dirty="0">
+                <a:latin typeface="Arial" panose="020B0604020202020204" pitchFamily="34" charset="0"/>
+                <a:cs typeface="Arial" panose="020B0604020202020204" pitchFamily="34" charset="0"/>
+              </a:rPr>
+              <a:t> cladding, se </a:t>
+            </a:r>
+            <a:r>
+              <a:rPr lang="en-US" sz="1200" dirty="0" err="1">
+                <a:latin typeface="Arial" panose="020B0604020202020204" pitchFamily="34" charset="0"/>
+                <a:cs typeface="Arial" panose="020B0604020202020204" pitchFamily="34" charset="0"/>
+              </a:rPr>
+              <a:t>puede</a:t>
+            </a:r>
+            <a:r>
+              <a:rPr lang="en-US" sz="1200" dirty="0">
+                <a:latin typeface="Arial" panose="020B0604020202020204" pitchFamily="34" charset="0"/>
+                <a:cs typeface="Arial" panose="020B0604020202020204" pitchFamily="34" charset="0"/>
+              </a:rPr>
+              <a:t> </a:t>
+            </a:r>
+            <a:r>
+              <a:rPr lang="en-US" sz="1200" dirty="0" err="1">
+                <a:latin typeface="Arial" panose="020B0604020202020204" pitchFamily="34" charset="0"/>
+                <a:cs typeface="Arial" panose="020B0604020202020204" pitchFamily="34" charset="0"/>
+              </a:rPr>
+              <a:t>suponer</a:t>
+            </a:r>
+            <a:r>
+              <a:rPr lang="en-US" sz="1200" dirty="0">
+                <a:latin typeface="Arial" panose="020B0604020202020204" pitchFamily="34" charset="0"/>
+                <a:cs typeface="Arial" panose="020B0604020202020204" pitchFamily="34" charset="0"/>
+              </a:rPr>
+              <a:t> </a:t>
+            </a:r>
+            <a:r>
+              <a:rPr lang="en-US" sz="1200" dirty="0" err="1">
+                <a:latin typeface="Arial" panose="020B0604020202020204" pitchFamily="34" charset="0"/>
+                <a:cs typeface="Arial" panose="020B0604020202020204" pitchFamily="34" charset="0"/>
+              </a:rPr>
+              <a:t>que</a:t>
+            </a:r>
+            <a:r>
+              <a:rPr lang="en-US" sz="1200" dirty="0">
+                <a:latin typeface="Arial" panose="020B0604020202020204" pitchFamily="34" charset="0"/>
+                <a:cs typeface="Arial" panose="020B0604020202020204" pitchFamily="34" charset="0"/>
+              </a:rPr>
+              <a:t> hay </a:t>
+            </a:r>
+            <a:r>
+              <a:rPr lang="en-US" sz="1200" dirty="0" err="1">
+                <a:latin typeface="Arial" panose="020B0604020202020204" pitchFamily="34" charset="0"/>
+                <a:cs typeface="Arial" panose="020B0604020202020204" pitchFamily="34" charset="0"/>
+              </a:rPr>
+              <a:t>margen</a:t>
+            </a:r>
+            <a:r>
+              <a:rPr lang="en-US" sz="1200" dirty="0">
+                <a:latin typeface="Arial" panose="020B0604020202020204" pitchFamily="34" charset="0"/>
+                <a:cs typeface="Arial" panose="020B0604020202020204" pitchFamily="34" charset="0"/>
+              </a:rPr>
+              <a:t> para </a:t>
+            </a:r>
+            <a:r>
+              <a:rPr lang="en-US" sz="1200" dirty="0" err="1">
+                <a:latin typeface="Arial" panose="020B0604020202020204" pitchFamily="34" charset="0"/>
+                <a:cs typeface="Arial" panose="020B0604020202020204" pitchFamily="34" charset="0"/>
+              </a:rPr>
+              <a:t>obtener</a:t>
+            </a:r>
+            <a:r>
+              <a:rPr lang="en-US" sz="1200" dirty="0">
+                <a:latin typeface="Arial" panose="020B0604020202020204" pitchFamily="34" charset="0"/>
+                <a:cs typeface="Arial" panose="020B0604020202020204" pitchFamily="34" charset="0"/>
+              </a:rPr>
+              <a:t> </a:t>
+            </a:r>
+            <a:r>
+              <a:rPr lang="en-US" sz="1200" dirty="0" err="1">
+                <a:latin typeface="Arial" panose="020B0604020202020204" pitchFamily="34" charset="0"/>
+                <a:cs typeface="Arial" panose="020B0604020202020204" pitchFamily="34" charset="0"/>
+              </a:rPr>
+              <a:t>muchos</a:t>
+            </a:r>
+            <a:r>
+              <a:rPr lang="en-US" sz="1200" dirty="0">
+                <a:latin typeface="Arial" panose="020B0604020202020204" pitchFamily="34" charset="0"/>
+                <a:cs typeface="Arial" panose="020B0604020202020204" pitchFamily="34" charset="0"/>
+              </a:rPr>
+              <a:t> </a:t>
+            </a:r>
+            <a:r>
+              <a:rPr lang="en-US" sz="1200" dirty="0" err="1">
+                <a:latin typeface="Arial" panose="020B0604020202020204" pitchFamily="34" charset="0"/>
+                <a:cs typeface="Arial" panose="020B0604020202020204" pitchFamily="34" charset="0"/>
+              </a:rPr>
+              <a:t>modos</a:t>
+            </a:r>
+            <a:r>
+              <a:rPr lang="en-US" sz="1200" dirty="0">
+                <a:latin typeface="Arial" panose="020B0604020202020204" pitchFamily="34" charset="0"/>
+                <a:cs typeface="Arial" panose="020B0604020202020204" pitchFamily="34" charset="0"/>
+              </a:rPr>
+              <a:t> </a:t>
+            </a:r>
+            <a:r>
+              <a:rPr lang="en-US" sz="1200" dirty="0" err="1">
+                <a:latin typeface="Arial" panose="020B0604020202020204" pitchFamily="34" charset="0"/>
+                <a:cs typeface="Arial" panose="020B0604020202020204" pitchFamily="34" charset="0"/>
+              </a:rPr>
+              <a:t>propagantes</a:t>
+            </a:r>
+            <a:r>
+              <a:rPr lang="en-US" sz="1200" dirty="0">
+                <a:latin typeface="Arial" panose="020B0604020202020204" pitchFamily="34" charset="0"/>
+                <a:cs typeface="Arial" panose="020B0604020202020204" pitchFamily="34" charset="0"/>
+              </a:rPr>
+              <a:t> </a:t>
+            </a:r>
+            <a:r>
+              <a:rPr lang="en-US" sz="1200" dirty="0" err="1">
+                <a:latin typeface="Arial" panose="020B0604020202020204" pitchFamily="34" charset="0"/>
+                <a:cs typeface="Arial" panose="020B0604020202020204" pitchFamily="34" charset="0"/>
+              </a:rPr>
+              <a:t>más</a:t>
+            </a:r>
+            <a:r>
+              <a:rPr lang="en-US" sz="1200" dirty="0">
+                <a:latin typeface="Arial" panose="020B0604020202020204" pitchFamily="34" charset="0"/>
+                <a:cs typeface="Arial" panose="020B0604020202020204" pitchFamily="34" charset="0"/>
+              </a:rPr>
+              <a:t>. Los </a:t>
+            </a:r>
+            <a:r>
+              <a:rPr lang="en-US" sz="1200" dirty="0" err="1">
+                <a:latin typeface="Arial" panose="020B0604020202020204" pitchFamily="34" charset="0"/>
+                <a:cs typeface="Arial" panose="020B0604020202020204" pitchFamily="34" charset="0"/>
+              </a:rPr>
+              <a:t>datos</a:t>
+            </a:r>
+            <a:r>
+              <a:rPr lang="en-US" sz="1200" dirty="0">
+                <a:latin typeface="Arial" panose="020B0604020202020204" pitchFamily="34" charset="0"/>
+                <a:cs typeface="Arial" panose="020B0604020202020204" pitchFamily="34" charset="0"/>
+              </a:rPr>
+              <a:t> de </a:t>
+            </a:r>
+            <a:r>
+              <a:rPr lang="en-US" sz="1200" dirty="0" err="1">
+                <a:latin typeface="Arial" panose="020B0604020202020204" pitchFamily="34" charset="0"/>
+                <a:cs typeface="Arial" panose="020B0604020202020204" pitchFamily="34" charset="0"/>
+              </a:rPr>
+              <a:t>estos</a:t>
+            </a:r>
+            <a:r>
+              <a:rPr lang="en-US" sz="1200" dirty="0">
+                <a:latin typeface="Arial" panose="020B0604020202020204" pitchFamily="34" charset="0"/>
+                <a:cs typeface="Arial" panose="020B0604020202020204" pitchFamily="34" charset="0"/>
+              </a:rPr>
+              <a:t> 15 </a:t>
+            </a:r>
+            <a:r>
+              <a:rPr lang="en-US" sz="1200" dirty="0" err="1">
+                <a:latin typeface="Arial" panose="020B0604020202020204" pitchFamily="34" charset="0"/>
+                <a:cs typeface="Arial" panose="020B0604020202020204" pitchFamily="34" charset="0"/>
+              </a:rPr>
+              <a:t>modos</a:t>
+            </a:r>
+            <a:r>
+              <a:rPr lang="en-US" sz="1200" dirty="0">
+                <a:latin typeface="Arial" panose="020B0604020202020204" pitchFamily="34" charset="0"/>
+                <a:cs typeface="Arial" panose="020B0604020202020204" pitchFamily="34" charset="0"/>
+              </a:rPr>
+              <a:t> (</a:t>
+            </a:r>
+            <a:r>
+              <a:rPr lang="en-US" sz="1200" dirty="0" err="1">
+                <a:latin typeface="Arial" panose="020B0604020202020204" pitchFamily="34" charset="0"/>
+                <a:cs typeface="Arial" panose="020B0604020202020204" pitchFamily="34" charset="0"/>
+              </a:rPr>
+              <a:t>índices</a:t>
+            </a:r>
+            <a:r>
+              <a:rPr lang="en-US" sz="1200" dirty="0">
+                <a:latin typeface="Arial" panose="020B0604020202020204" pitchFamily="34" charset="0"/>
+                <a:cs typeface="Arial" panose="020B0604020202020204" pitchFamily="34" charset="0"/>
+              </a:rPr>
+              <a:t> </a:t>
+            </a:r>
+            <a:r>
+              <a:rPr lang="en-US" sz="1200" dirty="0" err="1">
+                <a:latin typeface="Arial" panose="020B0604020202020204" pitchFamily="34" charset="0"/>
+                <a:cs typeface="Arial" panose="020B0604020202020204" pitchFamily="34" charset="0"/>
+              </a:rPr>
+              <a:t>efectivos</a:t>
+            </a:r>
+            <a:r>
+              <a:rPr lang="en-US" sz="1200" dirty="0">
+                <a:latin typeface="Arial" panose="020B0604020202020204" pitchFamily="34" charset="0"/>
+                <a:cs typeface="Arial" panose="020B0604020202020204" pitchFamily="34" charset="0"/>
+              </a:rPr>
+              <a:t> y </a:t>
+            </a:r>
+            <a:r>
+              <a:rPr lang="en-US" sz="1200" dirty="0" err="1">
+                <a:latin typeface="Arial" panose="020B0604020202020204" pitchFamily="34" charset="0"/>
+                <a:cs typeface="Arial" panose="020B0604020202020204" pitchFamily="34" charset="0"/>
+              </a:rPr>
+              <a:t>polarización</a:t>
+            </a:r>
+            <a:r>
+              <a:rPr lang="en-US" sz="1200" dirty="0">
+                <a:latin typeface="Arial" panose="020B0604020202020204" pitchFamily="34" charset="0"/>
+                <a:cs typeface="Arial" panose="020B0604020202020204" pitchFamily="34" charset="0"/>
+              </a:rPr>
+              <a:t>) se </a:t>
+            </a:r>
+            <a:r>
+              <a:rPr lang="en-US" sz="1200" dirty="0" err="1">
+                <a:latin typeface="Arial" panose="020B0604020202020204" pitchFamily="34" charset="0"/>
+                <a:cs typeface="Arial" panose="020B0604020202020204" pitchFamily="34" charset="0"/>
+              </a:rPr>
+              <a:t>muestran</a:t>
+            </a:r>
+            <a:r>
+              <a:rPr lang="en-US" sz="1200" dirty="0">
+                <a:latin typeface="Arial" panose="020B0604020202020204" pitchFamily="34" charset="0"/>
+                <a:cs typeface="Arial" panose="020B0604020202020204" pitchFamily="34" charset="0"/>
+              </a:rPr>
+              <a:t> </a:t>
+            </a:r>
+            <a:r>
+              <a:rPr lang="en-US" sz="1200" dirty="0" err="1">
+                <a:latin typeface="Arial" panose="020B0604020202020204" pitchFamily="34" charset="0"/>
+                <a:cs typeface="Arial" panose="020B0604020202020204" pitchFamily="34" charset="0"/>
+              </a:rPr>
+              <a:t>en</a:t>
+            </a:r>
+            <a:r>
+              <a:rPr lang="en-US" sz="1200" dirty="0">
+                <a:latin typeface="Arial" panose="020B0604020202020204" pitchFamily="34" charset="0"/>
+                <a:cs typeface="Arial" panose="020B0604020202020204" pitchFamily="34" charset="0"/>
+              </a:rPr>
+              <a:t> la </a:t>
+            </a:r>
+            <a:r>
+              <a:rPr lang="en-US" sz="1200" dirty="0" err="1">
+                <a:latin typeface="Arial" panose="020B0604020202020204" pitchFamily="34" charset="0"/>
+                <a:cs typeface="Arial" panose="020B0604020202020204" pitchFamily="34" charset="0"/>
+              </a:rPr>
+              <a:t>diapositiva</a:t>
+            </a:r>
+            <a:r>
+              <a:rPr lang="en-US" sz="1200" dirty="0">
+                <a:latin typeface="Arial" panose="020B0604020202020204" pitchFamily="34" charset="0"/>
+                <a:cs typeface="Arial" panose="020B0604020202020204" pitchFamily="34" charset="0"/>
+              </a:rPr>
+              <a:t> </a:t>
+            </a:r>
+            <a:r>
+              <a:rPr lang="en-US" sz="1200" dirty="0" err="1">
+                <a:latin typeface="Arial" panose="020B0604020202020204" pitchFamily="34" charset="0"/>
+                <a:cs typeface="Arial" panose="020B0604020202020204" pitchFamily="34" charset="0"/>
+              </a:rPr>
+              <a:t>siguiente</a:t>
+            </a:r>
+            <a:r>
+              <a:rPr lang="en-US" sz="1200" dirty="0">
+                <a:latin typeface="Arial" panose="020B0604020202020204" pitchFamily="34" charset="0"/>
+                <a:cs typeface="Arial" panose="020B0604020202020204" pitchFamily="34" charset="0"/>
+              </a:rPr>
+              <a:t>.</a:t>
+            </a:r>
+          </a:p>
+          <a:p>
+            <a:pPr algn="just"/>
+            <a:r>
+              <a:rPr lang="en-US" sz="1200" dirty="0" err="1">
+                <a:latin typeface="Arial" panose="020B0604020202020204" pitchFamily="34" charset="0"/>
+                <a:cs typeface="Arial" panose="020B0604020202020204" pitchFamily="34" charset="0"/>
+              </a:rPr>
+              <a:t>Mostramos</a:t>
+            </a:r>
+            <a:r>
+              <a:rPr lang="en-US" sz="1200" dirty="0">
+                <a:latin typeface="Arial" panose="020B0604020202020204" pitchFamily="34" charset="0"/>
+                <a:cs typeface="Arial" panose="020B0604020202020204" pitchFamily="34" charset="0"/>
+              </a:rPr>
+              <a:t> también las </a:t>
+            </a:r>
+            <a:r>
+              <a:rPr lang="en-US" sz="1200" dirty="0" err="1">
+                <a:latin typeface="Arial" panose="020B0604020202020204" pitchFamily="34" charset="0"/>
+                <a:cs typeface="Arial" panose="020B0604020202020204" pitchFamily="34" charset="0"/>
+              </a:rPr>
+              <a:t>gráficas</a:t>
+            </a:r>
+            <a:r>
+              <a:rPr lang="en-US" sz="1200" dirty="0">
+                <a:latin typeface="Arial" panose="020B0604020202020204" pitchFamily="34" charset="0"/>
+                <a:cs typeface="Arial" panose="020B0604020202020204" pitchFamily="34" charset="0"/>
+              </a:rPr>
+              <a:t> de la </a:t>
+            </a:r>
+            <a:r>
+              <a:rPr lang="en-US" sz="1200" dirty="0" err="1">
+                <a:latin typeface="Arial" panose="020B0604020202020204" pitchFamily="34" charset="0"/>
+                <a:cs typeface="Arial" panose="020B0604020202020204" pitchFamily="34" charset="0"/>
+              </a:rPr>
+              <a:t>sección</a:t>
+            </a:r>
+            <a:r>
+              <a:rPr lang="en-US" sz="1200" dirty="0">
+                <a:latin typeface="Arial" panose="020B0604020202020204" pitchFamily="34" charset="0"/>
+                <a:cs typeface="Arial" panose="020B0604020202020204" pitchFamily="34" charset="0"/>
+              </a:rPr>
+              <a:t> transversal de </a:t>
+            </a:r>
+            <a:r>
+              <a:rPr lang="en-US" sz="1200" dirty="0" err="1">
+                <a:latin typeface="Arial" panose="020B0604020202020204" pitchFamily="34" charset="0"/>
+                <a:cs typeface="Arial" panose="020B0604020202020204" pitchFamily="34" charset="0"/>
+              </a:rPr>
+              <a:t>algunos</a:t>
+            </a:r>
+            <a:r>
+              <a:rPr lang="en-US" sz="1200" dirty="0">
+                <a:latin typeface="Arial" panose="020B0604020202020204" pitchFamily="34" charset="0"/>
+                <a:cs typeface="Arial" panose="020B0604020202020204" pitchFamily="34" charset="0"/>
+              </a:rPr>
+              <a:t> de </a:t>
+            </a:r>
+            <a:r>
+              <a:rPr lang="en-US" sz="1200" dirty="0" err="1">
+                <a:latin typeface="Arial" panose="020B0604020202020204" pitchFamily="34" charset="0"/>
+                <a:cs typeface="Arial" panose="020B0604020202020204" pitchFamily="34" charset="0"/>
+              </a:rPr>
+              <a:t>estos</a:t>
+            </a:r>
+            <a:r>
+              <a:rPr lang="en-US" sz="1200" dirty="0">
+                <a:latin typeface="Arial" panose="020B0604020202020204" pitchFamily="34" charset="0"/>
+                <a:cs typeface="Arial" panose="020B0604020202020204" pitchFamily="34" charset="0"/>
+              </a:rPr>
+              <a:t> </a:t>
+            </a:r>
+            <a:r>
+              <a:rPr lang="en-US" sz="1200" dirty="0" err="1">
+                <a:latin typeface="Arial" panose="020B0604020202020204" pitchFamily="34" charset="0"/>
+                <a:cs typeface="Arial" panose="020B0604020202020204" pitchFamily="34" charset="0"/>
+              </a:rPr>
+              <a:t>modos</a:t>
+            </a:r>
+            <a:r>
+              <a:rPr lang="en-US" sz="1200" dirty="0">
+                <a:latin typeface="Arial" panose="020B0604020202020204" pitchFamily="34" charset="0"/>
+                <a:cs typeface="Arial" panose="020B0604020202020204" pitchFamily="34" charset="0"/>
+              </a:rPr>
+              <a:t>.</a:t>
+            </a:r>
           </a:p>
           <a:p>
             <a:pPr algn="just"/>
@@ -5674,6 +8992,428 @@
               <a:latin typeface="Arial" panose="020B0604020202020204" pitchFamily="34" charset="0"/>
               <a:cs typeface="Arial" panose="020B0604020202020204" pitchFamily="34" charset="0"/>
             </a:endParaRPr>
+          </a:p>
+          <a:p>
+            <a:pPr algn="just"/>
+            <a:r>
+              <a:rPr lang="en-US" sz="1200" dirty="0">
+                <a:latin typeface="Arial" panose="020B0604020202020204" pitchFamily="34" charset="0"/>
+                <a:cs typeface="Arial" panose="020B0604020202020204" pitchFamily="34" charset="0"/>
+              </a:rPr>
+              <a:t>De nuevo, para </a:t>
+            </a:r>
+            <a:r>
+              <a:rPr lang="en-US" sz="1200" dirty="0" err="1">
+                <a:latin typeface="Arial" panose="020B0604020202020204" pitchFamily="34" charset="0"/>
+                <a:cs typeface="Arial" panose="020B0604020202020204" pitchFamily="34" charset="0"/>
+              </a:rPr>
+              <a:t>el</a:t>
+            </a:r>
+            <a:r>
+              <a:rPr lang="en-US" sz="1200" dirty="0">
+                <a:latin typeface="Arial" panose="020B0604020202020204" pitchFamily="34" charset="0"/>
+                <a:cs typeface="Arial" panose="020B0604020202020204" pitchFamily="34" charset="0"/>
+              </a:rPr>
+              <a:t> </a:t>
+            </a:r>
+            <a:r>
+              <a:rPr lang="en-US" sz="1200" dirty="0" err="1">
+                <a:latin typeface="Arial" panose="020B0604020202020204" pitchFamily="34" charset="0"/>
+                <a:cs typeface="Arial" panose="020B0604020202020204" pitchFamily="34" charset="0"/>
+              </a:rPr>
+              <a:t>cálculo</a:t>
+            </a:r>
+            <a:r>
+              <a:rPr lang="en-US" sz="1200" dirty="0">
+                <a:latin typeface="Arial" panose="020B0604020202020204" pitchFamily="34" charset="0"/>
+                <a:cs typeface="Arial" panose="020B0604020202020204" pitchFamily="34" charset="0"/>
+              </a:rPr>
+              <a:t> de la </a:t>
+            </a:r>
+            <a:r>
+              <a:rPr lang="en-US" sz="1200" dirty="0" err="1">
+                <a:latin typeface="Arial" panose="020B0604020202020204" pitchFamily="34" charset="0"/>
+                <a:cs typeface="Arial" panose="020B0604020202020204" pitchFamily="34" charset="0"/>
+              </a:rPr>
+              <a:t>distancia</a:t>
+            </a:r>
+            <a:r>
+              <a:rPr lang="en-US" sz="1200" dirty="0">
+                <a:latin typeface="Arial" panose="020B0604020202020204" pitchFamily="34" charset="0"/>
+                <a:cs typeface="Arial" panose="020B0604020202020204" pitchFamily="34" charset="0"/>
+              </a:rPr>
+              <a:t> de batido, </a:t>
+            </a:r>
+            <a:r>
+              <a:rPr lang="en-US" sz="1200" dirty="0" err="1">
+                <a:latin typeface="Arial" panose="020B0604020202020204" pitchFamily="34" charset="0"/>
+                <a:cs typeface="Arial" panose="020B0604020202020204" pitchFamily="34" charset="0"/>
+              </a:rPr>
+              <a:t>debemos</a:t>
+            </a:r>
+            <a:r>
+              <a:rPr lang="en-US" sz="1200" dirty="0">
+                <a:latin typeface="Arial" panose="020B0604020202020204" pitchFamily="34" charset="0"/>
+                <a:cs typeface="Arial" panose="020B0604020202020204" pitchFamily="34" charset="0"/>
+              </a:rPr>
+              <a:t> </a:t>
+            </a:r>
+            <a:r>
+              <a:rPr lang="en-US" sz="1200" dirty="0" err="1">
+                <a:latin typeface="Arial" panose="020B0604020202020204" pitchFamily="34" charset="0"/>
+                <a:cs typeface="Arial" panose="020B0604020202020204" pitchFamily="34" charset="0"/>
+              </a:rPr>
+              <a:t>encontrar</a:t>
+            </a:r>
+            <a:r>
+              <a:rPr lang="en-US" sz="1200" dirty="0">
+                <a:latin typeface="Arial" panose="020B0604020202020204" pitchFamily="34" charset="0"/>
+                <a:cs typeface="Arial" panose="020B0604020202020204" pitchFamily="34" charset="0"/>
+              </a:rPr>
+              <a:t> </a:t>
+            </a:r>
+            <a:r>
+              <a:rPr lang="en-US" sz="1200" dirty="0" err="1">
+                <a:latin typeface="Arial" panose="020B0604020202020204" pitchFamily="34" charset="0"/>
+                <a:cs typeface="Arial" panose="020B0604020202020204" pitchFamily="34" charset="0"/>
+              </a:rPr>
+              <a:t>los</a:t>
+            </a:r>
+            <a:r>
+              <a:rPr lang="en-US" sz="1200" dirty="0">
+                <a:latin typeface="Arial" panose="020B0604020202020204" pitchFamily="34" charset="0"/>
+                <a:cs typeface="Arial" panose="020B0604020202020204" pitchFamily="34" charset="0"/>
+              </a:rPr>
+              <a:t> dos </a:t>
+            </a:r>
+            <a:r>
+              <a:rPr lang="en-US" sz="1200" dirty="0" err="1">
+                <a:latin typeface="Arial" panose="020B0604020202020204" pitchFamily="34" charset="0"/>
+                <a:cs typeface="Arial" panose="020B0604020202020204" pitchFamily="34" charset="0"/>
+              </a:rPr>
+              <a:t>primeros</a:t>
+            </a:r>
+            <a:r>
+              <a:rPr lang="en-US" sz="1200" dirty="0">
+                <a:latin typeface="Arial" panose="020B0604020202020204" pitchFamily="34" charset="0"/>
+                <a:cs typeface="Arial" panose="020B0604020202020204" pitchFamily="34" charset="0"/>
+              </a:rPr>
+              <a:t> </a:t>
+            </a:r>
+            <a:r>
+              <a:rPr lang="en-US" sz="1200" dirty="0" err="1">
+                <a:latin typeface="Arial" panose="020B0604020202020204" pitchFamily="34" charset="0"/>
+                <a:cs typeface="Arial" panose="020B0604020202020204" pitchFamily="34" charset="0"/>
+              </a:rPr>
+              <a:t>modos</a:t>
+            </a:r>
+            <a:r>
+              <a:rPr lang="en-US" sz="1200" dirty="0">
+                <a:latin typeface="Arial" panose="020B0604020202020204" pitchFamily="34" charset="0"/>
+                <a:cs typeface="Arial" panose="020B0604020202020204" pitchFamily="34" charset="0"/>
+              </a:rPr>
+              <a:t> de </a:t>
+            </a:r>
+            <a:r>
+              <a:rPr lang="en-US" sz="1200" dirty="0" err="1">
+                <a:latin typeface="Arial" panose="020B0604020202020204" pitchFamily="34" charset="0"/>
+                <a:cs typeface="Arial" panose="020B0604020202020204" pitchFamily="34" charset="0"/>
+              </a:rPr>
+              <a:t>cada</a:t>
+            </a:r>
+            <a:r>
+              <a:rPr lang="en-US" sz="1200" dirty="0">
+                <a:latin typeface="Arial" panose="020B0604020202020204" pitchFamily="34" charset="0"/>
+                <a:cs typeface="Arial" panose="020B0604020202020204" pitchFamily="34" charset="0"/>
+              </a:rPr>
+              <a:t> </a:t>
+            </a:r>
+            <a:r>
+              <a:rPr lang="en-US" sz="1200" dirty="0" err="1">
+                <a:latin typeface="Arial" panose="020B0604020202020204" pitchFamily="34" charset="0"/>
+                <a:cs typeface="Arial" panose="020B0604020202020204" pitchFamily="34" charset="0"/>
+              </a:rPr>
+              <a:t>polarización</a:t>
+            </a:r>
+            <a:r>
+              <a:rPr lang="en-US" sz="1200" dirty="0">
+                <a:latin typeface="Arial" panose="020B0604020202020204" pitchFamily="34" charset="0"/>
+                <a:cs typeface="Arial" panose="020B0604020202020204" pitchFamily="34" charset="0"/>
+              </a:rPr>
+              <a:t> (TE y TM).</a:t>
+            </a:r>
+          </a:p>
+          <a:p>
+            <a:pPr algn="just"/>
+            <a:r>
+              <a:rPr lang="en-US" sz="1200" dirty="0">
+                <a:latin typeface="Arial" panose="020B0604020202020204" pitchFamily="34" charset="0"/>
+                <a:cs typeface="Arial" panose="020B0604020202020204" pitchFamily="34" charset="0"/>
+              </a:rPr>
+              <a:t>Para </a:t>
+            </a:r>
+            <a:r>
+              <a:rPr lang="en-US" sz="1200" dirty="0" err="1">
+                <a:latin typeface="Arial" panose="020B0604020202020204" pitchFamily="34" charset="0"/>
+                <a:cs typeface="Arial" panose="020B0604020202020204" pitchFamily="34" charset="0"/>
+              </a:rPr>
+              <a:t>el</a:t>
+            </a:r>
+            <a:r>
+              <a:rPr lang="en-US" sz="1200" dirty="0">
+                <a:latin typeface="Arial" panose="020B0604020202020204" pitchFamily="34" charset="0"/>
+                <a:cs typeface="Arial" panose="020B0604020202020204" pitchFamily="34" charset="0"/>
+              </a:rPr>
+              <a:t> </a:t>
+            </a:r>
+            <a:r>
+              <a:rPr lang="en-US" sz="1200" dirty="0" err="1">
+                <a:latin typeface="Arial" panose="020B0604020202020204" pitchFamily="34" charset="0"/>
+                <a:cs typeface="Arial" panose="020B0604020202020204" pitchFamily="34" charset="0"/>
+              </a:rPr>
+              <a:t>caso</a:t>
+            </a:r>
+            <a:r>
+              <a:rPr lang="en-US" sz="1200" dirty="0">
+                <a:latin typeface="Arial" panose="020B0604020202020204" pitchFamily="34" charset="0"/>
+                <a:cs typeface="Arial" panose="020B0604020202020204" pitchFamily="34" charset="0"/>
+              </a:rPr>
+              <a:t> TE, la </a:t>
+            </a:r>
+            <a:r>
+              <a:rPr lang="en-US" sz="1200" dirty="0" err="1">
+                <a:latin typeface="Arial" panose="020B0604020202020204" pitchFamily="34" charset="0"/>
+                <a:cs typeface="Arial" panose="020B0604020202020204" pitchFamily="34" charset="0"/>
+              </a:rPr>
+              <a:t>distancia</a:t>
+            </a:r>
+            <a:r>
+              <a:rPr lang="en-US" sz="1200" dirty="0">
+                <a:latin typeface="Arial" panose="020B0604020202020204" pitchFamily="34" charset="0"/>
+                <a:cs typeface="Arial" panose="020B0604020202020204" pitchFamily="34" charset="0"/>
+              </a:rPr>
+              <a:t> de batido (</a:t>
+            </a:r>
+            <a:r>
+              <a:rPr lang="en-US" sz="1200" dirty="0" err="1">
+                <a:latin typeface="Arial" panose="020B0604020202020204" pitchFamily="34" charset="0"/>
+                <a:cs typeface="Arial" panose="020B0604020202020204" pitchFamily="34" charset="0"/>
+              </a:rPr>
+              <a:t>autoimagen</a:t>
+            </a:r>
+            <a:r>
+              <a:rPr lang="en-US" sz="1200" dirty="0">
+                <a:latin typeface="Arial" panose="020B0604020202020204" pitchFamily="34" charset="0"/>
+                <a:cs typeface="Arial" panose="020B0604020202020204" pitchFamily="34" charset="0"/>
+              </a:rPr>
+              <a:t>) es de 219.41 </a:t>
+            </a:r>
+            <a:r>
+              <a:rPr lang="en-US" sz="1200" dirty="0" err="1">
+                <a:latin typeface="Arial" panose="020B0604020202020204" pitchFamily="34" charset="0"/>
+                <a:cs typeface="Arial" panose="020B0604020202020204" pitchFamily="34" charset="0"/>
+              </a:rPr>
+              <a:t>micras</a:t>
+            </a:r>
+            <a:r>
+              <a:rPr lang="en-US" sz="1200" dirty="0">
+                <a:latin typeface="Arial" panose="020B0604020202020204" pitchFamily="34" charset="0"/>
+                <a:cs typeface="Arial" panose="020B0604020202020204" pitchFamily="34" charset="0"/>
+              </a:rPr>
+              <a:t> y para </a:t>
+            </a:r>
+            <a:r>
+              <a:rPr lang="en-US" sz="1200" dirty="0" err="1">
+                <a:latin typeface="Arial" panose="020B0604020202020204" pitchFamily="34" charset="0"/>
+                <a:cs typeface="Arial" panose="020B0604020202020204" pitchFamily="34" charset="0"/>
+              </a:rPr>
+              <a:t>el</a:t>
+            </a:r>
+            <a:r>
+              <a:rPr lang="en-US" sz="1200" dirty="0">
+                <a:latin typeface="Arial" panose="020B0604020202020204" pitchFamily="34" charset="0"/>
+                <a:cs typeface="Arial" panose="020B0604020202020204" pitchFamily="34" charset="0"/>
+              </a:rPr>
+              <a:t> </a:t>
+            </a:r>
+            <a:r>
+              <a:rPr lang="en-US" sz="1200" dirty="0" err="1">
+                <a:latin typeface="Arial" panose="020B0604020202020204" pitchFamily="34" charset="0"/>
+                <a:cs typeface="Arial" panose="020B0604020202020204" pitchFamily="34" charset="0"/>
+              </a:rPr>
+              <a:t>caso</a:t>
+            </a:r>
+            <a:r>
+              <a:rPr lang="en-US" sz="1200" dirty="0">
+                <a:latin typeface="Arial" panose="020B0604020202020204" pitchFamily="34" charset="0"/>
+                <a:cs typeface="Arial" panose="020B0604020202020204" pitchFamily="34" charset="0"/>
+              </a:rPr>
+              <a:t> TM es de 82.231 </a:t>
+            </a:r>
+            <a:r>
+              <a:rPr lang="en-US" sz="1200" dirty="0" err="1">
+                <a:latin typeface="Arial" panose="020B0604020202020204" pitchFamily="34" charset="0"/>
+                <a:cs typeface="Arial" panose="020B0604020202020204" pitchFamily="34" charset="0"/>
+              </a:rPr>
+              <a:t>micras</a:t>
+            </a:r>
+            <a:r>
+              <a:rPr lang="en-US" sz="1200" dirty="0">
+                <a:latin typeface="Arial" panose="020B0604020202020204" pitchFamily="34" charset="0"/>
+                <a:cs typeface="Arial" panose="020B0604020202020204" pitchFamily="34" charset="0"/>
+              </a:rPr>
+              <a:t>.</a:t>
+            </a:r>
+          </a:p>
+          <a:p>
+            <a:pPr algn="just"/>
+            <a:r>
+              <a:rPr lang="en-US" sz="1200" dirty="0">
+                <a:latin typeface="Arial" panose="020B0604020202020204" pitchFamily="34" charset="0"/>
+                <a:cs typeface="Arial" panose="020B0604020202020204" pitchFamily="34" charset="0"/>
+              </a:rPr>
+              <a:t>Los dos </a:t>
+            </a:r>
+            <a:r>
+              <a:rPr lang="en-US" sz="1200" dirty="0" err="1">
+                <a:latin typeface="Arial" panose="020B0604020202020204" pitchFamily="34" charset="0"/>
+                <a:cs typeface="Arial" panose="020B0604020202020204" pitchFamily="34" charset="0"/>
+              </a:rPr>
+              <a:t>primeros</a:t>
+            </a:r>
+            <a:r>
+              <a:rPr lang="en-US" sz="1200" dirty="0">
+                <a:latin typeface="Arial" panose="020B0604020202020204" pitchFamily="34" charset="0"/>
+                <a:cs typeface="Arial" panose="020B0604020202020204" pitchFamily="34" charset="0"/>
+              </a:rPr>
+              <a:t> </a:t>
+            </a:r>
+            <a:r>
+              <a:rPr lang="en-US" sz="1200" dirty="0" err="1">
+                <a:latin typeface="Arial" panose="020B0604020202020204" pitchFamily="34" charset="0"/>
+                <a:cs typeface="Arial" panose="020B0604020202020204" pitchFamily="34" charset="0"/>
+              </a:rPr>
+              <a:t>modos</a:t>
+            </a:r>
+            <a:r>
+              <a:rPr lang="en-US" sz="1200" dirty="0">
+                <a:latin typeface="Arial" panose="020B0604020202020204" pitchFamily="34" charset="0"/>
+                <a:cs typeface="Arial" panose="020B0604020202020204" pitchFamily="34" charset="0"/>
+              </a:rPr>
+              <a:t> TE </a:t>
+            </a:r>
+            <a:r>
+              <a:rPr lang="en-US" sz="1200" dirty="0" err="1">
+                <a:latin typeface="Arial" panose="020B0604020202020204" pitchFamily="34" charset="0"/>
+                <a:cs typeface="Arial" panose="020B0604020202020204" pitchFamily="34" charset="0"/>
+              </a:rPr>
+              <a:t>fueron</a:t>
+            </a:r>
+            <a:r>
+              <a:rPr lang="en-US" sz="1200" dirty="0">
+                <a:latin typeface="Arial" panose="020B0604020202020204" pitchFamily="34" charset="0"/>
+                <a:cs typeface="Arial" panose="020B0604020202020204" pitchFamily="34" charset="0"/>
+              </a:rPr>
+              <a:t> las </a:t>
+            </a:r>
+            <a:r>
+              <a:rPr lang="en-US" sz="1200" dirty="0" err="1">
+                <a:latin typeface="Arial" panose="020B0604020202020204" pitchFamily="34" charset="0"/>
+                <a:cs typeface="Arial" panose="020B0604020202020204" pitchFamily="34" charset="0"/>
+              </a:rPr>
+              <a:t>soluciones</a:t>
+            </a:r>
+            <a:r>
+              <a:rPr lang="en-US" sz="1200" dirty="0">
+                <a:latin typeface="Arial" panose="020B0604020202020204" pitchFamily="34" charset="0"/>
+                <a:cs typeface="Arial" panose="020B0604020202020204" pitchFamily="34" charset="0"/>
+              </a:rPr>
+              <a:t> Mode 0 y Mode 1 del solver, </a:t>
+            </a:r>
+            <a:r>
+              <a:rPr lang="en-US" sz="1200" dirty="0" err="1">
+                <a:latin typeface="Arial" panose="020B0604020202020204" pitchFamily="34" charset="0"/>
+                <a:cs typeface="Arial" panose="020B0604020202020204" pitchFamily="34" charset="0"/>
+              </a:rPr>
+              <a:t>mientras</a:t>
+            </a:r>
+            <a:r>
+              <a:rPr lang="en-US" sz="1200" dirty="0">
+                <a:latin typeface="Arial" panose="020B0604020202020204" pitchFamily="34" charset="0"/>
+                <a:cs typeface="Arial" panose="020B0604020202020204" pitchFamily="34" charset="0"/>
+              </a:rPr>
+              <a:t> </a:t>
+            </a:r>
+            <a:r>
+              <a:rPr lang="en-US" sz="1200" dirty="0" err="1">
+                <a:latin typeface="Arial" panose="020B0604020202020204" pitchFamily="34" charset="0"/>
+                <a:cs typeface="Arial" panose="020B0604020202020204" pitchFamily="34" charset="0"/>
+              </a:rPr>
+              <a:t>que</a:t>
+            </a:r>
+            <a:r>
+              <a:rPr lang="en-US" sz="1200" dirty="0">
+                <a:latin typeface="Arial" panose="020B0604020202020204" pitchFamily="34" charset="0"/>
+                <a:cs typeface="Arial" panose="020B0604020202020204" pitchFamily="34" charset="0"/>
+              </a:rPr>
+              <a:t> </a:t>
+            </a:r>
+            <a:r>
+              <a:rPr lang="en-US" sz="1200" dirty="0" err="1">
+                <a:latin typeface="Arial" panose="020B0604020202020204" pitchFamily="34" charset="0"/>
+                <a:cs typeface="Arial" panose="020B0604020202020204" pitchFamily="34" charset="0"/>
+              </a:rPr>
+              <a:t>los</a:t>
+            </a:r>
+            <a:r>
+              <a:rPr lang="en-US" sz="1200" dirty="0">
+                <a:latin typeface="Arial" panose="020B0604020202020204" pitchFamily="34" charset="0"/>
+                <a:cs typeface="Arial" panose="020B0604020202020204" pitchFamily="34" charset="0"/>
+              </a:rPr>
+              <a:t> dos </a:t>
+            </a:r>
+            <a:r>
+              <a:rPr lang="en-US" sz="1200" dirty="0" err="1">
+                <a:latin typeface="Arial" panose="020B0604020202020204" pitchFamily="34" charset="0"/>
+                <a:cs typeface="Arial" panose="020B0604020202020204" pitchFamily="34" charset="0"/>
+              </a:rPr>
+              <a:t>primeros</a:t>
+            </a:r>
+            <a:r>
+              <a:rPr lang="en-US" sz="1200" dirty="0">
+                <a:latin typeface="Arial" panose="020B0604020202020204" pitchFamily="34" charset="0"/>
+                <a:cs typeface="Arial" panose="020B0604020202020204" pitchFamily="34" charset="0"/>
+              </a:rPr>
+              <a:t> </a:t>
+            </a:r>
+            <a:r>
+              <a:rPr lang="en-US" sz="1200" dirty="0" err="1">
+                <a:latin typeface="Arial" panose="020B0604020202020204" pitchFamily="34" charset="0"/>
+                <a:cs typeface="Arial" panose="020B0604020202020204" pitchFamily="34" charset="0"/>
+              </a:rPr>
+              <a:t>modos</a:t>
+            </a:r>
+            <a:r>
+              <a:rPr lang="en-US" sz="1200" dirty="0">
+                <a:latin typeface="Arial" panose="020B0604020202020204" pitchFamily="34" charset="0"/>
+                <a:cs typeface="Arial" panose="020B0604020202020204" pitchFamily="34" charset="0"/>
+              </a:rPr>
+              <a:t> TM </a:t>
+            </a:r>
+            <a:r>
+              <a:rPr lang="en-US" sz="1200" dirty="0" err="1">
+                <a:latin typeface="Arial" panose="020B0604020202020204" pitchFamily="34" charset="0"/>
+                <a:cs typeface="Arial" panose="020B0604020202020204" pitchFamily="34" charset="0"/>
+              </a:rPr>
+              <a:t>fueron</a:t>
+            </a:r>
+            <a:r>
+              <a:rPr lang="en-US" sz="1200" dirty="0">
+                <a:latin typeface="Arial" panose="020B0604020202020204" pitchFamily="34" charset="0"/>
+                <a:cs typeface="Arial" panose="020B0604020202020204" pitchFamily="34" charset="0"/>
+              </a:rPr>
+              <a:t> Mode 9 y Mode 11.</a:t>
+            </a:r>
           </a:p>
           <a:p>
             <a:pPr algn="just"/>
@@ -5718,7 +9458,799 @@
 </p:sld>
 </file>
 
-<file path=ppt/slides/slide5.xml><?xml version="1.0" encoding="utf-8"?>
+<file path=ppt/slides/slide6.xml><?xml version="1.0" encoding="utf-8"?>
+<p:sld xmlns:a="http://schemas.openxmlformats.org/drawingml/2006/main" xmlns:r="http://schemas.openxmlformats.org/officeDocument/2006/relationships" xmlns:p="http://schemas.openxmlformats.org/presentationml/2006/main">
+  <p:cSld>
+    <p:spTree>
+      <p:nvGrpSpPr>
+        <p:cNvPr id="1" name="">
+          <a:extLst>
+            <a:ext uri="{FF2B5EF4-FFF2-40B4-BE49-F238E27FC236}">
+              <a16:creationId xmlns:a16="http://schemas.microsoft.com/office/drawing/2014/main" id="{FAF734D0-305C-961D-156E-B4108E05F9B1}"/>
+            </a:ext>
+          </a:extLst>
+        </p:cNvPr>
+        <p:cNvGrpSpPr/>
+        <p:nvPr/>
+      </p:nvGrpSpPr>
+      <p:grpSpPr>
+        <a:xfrm>
+          <a:off x="0" y="0"/>
+          <a:ext cx="0" cy="0"/>
+          <a:chOff x="0" y="0"/>
+          <a:chExt cx="0" cy="0"/>
+        </a:xfrm>
+      </p:grpSpPr>
+      <p:sp>
+        <p:nvSpPr>
+          <p:cNvPr id="16" name="object 16">
+            <a:extLst>
+              <a:ext uri="{FF2B5EF4-FFF2-40B4-BE49-F238E27FC236}">
+                <a16:creationId xmlns:a16="http://schemas.microsoft.com/office/drawing/2014/main" id="{F58146B3-6826-CA18-8771-56E9A33D570E}"/>
+              </a:ext>
+            </a:extLst>
+          </p:cNvPr>
+          <p:cNvSpPr txBox="1">
+            <a:spLocks noGrp="1"/>
+          </p:cNvSpPr>
+          <p:nvPr>
+            <p:ph type="title"/>
+          </p:nvPr>
+        </p:nvSpPr>
+        <p:spPr>
+          <a:xfrm>
+            <a:off x="685800" y="408883"/>
+            <a:ext cx="10994410" cy="397545"/>
+          </a:xfrm>
+          <a:prstGeom prst="rect">
+            <a:avLst/>
+          </a:prstGeom>
+        </p:spPr>
+        <p:txBody>
+          <a:bodyPr vert="horz" wrap="square" lIns="0" tIns="12700" rIns="0" bIns="0" rtlCol="0">
+            <a:spAutoFit/>
+          </a:bodyPr>
+          <a:lstStyle/>
+          <a:p>
+            <a:pPr marL="12700">
+              <a:lnSpc>
+                <a:spcPct val="100000"/>
+              </a:lnSpc>
+              <a:spcBef>
+                <a:spcPts val="100"/>
+              </a:spcBef>
+            </a:pPr>
+            <a:r>
+              <a:rPr lang="en-US" sz="2500" dirty="0"/>
+              <a:t>Learning outcome #2 – Multimode Interference (MMI) Coupler cross-section</a:t>
+            </a:r>
+            <a:endParaRPr lang="en-US" sz="2500" b="0" dirty="0">
+              <a:latin typeface="+mj-lt"/>
+              <a:cs typeface="Lucida Sans"/>
+            </a:endParaRPr>
+          </a:p>
+        </p:txBody>
+      </p:sp>
+      <p:pic>
+        <p:nvPicPr>
+          <p:cNvPr id="83" name="Gráfico 82">
+            <a:extLst>
+              <a:ext uri="{FF2B5EF4-FFF2-40B4-BE49-F238E27FC236}">
+                <a16:creationId xmlns:a16="http://schemas.microsoft.com/office/drawing/2014/main" id="{8BD371EA-EA2F-A25B-4C72-E9AC1C95FBA6}"/>
+              </a:ext>
+            </a:extLst>
+          </p:cNvPr>
+          <p:cNvPicPr>
+            <a:picLocks noChangeAspect="1"/>
+          </p:cNvPicPr>
+          <p:nvPr/>
+        </p:nvPicPr>
+        <p:blipFill>
+          <a:blip r:embed="rId3">
+            <a:extLst>
+              <a:ext uri="{96DAC541-7B7A-43D3-8B79-37D633B846F1}">
+                <asvg:svgBlip xmlns:asvg="http://schemas.microsoft.com/office/drawing/2016/SVG/main" r:embed="rId4"/>
+              </a:ext>
+            </a:extLst>
+          </a:blip>
+          <a:stretch>
+            <a:fillRect/>
+          </a:stretch>
+        </p:blipFill>
+        <p:spPr>
+          <a:xfrm>
+            <a:off x="5045006" y="6356057"/>
+            <a:ext cx="6409575" cy="363174"/>
+          </a:xfrm>
+          <a:prstGeom prst="rect">
+            <a:avLst/>
+          </a:prstGeom>
+        </p:spPr>
+      </p:pic>
+      <p:sp>
+        <p:nvSpPr>
+          <p:cNvPr id="84" name="Marcador de número de diapositiva 83">
+            <a:extLst>
+              <a:ext uri="{FF2B5EF4-FFF2-40B4-BE49-F238E27FC236}">
+                <a16:creationId xmlns:a16="http://schemas.microsoft.com/office/drawing/2014/main" id="{6D36C710-0A5F-E252-A3C2-3471ED88A5FE}"/>
+              </a:ext>
+            </a:extLst>
+          </p:cNvPr>
+          <p:cNvSpPr>
+            <a:spLocks noGrp="1"/>
+          </p:cNvSpPr>
+          <p:nvPr>
+            <p:ph type="sldNum" sz="quarter" idx="7"/>
+          </p:nvPr>
+        </p:nvSpPr>
+        <p:spPr/>
+        <p:txBody>
+          <a:bodyPr/>
+          <a:lstStyle/>
+          <a:p>
+            <a:fld id="{B6F15528-21DE-4FAA-801E-634DDDAF4B2B}" type="slidenum">
+              <a:rPr lang="es-ES" smtClean="0"/>
+              <a:t>6</a:t>
+            </a:fld>
+            <a:endParaRPr lang="es-ES"/>
+          </a:p>
+        </p:txBody>
+      </p:sp>
+      <p:sp>
+        <p:nvSpPr>
+          <p:cNvPr id="3" name="Marcador de pie de página 2">
+            <a:extLst>
+              <a:ext uri="{FF2B5EF4-FFF2-40B4-BE49-F238E27FC236}">
+                <a16:creationId xmlns:a16="http://schemas.microsoft.com/office/drawing/2014/main" id="{73885489-4BBD-137E-9A98-6A4155F42B58}"/>
+              </a:ext>
+            </a:extLst>
+          </p:cNvPr>
+          <p:cNvSpPr>
+            <a:spLocks noGrp="1"/>
+          </p:cNvSpPr>
+          <p:nvPr>
+            <p:ph type="ftr" sz="quarter" idx="5"/>
+          </p:nvPr>
+        </p:nvSpPr>
+        <p:spPr/>
+        <p:txBody>
+          <a:bodyPr/>
+          <a:lstStyle/>
+          <a:p>
+            <a:pPr marL="12700">
+              <a:spcBef>
+                <a:spcPts val="15"/>
+              </a:spcBef>
+            </a:pPr>
+            <a:r>
+              <a:rPr lang="es-ES" spc="-5"/>
+              <a:t>LAB 0.2. COUPLERS</a:t>
+            </a:r>
+            <a:endParaRPr lang="es-ES" spc="-5" dirty="0"/>
+          </a:p>
+        </p:txBody>
+      </p:sp>
+      <p:sp>
+        <p:nvSpPr>
+          <p:cNvPr id="5" name="TextBox 4">
+            <a:extLst>
+              <a:ext uri="{FF2B5EF4-FFF2-40B4-BE49-F238E27FC236}">
+                <a16:creationId xmlns:a16="http://schemas.microsoft.com/office/drawing/2014/main" id="{A15959ED-C211-912F-6409-3B7245C5519C}"/>
+              </a:ext>
+            </a:extLst>
+          </p:cNvPr>
+          <p:cNvSpPr txBox="1"/>
+          <p:nvPr/>
+        </p:nvSpPr>
+        <p:spPr>
+          <a:xfrm>
+            <a:off x="708581" y="1275126"/>
+            <a:ext cx="3318527" cy="307777"/>
+          </a:xfrm>
+          <a:prstGeom prst="rect">
+            <a:avLst/>
+          </a:prstGeom>
+          <a:noFill/>
+        </p:spPr>
+        <p:txBody>
+          <a:bodyPr wrap="square" rtlCol="0">
+            <a:spAutoFit/>
+          </a:bodyPr>
+          <a:lstStyle/>
+          <a:p>
+            <a:r>
+              <a:rPr lang="en-GB" sz="1400" b="1" dirty="0"/>
+              <a:t>Cross-section multimode coupler:</a:t>
+            </a:r>
+          </a:p>
+        </p:txBody>
+      </p:sp>
+      <p:sp>
+        <p:nvSpPr>
+          <p:cNvPr id="6" name="TextBox 5">
+            <a:extLst>
+              <a:ext uri="{FF2B5EF4-FFF2-40B4-BE49-F238E27FC236}">
+                <a16:creationId xmlns:a16="http://schemas.microsoft.com/office/drawing/2014/main" id="{68D11F60-B975-5693-64AC-AB9F6675116E}"/>
+              </a:ext>
+            </a:extLst>
+          </p:cNvPr>
+          <p:cNvSpPr txBox="1"/>
+          <p:nvPr/>
+        </p:nvSpPr>
+        <p:spPr>
+          <a:xfrm>
+            <a:off x="9824370" y="3098980"/>
+            <a:ext cx="1371600" cy="307777"/>
+          </a:xfrm>
+          <a:prstGeom prst="rect">
+            <a:avLst/>
+          </a:prstGeom>
+          <a:noFill/>
+        </p:spPr>
+        <p:txBody>
+          <a:bodyPr wrap="square" rtlCol="0">
+            <a:spAutoFit/>
+          </a:bodyPr>
+          <a:lstStyle/>
+          <a:p>
+            <a:r>
+              <a:rPr lang="en-GB" sz="1400" dirty="0"/>
+              <a:t>Mode 1 (TE)</a:t>
+            </a:r>
+          </a:p>
+        </p:txBody>
+      </p:sp>
+      <p:sp>
+        <p:nvSpPr>
+          <p:cNvPr id="7" name="TextBox 6">
+            <a:extLst>
+              <a:ext uri="{FF2B5EF4-FFF2-40B4-BE49-F238E27FC236}">
+                <a16:creationId xmlns:a16="http://schemas.microsoft.com/office/drawing/2014/main" id="{E31E3C9C-575B-3E0C-1371-F188B376C401}"/>
+              </a:ext>
+            </a:extLst>
+          </p:cNvPr>
+          <p:cNvSpPr txBox="1"/>
+          <p:nvPr/>
+        </p:nvSpPr>
+        <p:spPr>
+          <a:xfrm>
+            <a:off x="7007685" y="5494710"/>
+            <a:ext cx="1371600" cy="307777"/>
+          </a:xfrm>
+          <a:prstGeom prst="rect">
+            <a:avLst/>
+          </a:prstGeom>
+          <a:noFill/>
+        </p:spPr>
+        <p:txBody>
+          <a:bodyPr wrap="square" rtlCol="0">
+            <a:spAutoFit/>
+          </a:bodyPr>
+          <a:lstStyle/>
+          <a:p>
+            <a:r>
+              <a:rPr lang="en-GB" sz="1400" dirty="0"/>
+              <a:t>Mode 9 (TM)</a:t>
+            </a:r>
+          </a:p>
+        </p:txBody>
+      </p:sp>
+      <p:sp>
+        <p:nvSpPr>
+          <p:cNvPr id="8" name="TextBox 7">
+            <a:extLst>
+              <a:ext uri="{FF2B5EF4-FFF2-40B4-BE49-F238E27FC236}">
+                <a16:creationId xmlns:a16="http://schemas.microsoft.com/office/drawing/2014/main" id="{FD788C51-751B-622E-773A-565E3906D85C}"/>
+              </a:ext>
+            </a:extLst>
+          </p:cNvPr>
+          <p:cNvSpPr txBox="1"/>
+          <p:nvPr/>
+        </p:nvSpPr>
+        <p:spPr>
+          <a:xfrm>
+            <a:off x="9947621" y="5494709"/>
+            <a:ext cx="1371600" cy="307777"/>
+          </a:xfrm>
+          <a:prstGeom prst="rect">
+            <a:avLst/>
+          </a:prstGeom>
+          <a:noFill/>
+        </p:spPr>
+        <p:txBody>
+          <a:bodyPr wrap="square" rtlCol="0">
+            <a:spAutoFit/>
+          </a:bodyPr>
+          <a:lstStyle/>
+          <a:p>
+            <a:r>
+              <a:rPr lang="en-GB" sz="1400" dirty="0"/>
+              <a:t>Mode 11 (TM)</a:t>
+            </a:r>
+          </a:p>
+        </p:txBody>
+      </p:sp>
+      <p:sp>
+        <p:nvSpPr>
+          <p:cNvPr id="9" name="TextBox 8">
+            <a:extLst>
+              <a:ext uri="{FF2B5EF4-FFF2-40B4-BE49-F238E27FC236}">
+                <a16:creationId xmlns:a16="http://schemas.microsoft.com/office/drawing/2014/main" id="{7283C3A2-A8A6-B131-3644-A15C8EBE1C8B}"/>
+              </a:ext>
+            </a:extLst>
+          </p:cNvPr>
+          <p:cNvSpPr txBox="1"/>
+          <p:nvPr/>
+        </p:nvSpPr>
+        <p:spPr>
+          <a:xfrm>
+            <a:off x="7007685" y="3119577"/>
+            <a:ext cx="1371600" cy="307777"/>
+          </a:xfrm>
+          <a:prstGeom prst="rect">
+            <a:avLst/>
+          </a:prstGeom>
+          <a:noFill/>
+        </p:spPr>
+        <p:txBody>
+          <a:bodyPr wrap="square" rtlCol="0">
+            <a:spAutoFit/>
+          </a:bodyPr>
+          <a:lstStyle/>
+          <a:p>
+            <a:r>
+              <a:rPr lang="en-GB" sz="1400" dirty="0"/>
+              <a:t>Mode 0 (TE)</a:t>
+            </a:r>
+          </a:p>
+        </p:txBody>
+      </p:sp>
+      <p:sp>
+        <p:nvSpPr>
+          <p:cNvPr id="10" name="TextBox 9">
+            <a:extLst>
+              <a:ext uri="{FF2B5EF4-FFF2-40B4-BE49-F238E27FC236}">
+                <a16:creationId xmlns:a16="http://schemas.microsoft.com/office/drawing/2014/main" id="{C7C5C488-970C-A6EA-C5D4-DAD48BD89D35}"/>
+              </a:ext>
+            </a:extLst>
+          </p:cNvPr>
+          <p:cNvSpPr txBox="1"/>
+          <p:nvPr/>
+        </p:nvSpPr>
+        <p:spPr>
+          <a:xfrm>
+            <a:off x="708581" y="2497396"/>
+            <a:ext cx="4854019" cy="1600438"/>
+          </a:xfrm>
+          <a:prstGeom prst="rect">
+            <a:avLst/>
+          </a:prstGeom>
+          <a:noFill/>
+        </p:spPr>
+        <p:txBody>
+          <a:bodyPr wrap="square" rtlCol="0">
+            <a:spAutoFit/>
+          </a:bodyPr>
+          <a:lstStyle/>
+          <a:p>
+            <a:r>
+              <a:rPr lang="en-GB" sz="1400" dirty="0"/>
+              <a:t>La </a:t>
+            </a:r>
+            <a:r>
+              <a:rPr lang="en-GB" sz="1400" dirty="0" err="1"/>
+              <a:t>distancia</a:t>
+            </a:r>
+            <a:r>
+              <a:rPr lang="en-GB" sz="1400" dirty="0"/>
+              <a:t> de batido para </a:t>
+            </a:r>
+            <a:r>
+              <a:rPr lang="en-GB" sz="1400" dirty="0" err="1"/>
+              <a:t>los</a:t>
+            </a:r>
+            <a:r>
+              <a:rPr lang="en-GB" sz="1400" dirty="0"/>
+              <a:t> </a:t>
+            </a:r>
+            <a:r>
+              <a:rPr lang="en-GB" sz="1400" dirty="0" err="1"/>
+              <a:t>modos</a:t>
+            </a:r>
+            <a:r>
+              <a:rPr lang="en-GB" sz="1400" dirty="0"/>
+              <a:t> TE es de 219.411 </a:t>
+            </a:r>
+            <a:r>
+              <a:rPr lang="en-GB" sz="1400" dirty="0" err="1"/>
+              <a:t>micras</a:t>
+            </a:r>
+            <a:r>
+              <a:rPr lang="en-GB" sz="1400" dirty="0"/>
+              <a:t> y para </a:t>
+            </a:r>
+            <a:r>
+              <a:rPr lang="en-GB" sz="1400" dirty="0" err="1"/>
+              <a:t>los</a:t>
+            </a:r>
+            <a:r>
+              <a:rPr lang="en-GB" sz="1400" dirty="0"/>
+              <a:t> </a:t>
+            </a:r>
+            <a:r>
+              <a:rPr lang="en-GB" sz="1400" dirty="0" err="1"/>
+              <a:t>modos</a:t>
+            </a:r>
+            <a:r>
+              <a:rPr lang="en-GB" sz="1400" dirty="0"/>
+              <a:t> TM es de 82.231 </a:t>
+            </a:r>
+            <a:r>
+              <a:rPr lang="en-GB" sz="1400" dirty="0" err="1"/>
+              <a:t>micras</a:t>
+            </a:r>
+            <a:r>
+              <a:rPr lang="en-GB" sz="1400" dirty="0"/>
+              <a:t>, </a:t>
+            </a:r>
+            <a:r>
+              <a:rPr lang="en-GB" sz="1400" dirty="0" err="1"/>
+              <a:t>por</a:t>
+            </a:r>
+            <a:r>
+              <a:rPr lang="en-GB" sz="1400" dirty="0"/>
+              <a:t> lo </a:t>
+            </a:r>
+            <a:r>
+              <a:rPr lang="en-GB" sz="1400" dirty="0" err="1"/>
+              <a:t>que</a:t>
+            </a:r>
+            <a:r>
+              <a:rPr lang="en-GB" sz="1400" dirty="0"/>
+              <a:t> </a:t>
+            </a:r>
+            <a:r>
+              <a:rPr lang="en-GB" sz="1400" dirty="0" err="1"/>
+              <a:t>el</a:t>
+            </a:r>
+            <a:r>
+              <a:rPr lang="en-GB" sz="1400" dirty="0"/>
+              <a:t> </a:t>
+            </a:r>
+            <a:r>
+              <a:rPr lang="en-GB" sz="1400" dirty="0" err="1"/>
+              <a:t>dispositivo</a:t>
+            </a:r>
+            <a:r>
+              <a:rPr lang="en-GB" sz="1400" dirty="0"/>
+              <a:t> se </a:t>
+            </a:r>
+            <a:r>
+              <a:rPr lang="en-GB" sz="1400" dirty="0" err="1"/>
+              <a:t>comporta</a:t>
+            </a:r>
+            <a:r>
+              <a:rPr lang="en-GB" sz="1400" dirty="0"/>
+              <a:t> </a:t>
+            </a:r>
+            <a:r>
+              <a:rPr lang="en-GB" sz="1400" dirty="0" err="1"/>
+              <a:t>muy</a:t>
+            </a:r>
+            <a:r>
+              <a:rPr lang="en-GB" sz="1400" dirty="0"/>
+              <a:t> </a:t>
+            </a:r>
+            <a:r>
+              <a:rPr lang="en-GB" sz="1400" dirty="0" err="1"/>
+              <a:t>diferente</a:t>
+            </a:r>
+            <a:r>
+              <a:rPr lang="en-GB" sz="1400" dirty="0"/>
+              <a:t> para ambas </a:t>
+            </a:r>
+            <a:r>
+              <a:rPr lang="en-GB" sz="1400" dirty="0" err="1"/>
+              <a:t>polarizaciones</a:t>
+            </a:r>
+            <a:r>
+              <a:rPr lang="en-GB" sz="1400" dirty="0"/>
+              <a:t>.</a:t>
+            </a:r>
+          </a:p>
+          <a:p>
+            <a:endParaRPr lang="en-GB" sz="1400" dirty="0"/>
+          </a:p>
+          <a:p>
+            <a:r>
+              <a:rPr lang="en-GB" sz="1400" dirty="0"/>
+              <a:t>Esta </a:t>
+            </a:r>
+            <a:r>
+              <a:rPr lang="en-GB" sz="1400" dirty="0" err="1"/>
+              <a:t>distancia</a:t>
+            </a:r>
+            <a:r>
+              <a:rPr lang="en-GB" sz="1400" dirty="0"/>
+              <a:t> se </a:t>
+            </a:r>
+            <a:r>
+              <a:rPr lang="en-GB" sz="1400" dirty="0" err="1"/>
+              <a:t>obtiene</a:t>
+            </a:r>
+            <a:r>
+              <a:rPr lang="en-GB" sz="1400" dirty="0"/>
+              <a:t> </a:t>
+            </a:r>
+            <a:r>
+              <a:rPr lang="en-GB" sz="1400" dirty="0" err="1"/>
+              <a:t>dividiendo</a:t>
+            </a:r>
+            <a:r>
+              <a:rPr lang="en-GB" sz="1400" dirty="0"/>
+              <a:t> 0.5*lambda entre la </a:t>
+            </a:r>
+            <a:r>
+              <a:rPr lang="en-GB" sz="1400" dirty="0" err="1"/>
+              <a:t>diferencia</a:t>
+            </a:r>
+            <a:r>
+              <a:rPr lang="en-GB" sz="1400" dirty="0"/>
+              <a:t> de </a:t>
+            </a:r>
+            <a:r>
+              <a:rPr lang="en-GB" sz="1400" dirty="0" err="1"/>
+              <a:t>índices</a:t>
+            </a:r>
+            <a:r>
+              <a:rPr lang="en-GB" sz="1400" dirty="0"/>
+              <a:t> </a:t>
+            </a:r>
+            <a:r>
+              <a:rPr lang="en-GB" sz="1400" dirty="0" err="1"/>
+              <a:t>efectivos</a:t>
+            </a:r>
+            <a:r>
+              <a:rPr lang="en-GB" sz="1400" dirty="0"/>
+              <a:t> (</a:t>
+            </a:r>
+            <a:r>
+              <a:rPr lang="en-GB" sz="1400" dirty="0" err="1"/>
+              <a:t>parte</a:t>
+            </a:r>
+            <a:r>
+              <a:rPr lang="en-GB" sz="1400" dirty="0"/>
+              <a:t> real) de ambos </a:t>
+            </a:r>
+            <a:r>
+              <a:rPr lang="en-GB" sz="1400" dirty="0" err="1"/>
+              <a:t>primeros</a:t>
+            </a:r>
+            <a:r>
+              <a:rPr lang="en-GB" sz="1400" dirty="0"/>
+              <a:t> </a:t>
+            </a:r>
+            <a:r>
+              <a:rPr lang="en-GB" sz="1400" dirty="0" err="1"/>
+              <a:t>modos</a:t>
+            </a:r>
+            <a:r>
+              <a:rPr lang="en-GB" sz="1400" dirty="0"/>
+              <a:t> de la </a:t>
+            </a:r>
+            <a:r>
+              <a:rPr lang="en-GB" sz="1400" dirty="0" err="1"/>
+              <a:t>respectiva</a:t>
+            </a:r>
+            <a:r>
+              <a:rPr lang="en-GB" sz="1400" dirty="0"/>
+              <a:t> </a:t>
+            </a:r>
+            <a:r>
+              <a:rPr lang="en-GB" sz="1400" dirty="0" err="1"/>
+              <a:t>polarización</a:t>
+            </a:r>
+            <a:r>
+              <a:rPr lang="en-GB" sz="1400" dirty="0"/>
+              <a:t>.</a:t>
+            </a:r>
+          </a:p>
+        </p:txBody>
+      </p:sp>
+      <p:pic>
+        <p:nvPicPr>
+          <p:cNvPr id="11" name="Picture 10" descr="A purple rectangular with yellow lines&#10;&#10;AI-generated content may be incorrect.">
+            <a:extLst>
+              <a:ext uri="{FF2B5EF4-FFF2-40B4-BE49-F238E27FC236}">
+                <a16:creationId xmlns:a16="http://schemas.microsoft.com/office/drawing/2014/main" id="{C8F7169F-20D7-2356-B8D1-8422B894622A}"/>
+              </a:ext>
+            </a:extLst>
+          </p:cNvPr>
+          <p:cNvPicPr>
+            <a:picLocks noChangeAspect="1"/>
+          </p:cNvPicPr>
+          <p:nvPr/>
+        </p:nvPicPr>
+        <p:blipFill>
+          <a:blip r:embed="rId5"/>
+          <a:stretch>
+            <a:fillRect/>
+          </a:stretch>
+        </p:blipFill>
+        <p:spPr>
+          <a:xfrm>
+            <a:off x="3633344" y="841823"/>
+            <a:ext cx="2057400" cy="1479350"/>
+          </a:xfrm>
+          <a:prstGeom prst="rect">
+            <a:avLst/>
+          </a:prstGeom>
+        </p:spPr>
+      </p:pic>
+      <p:pic>
+        <p:nvPicPr>
+          <p:cNvPr id="12" name="Picture 11" descr="A graph of a number of numbers&#10;&#10;AI-generated content may be incorrect.">
+            <a:extLst>
+              <a:ext uri="{FF2B5EF4-FFF2-40B4-BE49-F238E27FC236}">
+                <a16:creationId xmlns:a16="http://schemas.microsoft.com/office/drawing/2014/main" id="{F5F9A9FF-F816-6299-FF38-7470682BA938}"/>
+              </a:ext>
+            </a:extLst>
+          </p:cNvPr>
+          <p:cNvPicPr>
+            <a:picLocks noChangeAspect="1"/>
+          </p:cNvPicPr>
+          <p:nvPr/>
+        </p:nvPicPr>
+        <p:blipFill>
+          <a:blip r:embed="rId6"/>
+          <a:stretch>
+            <a:fillRect/>
+          </a:stretch>
+        </p:blipFill>
+        <p:spPr>
+          <a:xfrm>
+            <a:off x="6359043" y="1105058"/>
+            <a:ext cx="2577448" cy="1839684"/>
+          </a:xfrm>
+          <a:prstGeom prst="rect">
+            <a:avLst/>
+          </a:prstGeom>
+        </p:spPr>
+      </p:pic>
+      <p:pic>
+        <p:nvPicPr>
+          <p:cNvPr id="13" name="Picture 12" descr="A graph showing a number of red and blue circles&#10;&#10;AI-generated content may be incorrect.">
+            <a:extLst>
+              <a:ext uri="{FF2B5EF4-FFF2-40B4-BE49-F238E27FC236}">
+                <a16:creationId xmlns:a16="http://schemas.microsoft.com/office/drawing/2014/main" id="{3B51EC55-B725-F3C2-F5A8-C447A84F34EA}"/>
+              </a:ext>
+            </a:extLst>
+          </p:cNvPr>
+          <p:cNvPicPr>
+            <a:picLocks noChangeAspect="1"/>
+          </p:cNvPicPr>
+          <p:nvPr/>
+        </p:nvPicPr>
+        <p:blipFill>
+          <a:blip r:embed="rId7"/>
+          <a:stretch>
+            <a:fillRect/>
+          </a:stretch>
+        </p:blipFill>
+        <p:spPr>
+          <a:xfrm>
+            <a:off x="9117688" y="1171164"/>
+            <a:ext cx="2577448" cy="1803286"/>
+          </a:xfrm>
+          <a:prstGeom prst="rect">
+            <a:avLst/>
+          </a:prstGeom>
+        </p:spPr>
+      </p:pic>
+      <p:pic>
+        <p:nvPicPr>
+          <p:cNvPr id="14" name="Picture 13" descr="A graph of a bar and a bar of numbers&#10;&#10;AI-generated content may be incorrect.">
+            <a:extLst>
+              <a:ext uri="{FF2B5EF4-FFF2-40B4-BE49-F238E27FC236}">
+                <a16:creationId xmlns:a16="http://schemas.microsoft.com/office/drawing/2014/main" id="{92EA841E-0C6D-3B8C-AC7B-A29000C30424}"/>
+              </a:ext>
+            </a:extLst>
+          </p:cNvPr>
+          <p:cNvPicPr>
+            <a:picLocks noChangeAspect="1"/>
+          </p:cNvPicPr>
+          <p:nvPr/>
+        </p:nvPicPr>
+        <p:blipFill>
+          <a:blip r:embed="rId8"/>
+          <a:stretch>
+            <a:fillRect/>
+          </a:stretch>
+        </p:blipFill>
+        <p:spPr>
+          <a:xfrm>
+            <a:off x="6395304" y="3717343"/>
+            <a:ext cx="2596362" cy="1800330"/>
+          </a:xfrm>
+          <a:prstGeom prst="rect">
+            <a:avLst/>
+          </a:prstGeom>
+        </p:spPr>
+      </p:pic>
+      <p:pic>
+        <p:nvPicPr>
+          <p:cNvPr id="15" name="Picture 14" descr="A graph of a bar with numbers and a graph&#10;&#10;AI-generated content may be incorrect.">
+            <a:extLst>
+              <a:ext uri="{FF2B5EF4-FFF2-40B4-BE49-F238E27FC236}">
+                <a16:creationId xmlns:a16="http://schemas.microsoft.com/office/drawing/2014/main" id="{53195A5D-9251-8706-4D17-5E69077DEAB5}"/>
+              </a:ext>
+            </a:extLst>
+          </p:cNvPr>
+          <p:cNvPicPr>
+            <a:picLocks noChangeAspect="1"/>
+          </p:cNvPicPr>
+          <p:nvPr/>
+        </p:nvPicPr>
+        <p:blipFill>
+          <a:blip r:embed="rId9"/>
+          <a:stretch>
+            <a:fillRect/>
+          </a:stretch>
+        </p:blipFill>
+        <p:spPr>
+          <a:xfrm>
+            <a:off x="9311640" y="3780934"/>
+            <a:ext cx="2498382" cy="1732390"/>
+          </a:xfrm>
+          <a:prstGeom prst="rect">
+            <a:avLst/>
+          </a:prstGeom>
+        </p:spPr>
+      </p:pic>
+      <p:pic>
+        <p:nvPicPr>
+          <p:cNvPr id="18" name="Picture 17" descr="A screenshot of a computer program&#10;&#10;AI-generated content may be incorrect.">
+            <a:extLst>
+              <a:ext uri="{FF2B5EF4-FFF2-40B4-BE49-F238E27FC236}">
+                <a16:creationId xmlns:a16="http://schemas.microsoft.com/office/drawing/2014/main" id="{C64D9140-64F4-F09C-957E-AAD7588AF4EA}"/>
+              </a:ext>
+            </a:extLst>
+          </p:cNvPr>
+          <p:cNvPicPr>
+            <a:picLocks noChangeAspect="1"/>
+          </p:cNvPicPr>
+          <p:nvPr/>
+        </p:nvPicPr>
+        <p:blipFill>
+          <a:blip r:embed="rId10"/>
+          <a:stretch>
+            <a:fillRect/>
+          </a:stretch>
+        </p:blipFill>
+        <p:spPr>
+          <a:xfrm>
+            <a:off x="725863" y="4272486"/>
+            <a:ext cx="3301245" cy="1800330"/>
+          </a:xfrm>
+          <a:prstGeom prst="rect">
+            <a:avLst/>
+          </a:prstGeom>
+        </p:spPr>
+      </p:pic>
+    </p:spTree>
+    <p:extLst>
+      <p:ext uri="{BB962C8B-B14F-4D97-AF65-F5344CB8AC3E}">
+        <p14:creationId xmlns:p14="http://schemas.microsoft.com/office/powerpoint/2010/main" val="882574914"/>
+      </p:ext>
+    </p:extLst>
+  </p:cSld>
+  <p:clrMapOvr>
+    <a:masterClrMapping/>
+  </p:clrMapOvr>
+</p:sld>
+</file>
+
+<file path=ppt/slides/slide7.xml><?xml version="1.0" encoding="utf-8"?>
 <p:sld xmlns:a="http://schemas.openxmlformats.org/drawingml/2006/main" xmlns:r="http://schemas.openxmlformats.org/officeDocument/2006/relationships" xmlns:p="http://schemas.openxmlformats.org/presentationml/2006/main">
   <p:cSld>
     <p:spTree>
@@ -5857,7 +10389,7 @@
           <a:p>
             <a:fld id="{B6F15528-21DE-4FAA-801E-634DDDAF4B2B}" type="slidenum">
               <a:rPr lang="es-ES" smtClean="0"/>
-              <a:t>5</a:t>
+              <a:t>7</a:t>
             </a:fld>
             <a:endParaRPr lang="es-ES"/>
           </a:p>

--- a/LabBook_020.pptx
+++ b/LabBook_020.pptx
@@ -299,7 +299,7 @@
           <a:p>
             <a:fld id="{8438F8DC-35B0-48E6-A86E-42F1F08DD00F}" type="datetimeFigureOut">
               <a:rPr lang="es-ES" smtClean="0"/>
-              <a:t>16/02/2026</a:t>
+              <a:t>02/03/2026</a:t>
             </a:fld>
             <a:endParaRPr lang="es-ES"/>
           </a:p>
@@ -476,7 +476,7 @@
           <a:p>
             <a:fld id="{FACBDC12-F39B-4B97-8F4D-6734F9D366FF}" type="datetimeFigureOut">
               <a:rPr lang="es-ES" smtClean="0"/>
-              <a:t>16/02/2026</a:t>
+              <a:t>02/03/2026</a:t>
             </a:fld>
             <a:endParaRPr lang="es-ES"/>
           </a:p>
@@ -4962,8 +4962,8 @@
           </a:p>
         </p:txBody>
       </p:sp>
-      <mc:AlternateContent xmlns:mc="http://schemas.openxmlformats.org/markup-compatibility/2006">
-        <mc:Choice xmlns:a14="http://schemas.microsoft.com/office/drawing/2010/main" Requires="a14">
+      <mc:AlternateContent xmlns:mc="http://schemas.openxmlformats.org/markup-compatibility/2006" xmlns:a14="http://schemas.microsoft.com/office/drawing/2010/main">
+        <mc:Choice Requires="a14">
           <p:sp>
             <p:nvSpPr>
               <p:cNvPr id="4" name="Marcador de texto 2">
@@ -5189,7 +5189,7 @@
             </p:txBody>
           </p:sp>
         </mc:Choice>
-        <mc:Fallback>
+        <mc:Fallback xmlns="">
           <p:sp>
             <p:nvSpPr>
               <p:cNvPr id="4" name="Marcador de texto 2">
@@ -7905,8 +7905,8 @@
           </a:p>
         </p:txBody>
       </p:sp>
-      <mc:AlternateContent xmlns:mc="http://schemas.openxmlformats.org/markup-compatibility/2006">
-        <mc:Choice xmlns:a14="http://schemas.microsoft.com/office/drawing/2010/main" Requires="a14">
+      <mc:AlternateContent xmlns:mc="http://schemas.openxmlformats.org/markup-compatibility/2006" xmlns:a14="http://schemas.microsoft.com/office/drawing/2010/main">
+        <mc:Choice Requires="a14">
           <p:sp>
             <p:nvSpPr>
               <p:cNvPr id="4" name="Marcador de texto 2">
@@ -8140,7 +8140,7 @@
             </p:txBody>
           </p:sp>
         </mc:Choice>
-        <mc:Fallback>
+        <mc:Fallback xmlns="">
           <p:sp>
             <p:nvSpPr>
               <p:cNvPr id="4" name="Marcador de texto 2">
@@ -8200,7 +8200,7 @@
         <p:spPr>
           <a:xfrm>
             <a:off x="583019" y="3316913"/>
-            <a:ext cx="11199971" cy="2677656"/>
+            <a:ext cx="11199971" cy="2308324"/>
           </a:xfrm>
           <a:prstGeom prst="rect">
             <a:avLst/>
@@ -9414,20 +9414,6 @@
               </a:rPr>
               <a:t> Mode 9 y Mode 11.</a:t>
             </a:r>
-          </a:p>
-          <a:p>
-            <a:pPr algn="just"/>
-            <a:endParaRPr lang="en-US" sz="1200" dirty="0">
-              <a:latin typeface="Arial" panose="020B0604020202020204" pitchFamily="34" charset="0"/>
-              <a:cs typeface="Arial" panose="020B0604020202020204" pitchFamily="34" charset="0"/>
-            </a:endParaRPr>
-          </a:p>
-          <a:p>
-            <a:pPr algn="just"/>
-            <a:endParaRPr lang="en-US" sz="1200" dirty="0">
-              <a:latin typeface="Arial" panose="020B0604020202020204" pitchFamily="34" charset="0"/>
-              <a:cs typeface="Arial" panose="020B0604020202020204" pitchFamily="34" charset="0"/>
-            </a:endParaRPr>
           </a:p>
           <a:p>
             <a:pPr algn="just"/>
